--- a/KIBET_ANNETTE_CCNA3Project.pptx
+++ b/KIBET_ANNETTE_CCNA3Project.pptx
@@ -3094,14 +3094,6 @@
               </a:rPr>
               <a:t>Key Terms </a:t>
             </a:r>
-            <a:endParaRPr lang="en-US" sz="3000" b="1" dirty="0">
-              <a:solidFill>
-                <a:srgbClr val="1E2761"/>
-              </a:solidFill>
-              <a:latin typeface="Cambria" pitchFamily="34" charset="0"/>
-              <a:ea typeface="Cambria" pitchFamily="34" charset="-122"/>
-              <a:cs typeface="Cambria" pitchFamily="34" charset="-120"/>
-            </a:endParaRPr>
           </a:p>
         </p:txBody>
       </p:sp>
@@ -11136,7 +11128,18 @@
                 <a:ea typeface="Calibri" pitchFamily="34" charset="-122"/>
                 <a:cs typeface="Calibri" pitchFamily="34" charset="-120"/>
               </a:rPr>
-              <a:t>A single dedicated connection joins Nairobi and Eldoret. It is the minimum the brief required.</a:t>
+              <a:t>A single dedicated connection joins Nairobi and Eldoret</a:t>
+            </a:r>
+            <a:r>
+              <a:rPr lang="en-US" sz="1400" dirty="0" smtClean="0">
+                <a:solidFill>
+                  <a:srgbClr val="222222"/>
+                </a:solidFill>
+                <a:latin typeface="Calibri" pitchFamily="34" charset="0"/>
+                <a:ea typeface="Calibri" pitchFamily="34" charset="-122"/>
+                <a:cs typeface="Calibri" pitchFamily="34" charset="-120"/>
+              </a:rPr>
+              <a:t>..</a:t>
             </a:r>
             <a:endParaRPr lang="en-US" sz="1400" dirty="0"/>
           </a:p>

--- a/KIBET_ANNETTE_CCNA3Project.pptx
+++ b/KIBET_ANNETTE_CCNA3Project.pptx
@@ -12,14 +12,14 @@
     <p:sldId id="257" r:id="rId3"/>
     <p:sldId id="258" r:id="rId4"/>
     <p:sldId id="259" r:id="rId5"/>
-    <p:sldId id="260" r:id="rId6"/>
+    <p:sldId id="262" r:id="rId6"/>
     <p:sldId id="261" r:id="rId7"/>
-    <p:sldId id="262" r:id="rId8"/>
+    <p:sldId id="260" r:id="rId8"/>
     <p:sldId id="263" r:id="rId9"/>
-    <p:sldId id="264" r:id="rId10"/>
-    <p:sldId id="265" r:id="rId11"/>
-    <p:sldId id="266" r:id="rId12"/>
-    <p:sldId id="267" r:id="rId13"/>
+    <p:sldId id="265" r:id="rId10"/>
+    <p:sldId id="266" r:id="rId11"/>
+    <p:sldId id="267" r:id="rId12"/>
+    <p:sldId id="264" r:id="rId13"/>
     <p:sldId id="270" r:id="rId14"/>
     <p:sldId id="271" r:id="rId15"/>
   </p:sldIdLst>
@@ -380,7 +380,7 @@
           <a:p>
             <a:r>
               <a:rPr lang="en-US" dirty="0"/>
-              <a:t>Optional: one failover screenshot, or run the live demo. Plain-language point: the backup takes over and users notice nothing.</a:t>
+              <a:t>Optional: one annotated failed-ping screenshot. Plain-language point: a visitor can use the network but cannot reach company systems.</a:t>
             </a:r>
           </a:p>
         </p:txBody>
@@ -467,7 +467,7 @@
           <a:p>
             <a:r>
               <a:rPr lang="en-US" dirty="0"/>
-              <a:t>Optional: one annotated failed-ping screenshot. Plain-language point: a visitor can use the network but cannot reach company systems.</a:t>
+              <a:t>This mirrors a real office guest Wi-Fi: visitors are kept apart from company systems.</a:t>
             </a:r>
           </a:p>
         </p:txBody>
@@ -554,7 +554,7 @@
           <a:p>
             <a:r>
               <a:rPr lang="en-US" dirty="0"/>
-              <a:t>This mirrors a real office guest Wi-Fi: visitors are kept apart from company systems.</a:t>
+              <a:t>DHCP is the hotel front desk handing out room numbers. Staff who need a permanent room, like the file server, are given one in advance.</a:t>
             </a:r>
           </a:p>
         </p:txBody>
@@ -1406,7 +1406,7 @@
           <a:p>
             <a:r>
               <a:rPr lang="en-US" dirty="0"/>
-              <a:t>DHCP is the hotel front desk handing out room numbers. Staff who need a permanent room, like the file server, are given one in advance.</a:t>
+              <a:t>Optional: one failover screenshot, or run the live demo. Plain-language point: the backup takes over and users notice nothing.</a:t>
             </a:r>
           </a:p>
         </p:txBody>
@@ -1792,7 +1792,7 @@
         </p:nvSpPr>
         <p:spPr>
           <a:xfrm>
-            <a:off x="914400" y="2148840"/>
+            <a:off x="1509486" y="1280160"/>
             <a:ext cx="10332720" cy="1005840"/>
           </a:xfrm>
           <a:prstGeom prst="rect">
@@ -1809,17 +1809,21 @@
               <a:buNone/>
             </a:pPr>
             <a:r>
-              <a:rPr lang="en-US" sz="3800" b="1" dirty="0">
+              <a:rPr lang="en-US" sz="2400" b="1" dirty="0">
                 <a:solidFill>
                   <a:srgbClr val="FFFFFF"/>
                 </a:solidFill>
-                <a:latin typeface="Cambria" pitchFamily="34" charset="0"/>
-                <a:ea typeface="Cambria" pitchFamily="34" charset="-122"/>
-                <a:cs typeface="Cambria" pitchFamily="34" charset="-120"/>
+                <a:latin typeface="Calibri" panose="020F0502020204030204" pitchFamily="34" charset="0"/>
+                <a:ea typeface="Calibri" panose="020F0502020204030204" pitchFamily="34" charset="0"/>
+                <a:cs typeface="Calibri" panose="020F0502020204030204" pitchFamily="34" charset="0"/>
               </a:rPr>
               <a:t>Nexora Network Infrastructure Initiative</a:t>
             </a:r>
-            <a:endParaRPr lang="en-US" sz="3800" dirty="0"/>
+            <a:endParaRPr lang="en-US" sz="2400" dirty="0">
+              <a:latin typeface="Calibri" panose="020F0502020204030204" pitchFamily="34" charset="0"/>
+              <a:ea typeface="Calibri" panose="020F0502020204030204" pitchFamily="34" charset="0"/>
+              <a:cs typeface="Calibri" panose="020F0502020204030204" pitchFamily="34" charset="0"/>
+            </a:endParaRPr>
           </a:p>
         </p:txBody>
       </p:sp>
@@ -1848,7 +1852,7 @@
               <a:buNone/>
             </a:pPr>
             <a:r>
-              <a:rPr lang="en-US" sz="1800" i="1" dirty="0">
+              <a:rPr lang="en-US" sz="2400" i="1" dirty="0">
                 <a:solidFill>
                   <a:srgbClr val="CADCFC"/>
                 </a:solidFill>
@@ -1858,7 +1862,7 @@
               </a:rPr>
               <a:t>CCNA Capstone Project — Design, Build &amp; Secure an Enterprise Network</a:t>
             </a:r>
-            <a:endParaRPr lang="en-US" sz="1800" dirty="0"/>
+            <a:endParaRPr lang="en-US" sz="2400" dirty="0"/>
           </a:p>
         </p:txBody>
       </p:sp>
@@ -1890,7 +1894,7 @@
               <a:buNone/>
             </a:pPr>
             <a:r>
-              <a:rPr lang="en-US" sz="1400" dirty="0">
+              <a:rPr lang="en-US" sz="2400" dirty="0">
                 <a:solidFill>
                   <a:srgbClr val="CADCFC"/>
                 </a:solidFill>
@@ -1900,7 +1904,7 @@
               </a:rPr>
               <a:t>Nexora Technologies LTD</a:t>
             </a:r>
-            <a:endParaRPr lang="en-US" sz="1400" dirty="0"/>
+            <a:endParaRPr lang="en-US" sz="2400" dirty="0"/>
           </a:p>
           <a:p>
             <a:pPr marL="0" indent="0" algn="ctr">
@@ -1910,7 +1914,7 @@
               <a:buNone/>
             </a:pPr>
             <a:r>
-              <a:rPr lang="en-US" sz="1400" dirty="0">
+              <a:rPr lang="en-US" sz="2400" dirty="0">
                 <a:solidFill>
                   <a:srgbClr val="CADCFC"/>
                 </a:solidFill>
@@ -1920,7 +1924,7 @@
               </a:rPr>
               <a:t>Prepared by: Kibet Jerop Annette</a:t>
             </a:r>
-            <a:endParaRPr lang="en-US" sz="1400" dirty="0"/>
+            <a:endParaRPr lang="en-US" sz="2400" dirty="0"/>
           </a:p>
           <a:p>
             <a:pPr marL="0" indent="0" algn="ctr">
@@ -1930,7 +1934,7 @@
               <a:buNone/>
             </a:pPr>
             <a:r>
-              <a:rPr lang="en-US" sz="1400" dirty="0">
+              <a:rPr lang="en-US" sz="2400" dirty="0">
                 <a:solidFill>
                   <a:srgbClr val="CADCFC"/>
                 </a:solidFill>
@@ -1940,7 +1944,7 @@
               </a:rPr>
               <a:t>October 2026</a:t>
             </a:r>
-            <a:endParaRPr lang="en-US" sz="1400" dirty="0"/>
+            <a:endParaRPr lang="en-US" sz="2400" dirty="0"/>
           </a:p>
         </p:txBody>
       </p:sp>
@@ -1953,284 +1957,6 @@
 </file>
 
 <file path=ppt/slides/slide10.xml><?xml version="1.0" encoding="utf-8"?>
-<p:sld xmlns:a="http://schemas.openxmlformats.org/drawingml/2006/main" xmlns:r="http://schemas.openxmlformats.org/officeDocument/2006/relationships" xmlns:p="http://schemas.openxmlformats.org/presentationml/2006/main">
-  <p:cSld name="Slide 10">
-    <p:bg>
-      <p:bgPr>
-        <a:solidFill>
-          <a:srgbClr val="FFFFFF"/>
-        </a:solidFill>
-        <a:effectLst/>
-      </p:bgPr>
-    </p:bg>
-    <p:spTree>
-      <p:nvGrpSpPr>
-        <p:cNvPr id="1" name=""/>
-        <p:cNvGrpSpPr/>
-        <p:nvPr/>
-      </p:nvGrpSpPr>
-      <p:grpSpPr>
-        <a:xfrm>
-          <a:off x="0" y="0"/>
-          <a:ext cx="0" cy="0"/>
-          <a:chOff x="0" y="0"/>
-          <a:chExt cx="0" cy="0"/>
-        </a:xfrm>
-      </p:grpSpPr>
-      <p:sp>
-        <p:nvSpPr>
-          <p:cNvPr id="2" name="Text 0"/>
-          <p:cNvSpPr txBox="1"/>
-          <p:nvPr/>
-        </p:nvSpPr>
-        <p:spPr>
-          <a:xfrm>
-            <a:off x="548640" y="320040"/>
-            <a:ext cx="11064240" cy="685800"/>
-          </a:xfrm>
-          <a:prstGeom prst="rect">
-            <a:avLst/>
-          </a:prstGeom>
-          <a:noFill/>
-          <a:ln/>
-        </p:spPr>
-        <p:txBody>
-          <a:bodyPr wrap="square" lIns="0" tIns="0" rIns="0" bIns="0" rtlCol="0" anchor="ctr"/>
-          <a:lstStyle/>
-          <a:p>
-            <a:pPr marL="0" indent="0" algn="l">
-              <a:buNone/>
-            </a:pPr>
-            <a:r>
-              <a:rPr lang="en-US" sz="3000" b="1" dirty="0">
-                <a:solidFill>
-                  <a:srgbClr val="1E2761"/>
-                </a:solidFill>
-                <a:latin typeface="Cambria" pitchFamily="34" charset="0"/>
-                <a:ea typeface="Cambria" pitchFamily="34" charset="-122"/>
-                <a:cs typeface="Cambria" pitchFamily="34" charset="-120"/>
-              </a:rPr>
-              <a:t>Redundancy: HSRP &amp; EtherChannel</a:t>
-            </a:r>
-            <a:endParaRPr lang="en-US" sz="3000" dirty="0"/>
-          </a:p>
-        </p:txBody>
-      </p:sp>
-      <p:sp>
-        <p:nvSpPr>
-          <p:cNvPr id="3" name="Shape 1"/>
-          <p:cNvSpPr/>
-          <p:nvPr/>
-        </p:nvSpPr>
-        <p:spPr>
-          <a:xfrm>
-            <a:off x="548640" y="1463040"/>
-            <a:ext cx="5394960" cy="4114800"/>
-          </a:xfrm>
-          <a:prstGeom prst="roundRect">
-            <a:avLst>
-              <a:gd name="adj" fmla="val 2667"/>
-            </a:avLst>
-          </a:prstGeom>
-          <a:solidFill>
-            <a:srgbClr val="CADCFC"/>
-          </a:solidFill>
-          <a:ln/>
-        </p:spPr>
-      </p:sp>
-      <p:sp>
-        <p:nvSpPr>
-          <p:cNvPr id="6" name="Text 3"/>
-          <p:cNvSpPr txBox="1"/>
-          <p:nvPr/>
-        </p:nvSpPr>
-        <p:spPr>
-          <a:xfrm>
-            <a:off x="548640" y="1965960"/>
-            <a:ext cx="5394960" cy="457200"/>
-          </a:xfrm>
-          <a:prstGeom prst="rect">
-            <a:avLst/>
-          </a:prstGeom>
-          <a:noFill/>
-          <a:ln/>
-        </p:spPr>
-        <p:txBody>
-          <a:bodyPr wrap="square" lIns="0" tIns="0" rIns="0" bIns="0" rtlCol="0" anchor="ctr"/>
-          <a:lstStyle/>
-          <a:p>
-            <a:pPr marL="0" indent="0" algn="ctr">
-              <a:buNone/>
-            </a:pPr>
-            <a:r>
-              <a:rPr lang="en-US" sz="1900" b="1" dirty="0">
-                <a:solidFill>
-                  <a:srgbClr val="1E2761"/>
-                </a:solidFill>
-                <a:latin typeface="Cambria" pitchFamily="34" charset="0"/>
-                <a:ea typeface="Cambria" pitchFamily="34" charset="-122"/>
-                <a:cs typeface="Cambria" pitchFamily="34" charset="-120"/>
-              </a:rPr>
-              <a:t>Backup Router (HSRP)</a:t>
-            </a:r>
-            <a:endParaRPr lang="en-US" sz="1900" dirty="0"/>
-          </a:p>
-        </p:txBody>
-      </p:sp>
-      <p:sp>
-        <p:nvSpPr>
-          <p:cNvPr id="7" name="Text 4"/>
-          <p:cNvSpPr txBox="1"/>
-          <p:nvPr/>
-        </p:nvSpPr>
-        <p:spPr>
-          <a:xfrm>
-            <a:off x="1005840" y="2423160"/>
-            <a:ext cx="4480560" cy="2011680"/>
-          </a:xfrm>
-          <a:prstGeom prst="rect">
-            <a:avLst/>
-          </a:prstGeom>
-          <a:noFill/>
-          <a:ln/>
-        </p:spPr>
-        <p:txBody>
-          <a:bodyPr wrap="square" lIns="0" tIns="0" rIns="0" bIns="0" rtlCol="0" anchor="ctr"/>
-          <a:lstStyle/>
-          <a:p>
-            <a:pPr marL="0" indent="0" algn="l">
-              <a:lnSpc>
-                <a:spcPct val="125000"/>
-              </a:lnSpc>
-              <a:buNone/>
-            </a:pPr>
-            <a:r>
-              <a:rPr lang="en-US" sz="1300" dirty="0">
-                <a:solidFill>
-                  <a:srgbClr val="222222"/>
-                </a:solidFill>
-                <a:latin typeface="Calibri" pitchFamily="34" charset="0"/>
-                <a:ea typeface="Calibri" pitchFamily="34" charset="-122"/>
-                <a:cs typeface="Calibri" pitchFamily="34" charset="-120"/>
-              </a:rPr>
-              <a:t>Each office has two routers sharing one address, like a duty-desk phone number. If the main router fails, the backup answers the same number within seconds and nobody has to change anything.</a:t>
-            </a:r>
-            <a:endParaRPr lang="en-US" sz="1300" dirty="0"/>
-          </a:p>
-        </p:txBody>
-      </p:sp>
-      <p:sp>
-        <p:nvSpPr>
-          <p:cNvPr id="8" name="Shape 5"/>
-          <p:cNvSpPr/>
-          <p:nvPr/>
-        </p:nvSpPr>
-        <p:spPr>
-          <a:xfrm>
-            <a:off x="6217920" y="1463040"/>
-            <a:ext cx="5394960" cy="4114800"/>
-          </a:xfrm>
-          <a:prstGeom prst="roundRect">
-            <a:avLst>
-              <a:gd name="adj" fmla="val 2667"/>
-            </a:avLst>
-          </a:prstGeom>
-          <a:solidFill>
-            <a:srgbClr val="CADCFC"/>
-          </a:solidFill>
-          <a:ln/>
-        </p:spPr>
-      </p:sp>
-      <p:sp>
-        <p:nvSpPr>
-          <p:cNvPr id="11" name="Text 7"/>
-          <p:cNvSpPr txBox="1"/>
-          <p:nvPr/>
-        </p:nvSpPr>
-        <p:spPr>
-          <a:xfrm>
-            <a:off x="5943600" y="2057400"/>
-            <a:ext cx="5394960" cy="457200"/>
-          </a:xfrm>
-          <a:prstGeom prst="rect">
-            <a:avLst/>
-          </a:prstGeom>
-          <a:noFill/>
-          <a:ln/>
-        </p:spPr>
-        <p:txBody>
-          <a:bodyPr wrap="square" lIns="0" tIns="0" rIns="0" bIns="0" rtlCol="0" anchor="ctr"/>
-          <a:lstStyle/>
-          <a:p>
-            <a:pPr marL="0" indent="0" algn="ctr">
-              <a:buNone/>
-            </a:pPr>
-            <a:r>
-              <a:rPr lang="en-US" sz="1900" b="1" dirty="0">
-                <a:solidFill>
-                  <a:srgbClr val="1E2761"/>
-                </a:solidFill>
-                <a:latin typeface="Cambria" pitchFamily="34" charset="0"/>
-                <a:ea typeface="Cambria" pitchFamily="34" charset="-122"/>
-                <a:cs typeface="Cambria" pitchFamily="34" charset="-120"/>
-              </a:rPr>
-              <a:t>Double Cable (EtherChannel)</a:t>
-            </a:r>
-            <a:endParaRPr lang="en-US" sz="1900" dirty="0"/>
-          </a:p>
-        </p:txBody>
-      </p:sp>
-      <p:sp>
-        <p:nvSpPr>
-          <p:cNvPr id="12" name="Text 8"/>
-          <p:cNvSpPr txBox="1"/>
-          <p:nvPr/>
-        </p:nvSpPr>
-        <p:spPr>
-          <a:xfrm>
-            <a:off x="6538642" y="2423160"/>
-            <a:ext cx="4480560" cy="2011680"/>
-          </a:xfrm>
-          <a:prstGeom prst="rect">
-            <a:avLst/>
-          </a:prstGeom>
-          <a:noFill/>
-          <a:ln/>
-        </p:spPr>
-        <p:txBody>
-          <a:bodyPr wrap="square" lIns="0" tIns="0" rIns="0" bIns="0" rtlCol="0" anchor="ctr"/>
-          <a:lstStyle/>
-          <a:p>
-            <a:pPr marL="0" indent="0" algn="l">
-              <a:lnSpc>
-                <a:spcPct val="125000"/>
-              </a:lnSpc>
-              <a:buNone/>
-            </a:pPr>
-            <a:r>
-              <a:rPr lang="en-US" sz="1300" dirty="0">
-                <a:solidFill>
-                  <a:srgbClr val="222222"/>
-                </a:solidFill>
-                <a:latin typeface="Calibri" pitchFamily="34" charset="0"/>
-                <a:ea typeface="Calibri" pitchFamily="34" charset="-122"/>
-                <a:cs typeface="Calibri" pitchFamily="34" charset="-120"/>
-              </a:rPr>
-              <a:t>Two cables between each office's switches work as one wide road. If one cable is cut, traffic keeps flowing on the other with no interruption.</a:t>
-            </a:r>
-            <a:endParaRPr lang="en-US" sz="1300" dirty="0"/>
-          </a:p>
-        </p:txBody>
-      </p:sp>
-    </p:spTree>
-  </p:cSld>
-  <p:clrMapOvr>
-    <a:masterClrMapping/>
-  </p:clrMapOvr>
-</p:sld>
-</file>
-
-<file path=ppt/slides/slide11.xml><?xml version="1.0" encoding="utf-8"?>
 <p:sld xmlns:a="http://schemas.openxmlformats.org/drawingml/2006/main" xmlns:r="http://schemas.openxmlformats.org/officeDocument/2006/relationships" xmlns:p="http://schemas.openxmlformats.org/presentationml/2006/main">
   <p:cSld name="Slide 11">
     <p:bg>
@@ -2341,7 +2067,7 @@
               <a:buNone/>
             </a:pPr>
             <a:r>
-              <a:rPr lang="en-US" sz="1600" b="1" dirty="0">
+              <a:rPr lang="en-US" sz="2000" b="1" dirty="0">
                 <a:solidFill>
                   <a:srgbClr val="1E2761"/>
                 </a:solidFill>
@@ -2351,7 +2077,7 @@
               </a:rPr>
               <a:t>Port Security</a:t>
             </a:r>
-            <a:endParaRPr lang="en-US" sz="1600" dirty="0"/>
+            <a:endParaRPr lang="en-US" sz="2000" dirty="0"/>
           </a:p>
         </p:txBody>
       </p:sp>
@@ -2383,7 +2109,7 @@
               <a:buNone/>
             </a:pPr>
             <a:r>
-              <a:rPr lang="en-US" sz="1250" dirty="0">
+              <a:rPr lang="en-US" sz="2000" dirty="0">
                 <a:solidFill>
                   <a:srgbClr val="222222"/>
                 </a:solidFill>
@@ -2393,7 +2119,7 @@
               </a:rPr>
               <a:t>Each wall socket accepts only its registered device. A stranger's laptop is blocked and logged.</a:t>
             </a:r>
-            <a:endParaRPr lang="en-US" sz="1250" dirty="0"/>
+            <a:endParaRPr lang="en-US" sz="2000" dirty="0"/>
           </a:p>
         </p:txBody>
       </p:sp>
@@ -2427,7 +2153,7 @@
         </p:nvSpPr>
         <p:spPr>
           <a:xfrm>
-            <a:off x="6465627" y="1714500"/>
+            <a:off x="6465627" y="1694180"/>
             <a:ext cx="3657600" cy="411480"/>
           </a:xfrm>
           <a:prstGeom prst="rect">
@@ -2444,7 +2170,7 @@
               <a:buNone/>
             </a:pPr>
             <a:r>
-              <a:rPr lang="en-US" sz="1600" b="1" dirty="0">
+              <a:rPr lang="en-US" sz="2000" b="1" dirty="0">
                 <a:solidFill>
                   <a:srgbClr val="1E2761"/>
                 </a:solidFill>
@@ -2454,7 +2180,7 @@
               </a:rPr>
               <a:t>DHCP Snooping</a:t>
             </a:r>
-            <a:endParaRPr lang="en-US" sz="1600" dirty="0"/>
+            <a:endParaRPr lang="en-US" sz="2000" dirty="0"/>
           </a:p>
         </p:txBody>
       </p:sp>
@@ -2486,7 +2212,7 @@
               <a:buNone/>
             </a:pPr>
             <a:r>
-              <a:rPr lang="en-US" sz="1250" dirty="0">
+              <a:rPr lang="en-US" sz="2000" dirty="0">
                 <a:solidFill>
                   <a:srgbClr val="222222"/>
                 </a:solidFill>
@@ -2496,7 +2222,7 @@
               </a:rPr>
               <a:t>Stops a fake address-giver from misdirecting devices. Only the real one is trusted.</a:t>
             </a:r>
-            <a:endParaRPr lang="en-US" sz="1250" dirty="0"/>
+            <a:endParaRPr lang="en-US" sz="2000" dirty="0"/>
           </a:p>
         </p:txBody>
       </p:sp>
@@ -2547,7 +2273,7 @@
               <a:buNone/>
             </a:pPr>
             <a:r>
-              <a:rPr lang="en-US" sz="1600" b="1" dirty="0">
+              <a:rPr lang="en-US" sz="2000" b="1" dirty="0">
                 <a:solidFill>
                   <a:srgbClr val="1E2761"/>
                 </a:solidFill>
@@ -2557,7 +2283,7 @@
               </a:rPr>
               <a:t>SSH &amp; Hardening</a:t>
             </a:r>
-            <a:endParaRPr lang="en-US" sz="1600" dirty="0"/>
+            <a:endParaRPr lang="en-US" sz="2000" dirty="0"/>
           </a:p>
         </p:txBody>
       </p:sp>
@@ -2589,7 +2315,7 @@
               <a:buNone/>
             </a:pPr>
             <a:r>
-              <a:rPr lang="en-US" sz="1250" dirty="0">
+              <a:rPr lang="en-US" sz="2000" dirty="0">
                 <a:solidFill>
                   <a:srgbClr val="222222"/>
                 </a:solidFill>
@@ -2599,7 +2325,7 @@
               </a:rPr>
               <a:t>Encrypted remote login only, scrambled stored passwords, and a warning banner on every device.</a:t>
             </a:r>
-            <a:endParaRPr lang="en-US" sz="1250" dirty="0"/>
+            <a:endParaRPr lang="en-US" sz="2000" dirty="0"/>
           </a:p>
         </p:txBody>
       </p:sp>
@@ -2650,7 +2376,7 @@
               <a:buNone/>
             </a:pPr>
             <a:r>
-              <a:rPr lang="en-US" sz="1600" b="1" dirty="0">
+              <a:rPr lang="en-US" sz="2000" b="1" dirty="0">
                 <a:solidFill>
                   <a:srgbClr val="1E2761"/>
                 </a:solidFill>
@@ -2660,7 +2386,7 @@
               </a:rPr>
               <a:t>Access Rules (ACLs)</a:t>
             </a:r>
-            <a:endParaRPr lang="en-US" sz="1600" dirty="0"/>
+            <a:endParaRPr lang="en-US" sz="2000" dirty="0"/>
           </a:p>
         </p:txBody>
       </p:sp>
@@ -2692,7 +2418,7 @@
               <a:buNone/>
             </a:pPr>
             <a:r>
-              <a:rPr lang="en-US" sz="1250" dirty="0">
+              <a:rPr lang="en-US" sz="2000" dirty="0">
                 <a:solidFill>
                   <a:srgbClr val="222222"/>
                 </a:solidFill>
@@ -2702,7 +2428,7 @@
               </a:rPr>
               <a:t>Visitors can't reach company data, and only IT staff can log in to manage equipment.</a:t>
             </a:r>
-            <a:endParaRPr lang="en-US" sz="1250" dirty="0"/>
+            <a:endParaRPr lang="en-US" sz="2000" dirty="0"/>
           </a:p>
         </p:txBody>
       </p:sp>
@@ -2714,7 +2440,7 @@
 </p:sld>
 </file>
 
-<file path=ppt/slides/slide12.xml><?xml version="1.0" encoding="utf-8"?>
+<file path=ppt/slides/slide11.xml><?xml version="1.0" encoding="utf-8"?>
 <p:sld xmlns:a="http://schemas.openxmlformats.org/drawingml/2006/main" xmlns:r="http://schemas.openxmlformats.org/officeDocument/2006/relationships" xmlns:p="http://schemas.openxmlformats.org/presentationml/2006/main">
   <p:cSld name="Slide 12">
     <p:bg>
@@ -2825,17 +2551,21 @@
               <a:buNone/>
             </a:pPr>
             <a:r>
-              <a:rPr lang="en-US" sz="1600" b="1" dirty="0">
+              <a:rPr lang="en-US" sz="2000" b="1" dirty="0">
                 <a:solidFill>
                   <a:srgbClr val="1E2761"/>
                 </a:solidFill>
-                <a:latin typeface="Cambria" pitchFamily="34" charset="0"/>
-                <a:ea typeface="Cambria" pitchFamily="34" charset="-122"/>
-                <a:cs typeface="Cambria" pitchFamily="34" charset="-120"/>
+                <a:latin typeface="Calibri" panose="020F0502020204030204" pitchFamily="34" charset="0"/>
+                <a:ea typeface="Calibri" panose="020F0502020204030204" pitchFamily="34" charset="0"/>
+                <a:cs typeface="Calibri" panose="020F0502020204030204" pitchFamily="34" charset="0"/>
               </a:rPr>
               <a:t>What visitors get</a:t>
             </a:r>
-            <a:endParaRPr lang="en-US" sz="1600" dirty="0"/>
+            <a:endParaRPr lang="en-US" sz="2000" dirty="0">
+              <a:latin typeface="Calibri" panose="020F0502020204030204" pitchFamily="34" charset="0"/>
+              <a:ea typeface="Calibri" panose="020F0502020204030204" pitchFamily="34" charset="0"/>
+              <a:cs typeface="Calibri" panose="020F0502020204030204" pitchFamily="34" charset="0"/>
+            </a:endParaRPr>
           </a:p>
         </p:txBody>
       </p:sp>
@@ -2867,7 +2597,7 @@
               <a:buNone/>
             </a:pPr>
             <a:r>
-              <a:rPr lang="en-US" sz="1300" dirty="0">
+              <a:rPr lang="en-US" sz="2000" dirty="0">
                 <a:solidFill>
                   <a:srgbClr val="222222"/>
                 </a:solidFill>
@@ -2877,7 +2607,7 @@
               </a:rPr>
               <a:t>They join the Nexora-Guest Wi-Fi and receive an address automatically, in their own private network, separate from every department.</a:t>
             </a:r>
-            <a:endParaRPr lang="en-US" sz="1300" dirty="0"/>
+            <a:endParaRPr lang="en-US" sz="2000" dirty="0"/>
           </a:p>
         </p:txBody>
       </p:sp>
@@ -2928,7 +2658,7 @@
               <a:buNone/>
             </a:pPr>
             <a:r>
-              <a:rPr lang="en-US" sz="1600" b="1" dirty="0">
+              <a:rPr lang="en-US" sz="2000" b="1" dirty="0">
                 <a:solidFill>
                   <a:srgbClr val="1E2761"/>
                 </a:solidFill>
@@ -2938,7 +2668,7 @@
               </a:rPr>
               <a:t>What visitors cannot do</a:t>
             </a:r>
-            <a:endParaRPr lang="en-US" sz="1600" dirty="0"/>
+            <a:endParaRPr lang="en-US" sz="2000" dirty="0"/>
           </a:p>
         </p:txBody>
       </p:sp>
@@ -2970,7 +2700,7 @@
               <a:buNone/>
             </a:pPr>
             <a:r>
-              <a:rPr lang="en-US" sz="1300" dirty="0">
+              <a:rPr lang="en-US" sz="2000" dirty="0">
                 <a:solidFill>
                   <a:srgbClr val="222222"/>
                 </a:solidFill>
@@ -2980,7 +2710,7 @@
               </a:rPr>
               <a:t>Reach any department, the file server or the printers. Rules on the routers block that traffic in both directions.</a:t>
             </a:r>
-            <a:endParaRPr lang="en-US" sz="1300" dirty="0"/>
+            <a:endParaRPr lang="en-US" sz="2000" dirty="0"/>
           </a:p>
         </p:txBody>
       </p:sp>
@@ -3009,20 +2739,518 @@
               <a:buNone/>
             </a:pPr>
             <a:r>
-              <a:rPr lang="en-US" sz="1200" dirty="0">
+              <a:rPr lang="en-US" sz="2000" dirty="0">
                 <a:solidFill>
                   <a:srgbClr val="222222"/>
                 </a:solidFill>
-                <a:latin typeface="Times New Roman" panose="02020603050405020304" pitchFamily="18" charset="0"/>
-                <a:ea typeface="Calibri" pitchFamily="34" charset="-122"/>
-                <a:cs typeface="Times New Roman" panose="02020603050405020304" pitchFamily="18" charset="0"/>
+                <a:latin typeface="Calibri" panose="020F0502020204030204" pitchFamily="34" charset="0"/>
+                <a:ea typeface="Calibri" panose="020F0502020204030204" pitchFamily="34" charset="0"/>
+                <a:cs typeface="Calibri" panose="020F0502020204030204" pitchFamily="34" charset="0"/>
               </a:rPr>
               <a:t>Proven in testing: a guest laptop's pings to company devices failed, and company devices could not reach the guest either.</a:t>
             </a:r>
-            <a:endParaRPr lang="en-US" sz="1200" dirty="0">
-              <a:latin typeface="Times New Roman" panose="02020603050405020304" pitchFamily="18" charset="0"/>
-              <a:cs typeface="Times New Roman" panose="02020603050405020304" pitchFamily="18" charset="0"/>
+            <a:endParaRPr lang="en-US" sz="2000" dirty="0">
+              <a:latin typeface="Calibri" panose="020F0502020204030204" pitchFamily="34" charset="0"/>
+              <a:ea typeface="Calibri" panose="020F0502020204030204" pitchFamily="34" charset="0"/>
+              <a:cs typeface="Calibri" panose="020F0502020204030204" pitchFamily="34" charset="0"/>
             </a:endParaRPr>
+          </a:p>
+        </p:txBody>
+      </p:sp>
+    </p:spTree>
+  </p:cSld>
+  <p:clrMapOvr>
+    <a:masterClrMapping/>
+  </p:clrMapOvr>
+</p:sld>
+</file>
+
+<file path=ppt/slides/slide12.xml><?xml version="1.0" encoding="utf-8"?>
+<p:sld xmlns:a="http://schemas.openxmlformats.org/drawingml/2006/main" xmlns:r="http://schemas.openxmlformats.org/officeDocument/2006/relationships" xmlns:p="http://schemas.openxmlformats.org/presentationml/2006/main">
+  <p:cSld name="Slide 9">
+    <p:bg>
+      <p:bgPr>
+        <a:solidFill>
+          <a:srgbClr val="FFFFFF"/>
+        </a:solidFill>
+        <a:effectLst/>
+      </p:bgPr>
+    </p:bg>
+    <p:spTree>
+      <p:nvGrpSpPr>
+        <p:cNvPr id="1" name=""/>
+        <p:cNvGrpSpPr/>
+        <p:nvPr/>
+      </p:nvGrpSpPr>
+      <p:grpSpPr>
+        <a:xfrm>
+          <a:off x="0" y="0"/>
+          <a:ext cx="0" cy="0"/>
+          <a:chOff x="0" y="0"/>
+          <a:chExt cx="0" cy="0"/>
+        </a:xfrm>
+      </p:grpSpPr>
+      <p:sp>
+        <p:nvSpPr>
+          <p:cNvPr id="2" name="Text 0"/>
+          <p:cNvSpPr txBox="1"/>
+          <p:nvPr/>
+        </p:nvSpPr>
+        <p:spPr>
+          <a:xfrm>
+            <a:off x="548640" y="320040"/>
+            <a:ext cx="11064240" cy="685800"/>
+          </a:xfrm>
+          <a:prstGeom prst="rect">
+            <a:avLst/>
+          </a:prstGeom>
+          <a:noFill/>
+          <a:ln/>
+        </p:spPr>
+        <p:txBody>
+          <a:bodyPr wrap="square" lIns="0" tIns="0" rIns="0" bIns="0" rtlCol="0" anchor="ctr"/>
+          <a:lstStyle/>
+          <a:p>
+            <a:pPr marL="0" indent="0" algn="l">
+              <a:buNone/>
+            </a:pPr>
+            <a:r>
+              <a:rPr lang="en-US" sz="3000" b="1" dirty="0">
+                <a:solidFill>
+                  <a:srgbClr val="1E2761"/>
+                </a:solidFill>
+                <a:latin typeface="Cambria" pitchFamily="34" charset="0"/>
+                <a:ea typeface="Cambria" pitchFamily="34" charset="-122"/>
+                <a:cs typeface="Cambria" pitchFamily="34" charset="-120"/>
+              </a:rPr>
+              <a:t>Automatic Addresses: DHCP</a:t>
+            </a:r>
+            <a:endParaRPr lang="en-US" sz="3000" dirty="0"/>
+          </a:p>
+        </p:txBody>
+      </p:sp>
+      <p:sp>
+        <p:nvSpPr>
+          <p:cNvPr id="3" name="Shape 1"/>
+          <p:cNvSpPr/>
+          <p:nvPr/>
+        </p:nvSpPr>
+        <p:spPr>
+          <a:xfrm>
+            <a:off x="548640" y="1554480"/>
+            <a:ext cx="2377440" cy="1371600"/>
+          </a:xfrm>
+          <a:prstGeom prst="roundRect">
+            <a:avLst>
+              <a:gd name="adj" fmla="val 6667"/>
+            </a:avLst>
+          </a:prstGeom>
+          <a:solidFill>
+            <a:srgbClr val="1E2761"/>
+          </a:solidFill>
+          <a:ln/>
+        </p:spPr>
+      </p:sp>
+      <p:sp>
+        <p:nvSpPr>
+          <p:cNvPr id="4" name="Text 2"/>
+          <p:cNvSpPr txBox="1"/>
+          <p:nvPr/>
+        </p:nvSpPr>
+        <p:spPr>
+          <a:xfrm>
+            <a:off x="685800" y="1554480"/>
+            <a:ext cx="2103120" cy="1371600"/>
+          </a:xfrm>
+          <a:prstGeom prst="rect">
+            <a:avLst/>
+          </a:prstGeom>
+          <a:noFill/>
+          <a:ln/>
+        </p:spPr>
+        <p:txBody>
+          <a:bodyPr wrap="square" lIns="0" tIns="0" rIns="0" bIns="0" rtlCol="0" anchor="ctr"/>
+          <a:lstStyle/>
+          <a:p>
+            <a:pPr marL="0" indent="0" algn="ctr">
+              <a:buNone/>
+            </a:pPr>
+            <a:r>
+              <a:rPr lang="en-US" sz="2000" b="1" dirty="0">
+                <a:solidFill>
+                  <a:srgbClr val="FFFFFF"/>
+                </a:solidFill>
+                <a:latin typeface="Calibri" pitchFamily="34" charset="0"/>
+                <a:ea typeface="Calibri" pitchFamily="34" charset="-122"/>
+                <a:cs typeface="Calibri" pitchFamily="34" charset="-120"/>
+              </a:rPr>
+              <a:t>1  Device plugs in</a:t>
+            </a:r>
+            <a:endParaRPr lang="en-US" sz="2000" dirty="0"/>
+          </a:p>
+        </p:txBody>
+      </p:sp>
+      <p:sp>
+        <p:nvSpPr>
+          <p:cNvPr id="5" name="Text 3"/>
+          <p:cNvSpPr txBox="1"/>
+          <p:nvPr/>
+        </p:nvSpPr>
+        <p:spPr>
+          <a:xfrm>
+            <a:off x="2926080" y="1783080"/>
+            <a:ext cx="457200" cy="914400"/>
+          </a:xfrm>
+          <a:prstGeom prst="rect">
+            <a:avLst/>
+          </a:prstGeom>
+          <a:noFill/>
+          <a:ln/>
+        </p:spPr>
+        <p:txBody>
+          <a:bodyPr wrap="square" lIns="0" tIns="0" rIns="0" bIns="0" rtlCol="0" anchor="ctr"/>
+          <a:lstStyle/>
+          <a:p>
+            <a:pPr marL="0" indent="0" algn="ctr">
+              <a:buNone/>
+            </a:pPr>
+            <a:r>
+              <a:rPr lang="en-US" sz="2800" b="1" dirty="0">
+                <a:solidFill>
+                  <a:srgbClr val="1E2761"/>
+                </a:solidFill>
+                <a:latin typeface="Calibri" pitchFamily="34" charset="0"/>
+                <a:ea typeface="Calibri" pitchFamily="34" charset="-122"/>
+                <a:cs typeface="Calibri" pitchFamily="34" charset="-120"/>
+              </a:rPr>
+              <a:t>→</a:t>
+            </a:r>
+            <a:endParaRPr lang="en-US" sz="2800" dirty="0"/>
+          </a:p>
+        </p:txBody>
+      </p:sp>
+      <p:sp>
+        <p:nvSpPr>
+          <p:cNvPr id="6" name="Shape 4"/>
+          <p:cNvSpPr/>
+          <p:nvPr/>
+        </p:nvSpPr>
+        <p:spPr>
+          <a:xfrm>
+            <a:off x="3383280" y="1554480"/>
+            <a:ext cx="2377440" cy="1371600"/>
+          </a:xfrm>
+          <a:prstGeom prst="roundRect">
+            <a:avLst>
+              <a:gd name="adj" fmla="val 6667"/>
+            </a:avLst>
+          </a:prstGeom>
+          <a:solidFill>
+            <a:srgbClr val="1E2761"/>
+          </a:solidFill>
+          <a:ln/>
+        </p:spPr>
+      </p:sp>
+      <p:sp>
+        <p:nvSpPr>
+          <p:cNvPr id="7" name="Text 5"/>
+          <p:cNvSpPr txBox="1"/>
+          <p:nvPr/>
+        </p:nvSpPr>
+        <p:spPr>
+          <a:xfrm>
+            <a:off x="3520440" y="1554480"/>
+            <a:ext cx="2103120" cy="1371600"/>
+          </a:xfrm>
+          <a:prstGeom prst="rect">
+            <a:avLst/>
+          </a:prstGeom>
+          <a:noFill/>
+          <a:ln/>
+        </p:spPr>
+        <p:txBody>
+          <a:bodyPr wrap="square" lIns="0" tIns="0" rIns="0" bIns="0" rtlCol="0" anchor="ctr"/>
+          <a:lstStyle/>
+          <a:p>
+            <a:pPr marL="0" indent="0" algn="ctr">
+              <a:buNone/>
+            </a:pPr>
+            <a:r>
+              <a:rPr lang="en-US" sz="2000" b="1" dirty="0">
+                <a:solidFill>
+                  <a:srgbClr val="FFFFFF"/>
+                </a:solidFill>
+                <a:latin typeface="Calibri" pitchFamily="34" charset="0"/>
+                <a:ea typeface="Calibri" pitchFamily="34" charset="-122"/>
+                <a:cs typeface="Calibri" pitchFamily="34" charset="-120"/>
+              </a:rPr>
+              <a:t>2  Asks the router for an address</a:t>
+            </a:r>
+            <a:endParaRPr lang="en-US" sz="2000" dirty="0"/>
+          </a:p>
+        </p:txBody>
+      </p:sp>
+      <p:sp>
+        <p:nvSpPr>
+          <p:cNvPr id="8" name="Text 6"/>
+          <p:cNvSpPr txBox="1"/>
+          <p:nvPr/>
+        </p:nvSpPr>
+        <p:spPr>
+          <a:xfrm>
+            <a:off x="5760720" y="1783080"/>
+            <a:ext cx="457200" cy="914400"/>
+          </a:xfrm>
+          <a:prstGeom prst="rect">
+            <a:avLst/>
+          </a:prstGeom>
+          <a:noFill/>
+          <a:ln/>
+        </p:spPr>
+        <p:txBody>
+          <a:bodyPr wrap="square" lIns="0" tIns="0" rIns="0" bIns="0" rtlCol="0" anchor="ctr"/>
+          <a:lstStyle/>
+          <a:p>
+            <a:pPr marL="0" indent="0" algn="ctr">
+              <a:buNone/>
+            </a:pPr>
+            <a:r>
+              <a:rPr lang="en-US" sz="2800" b="1" dirty="0">
+                <a:solidFill>
+                  <a:srgbClr val="1E2761"/>
+                </a:solidFill>
+                <a:latin typeface="Calibri" pitchFamily="34" charset="0"/>
+                <a:ea typeface="Calibri" pitchFamily="34" charset="-122"/>
+                <a:cs typeface="Calibri" pitchFamily="34" charset="-120"/>
+              </a:rPr>
+              <a:t>→</a:t>
+            </a:r>
+            <a:endParaRPr lang="en-US" sz="2800" dirty="0"/>
+          </a:p>
+        </p:txBody>
+      </p:sp>
+      <p:sp>
+        <p:nvSpPr>
+          <p:cNvPr id="9" name="Shape 7"/>
+          <p:cNvSpPr/>
+          <p:nvPr/>
+        </p:nvSpPr>
+        <p:spPr>
+          <a:xfrm>
+            <a:off x="6217920" y="1554480"/>
+            <a:ext cx="2377440" cy="1371600"/>
+          </a:xfrm>
+          <a:prstGeom prst="roundRect">
+            <a:avLst>
+              <a:gd name="adj" fmla="val 6667"/>
+            </a:avLst>
+          </a:prstGeom>
+          <a:solidFill>
+            <a:srgbClr val="1E2761"/>
+          </a:solidFill>
+          <a:ln/>
+        </p:spPr>
+      </p:sp>
+      <p:sp>
+        <p:nvSpPr>
+          <p:cNvPr id="10" name="Text 8"/>
+          <p:cNvSpPr txBox="1"/>
+          <p:nvPr/>
+        </p:nvSpPr>
+        <p:spPr>
+          <a:xfrm>
+            <a:off x="6355080" y="1554480"/>
+            <a:ext cx="2103120" cy="1371600"/>
+          </a:xfrm>
+          <a:prstGeom prst="rect">
+            <a:avLst/>
+          </a:prstGeom>
+          <a:noFill/>
+          <a:ln/>
+        </p:spPr>
+        <p:txBody>
+          <a:bodyPr wrap="square" lIns="0" tIns="0" rIns="0" bIns="0" rtlCol="0" anchor="ctr"/>
+          <a:lstStyle/>
+          <a:p>
+            <a:pPr marL="0" indent="0" algn="ctr">
+              <a:buNone/>
+            </a:pPr>
+            <a:r>
+              <a:rPr lang="en-US" sz="2000" b="1" dirty="0">
+                <a:solidFill>
+                  <a:srgbClr val="FFFFFF"/>
+                </a:solidFill>
+                <a:latin typeface="Calibri" pitchFamily="34" charset="0"/>
+                <a:ea typeface="Calibri" pitchFamily="34" charset="-122"/>
+                <a:cs typeface="Calibri" pitchFamily="34" charset="-120"/>
+              </a:rPr>
+              <a:t>3  Router offers the next free one</a:t>
+            </a:r>
+            <a:endParaRPr lang="en-US" sz="2000" dirty="0"/>
+          </a:p>
+        </p:txBody>
+      </p:sp>
+      <p:sp>
+        <p:nvSpPr>
+          <p:cNvPr id="11" name="Text 9"/>
+          <p:cNvSpPr txBox="1"/>
+          <p:nvPr/>
+        </p:nvSpPr>
+        <p:spPr>
+          <a:xfrm>
+            <a:off x="8595360" y="1783080"/>
+            <a:ext cx="457200" cy="914400"/>
+          </a:xfrm>
+          <a:prstGeom prst="rect">
+            <a:avLst/>
+          </a:prstGeom>
+          <a:noFill/>
+          <a:ln/>
+        </p:spPr>
+        <p:txBody>
+          <a:bodyPr wrap="square" lIns="0" tIns="0" rIns="0" bIns="0" rtlCol="0" anchor="ctr"/>
+          <a:lstStyle/>
+          <a:p>
+            <a:pPr marL="0" indent="0" algn="ctr">
+              <a:buNone/>
+            </a:pPr>
+            <a:r>
+              <a:rPr lang="en-US" sz="2800" b="1" dirty="0">
+                <a:solidFill>
+                  <a:srgbClr val="1E2761"/>
+                </a:solidFill>
+                <a:latin typeface="Calibri" pitchFamily="34" charset="0"/>
+                <a:ea typeface="Calibri" pitchFamily="34" charset="-122"/>
+                <a:cs typeface="Calibri" pitchFamily="34" charset="-120"/>
+              </a:rPr>
+              <a:t>→</a:t>
+            </a:r>
+            <a:endParaRPr lang="en-US" sz="2800" dirty="0"/>
+          </a:p>
+        </p:txBody>
+      </p:sp>
+      <p:sp>
+        <p:nvSpPr>
+          <p:cNvPr id="12" name="Shape 10"/>
+          <p:cNvSpPr/>
+          <p:nvPr/>
+        </p:nvSpPr>
+        <p:spPr>
+          <a:xfrm>
+            <a:off x="9052560" y="1554480"/>
+            <a:ext cx="2377440" cy="1371600"/>
+          </a:xfrm>
+          <a:prstGeom prst="roundRect">
+            <a:avLst>
+              <a:gd name="adj" fmla="val 6667"/>
+            </a:avLst>
+          </a:prstGeom>
+          <a:solidFill>
+            <a:srgbClr val="1E2761"/>
+          </a:solidFill>
+          <a:ln/>
+        </p:spPr>
+      </p:sp>
+      <p:sp>
+        <p:nvSpPr>
+          <p:cNvPr id="13" name="Text 11"/>
+          <p:cNvSpPr txBox="1"/>
+          <p:nvPr/>
+        </p:nvSpPr>
+        <p:spPr>
+          <a:xfrm>
+            <a:off x="9189720" y="1554480"/>
+            <a:ext cx="2103120" cy="1371600"/>
+          </a:xfrm>
+          <a:prstGeom prst="rect">
+            <a:avLst/>
+          </a:prstGeom>
+          <a:noFill/>
+          <a:ln/>
+        </p:spPr>
+        <p:txBody>
+          <a:bodyPr wrap="square" lIns="0" tIns="0" rIns="0" bIns="0" rtlCol="0" anchor="ctr"/>
+          <a:lstStyle/>
+          <a:p>
+            <a:pPr marL="0" indent="0" algn="ctr">
+              <a:buNone/>
+            </a:pPr>
+            <a:r>
+              <a:rPr lang="en-US" sz="2000" b="1" dirty="0">
+                <a:solidFill>
+                  <a:srgbClr val="FFFFFF"/>
+                </a:solidFill>
+                <a:latin typeface="Calibri" pitchFamily="34" charset="0"/>
+                <a:ea typeface="Calibri" pitchFamily="34" charset="-122"/>
+                <a:cs typeface="Calibri" pitchFamily="34" charset="-120"/>
+              </a:rPr>
+              <a:t>4  Device is ready to work</a:t>
+            </a:r>
+            <a:endParaRPr lang="en-US" sz="2000" dirty="0"/>
+          </a:p>
+        </p:txBody>
+      </p:sp>
+      <p:sp>
+        <p:nvSpPr>
+          <p:cNvPr id="14" name="Shape 12"/>
+          <p:cNvSpPr/>
+          <p:nvPr/>
+        </p:nvSpPr>
+        <p:spPr>
+          <a:xfrm>
+            <a:off x="548640" y="3474720"/>
+            <a:ext cx="11064240" cy="2103120"/>
+          </a:xfrm>
+          <a:prstGeom prst="roundRect">
+            <a:avLst>
+              <a:gd name="adj" fmla="val 4348"/>
+            </a:avLst>
+          </a:prstGeom>
+          <a:solidFill>
+            <a:srgbClr val="CADCFC"/>
+          </a:solidFill>
+          <a:ln/>
+        </p:spPr>
+      </p:sp>
+      <p:sp>
+        <p:nvSpPr>
+          <p:cNvPr id="16" name="Text 14"/>
+          <p:cNvSpPr txBox="1"/>
+          <p:nvPr/>
+        </p:nvSpPr>
+        <p:spPr>
+          <a:xfrm>
+            <a:off x="685800" y="3687625"/>
+            <a:ext cx="10332720" cy="1280160"/>
+          </a:xfrm>
+          <a:prstGeom prst="rect">
+            <a:avLst/>
+          </a:prstGeom>
+          <a:noFill/>
+          <a:ln/>
+        </p:spPr>
+        <p:txBody>
+          <a:bodyPr wrap="square" lIns="0" tIns="0" rIns="0" bIns="0" rtlCol="0" anchor="ctr"/>
+          <a:lstStyle/>
+          <a:p>
+            <a:pPr marL="0" indent="0">
+              <a:lnSpc>
+                <a:spcPct val="125000"/>
+              </a:lnSpc>
+              <a:buNone/>
+            </a:pPr>
+            <a:r>
+              <a:rPr lang="en-US" sz="2000" dirty="0">
+                <a:solidFill>
+                  <a:srgbClr val="222222"/>
+                </a:solidFill>
+                <a:latin typeface="Calibri" pitchFamily="34" charset="0"/>
+                <a:ea typeface="Calibri" pitchFamily="34" charset="-122"/>
+                <a:cs typeface="Calibri" pitchFamily="34" charset="-120"/>
+              </a:rPr>
+              <a:t>The shared gateway, the two routers, the file server and the network equipment keep fixed addresses so they can always be found. Everything else, such as PCs and laptops, takes whatever is free, so no one has to type an address by hand.</a:t>
+            </a:r>
+            <a:endParaRPr lang="en-US" sz="2000" dirty="0"/>
           </a:p>
         </p:txBody>
       </p:sp>
@@ -3106,14 +3334,14 @@
           <p:nvPr>
             <p:extLst>
               <p:ext uri="{D42A27DB-BD31-4B8C-83A1-F6EECF244321}">
-                <p14:modId xmlns:p14="http://schemas.microsoft.com/office/powerpoint/2010/main" val="3498191334"/>
+                <p14:modId xmlns:p14="http://schemas.microsoft.com/office/powerpoint/2010/main" val="2613405279"/>
               </p:ext>
             </p:extLst>
           </p:nvPr>
         </p:nvGraphicFramePr>
         <p:xfrm>
           <a:off x="731520" y="1371600"/>
-          <a:ext cx="10698480" cy="4261513"/>
+          <a:ext cx="10698480" cy="4474873"/>
         </p:xfrm>
         <a:graphic>
           <a:graphicData uri="http://schemas.openxmlformats.org/drawingml/2006/table">
@@ -3145,7 +3373,7 @@
                         <a:buNone/>
                       </a:pPr>
                       <a:r>
-                        <a:rPr lang="en-US" sz="1400" b="1" dirty="0">
+                        <a:rPr lang="en-US" sz="2000" b="1" dirty="0">
                           <a:solidFill>
                             <a:srgbClr val="FFFFFF"/>
                           </a:solidFill>
@@ -3155,7 +3383,7 @@
                         </a:rPr>
                         <a:t>Term</a:t>
                       </a:r>
-                      <a:endParaRPr lang="en-US" sz="1400" dirty="0">
+                      <a:endParaRPr lang="en-US" sz="2000" dirty="0">
                         <a:latin typeface="Calibri" charset="0"/>
                         <a:ea typeface="Calibri" charset="0"/>
                         <a:cs typeface="Calibri" charset="0"/>
@@ -3213,7 +3441,7 @@
                         <a:buNone/>
                       </a:pPr>
                       <a:r>
-                        <a:rPr lang="en-US" sz="1400" b="1" dirty="0">
+                        <a:rPr lang="en-US" sz="2000" b="1" dirty="0">
                           <a:solidFill>
                             <a:srgbClr val="FFFFFF"/>
                           </a:solidFill>
@@ -3223,7 +3451,7 @@
                         </a:rPr>
                         <a:t>In plain words</a:t>
                       </a:r>
-                      <a:endParaRPr lang="en-US" sz="1400" dirty="0">
+                      <a:endParaRPr lang="en-US" sz="2000" dirty="0">
                         <a:latin typeface="Calibri" charset="0"/>
                         <a:ea typeface="Calibri" charset="0"/>
                         <a:cs typeface="Calibri" charset="0"/>
@@ -3288,7 +3516,7 @@
                         <a:buNone/>
                       </a:pPr>
                       <a:r>
-                        <a:rPr lang="en-US" sz="1400" dirty="0">
+                        <a:rPr lang="en-US" sz="2000" dirty="0">
                           <a:solidFill>
                             <a:srgbClr val="222222"/>
                           </a:solidFill>
@@ -3298,7 +3526,7 @@
                         </a:rPr>
                         <a:t>VLAN</a:t>
                       </a:r>
-                      <a:endParaRPr lang="en-US" sz="1400" dirty="0">
+                      <a:endParaRPr lang="en-US" sz="2000" dirty="0">
                         <a:latin typeface="Calibri" charset="0"/>
                         <a:ea typeface="Calibri" charset="0"/>
                         <a:cs typeface="Calibri" charset="0"/>
@@ -3356,7 +3584,7 @@
                         <a:buNone/>
                       </a:pPr>
                       <a:r>
-                        <a:rPr lang="en-US" sz="1400" dirty="0">
+                        <a:rPr lang="en-US" sz="2000" dirty="0">
                           <a:solidFill>
                             <a:srgbClr val="222222"/>
                           </a:solidFill>
@@ -3366,7 +3594,7 @@
                         </a:rPr>
                         <a:t>A private network for one department, like a separate floor of the building</a:t>
                       </a:r>
-                      <a:endParaRPr lang="en-US" sz="1400" dirty="0">
+                      <a:endParaRPr lang="en-US" sz="2000" dirty="0">
                         <a:latin typeface="Calibri" charset="0"/>
                         <a:ea typeface="Calibri" charset="0"/>
                         <a:cs typeface="Calibri" charset="0"/>
@@ -3431,7 +3659,7 @@
                         <a:buNone/>
                       </a:pPr>
                       <a:r>
-                        <a:rPr lang="en-US" sz="1400" dirty="0">
+                        <a:rPr lang="en-US" sz="2000" dirty="0">
                           <a:solidFill>
                             <a:srgbClr val="222222"/>
                           </a:solidFill>
@@ -3441,7 +3669,7 @@
                         </a:rPr>
                         <a:t>Router / Switch</a:t>
                       </a:r>
-                      <a:endParaRPr lang="en-US" sz="1400" dirty="0">
+                      <a:endParaRPr lang="en-US" sz="2000" dirty="0">
                         <a:latin typeface="Calibri" charset="0"/>
                         <a:ea typeface="Calibri" charset="0"/>
                         <a:cs typeface="Calibri" charset="0"/>
@@ -3499,7 +3727,7 @@
                         <a:buNone/>
                       </a:pPr>
                       <a:r>
-                        <a:rPr lang="en-US" sz="1400" dirty="0">
+                        <a:rPr lang="en-US" sz="2000" dirty="0">
                           <a:solidFill>
                             <a:srgbClr val="222222"/>
                           </a:solidFill>
@@ -3509,7 +3737,7 @@
                         </a:rPr>
                         <a:t>Router = traffic director between networks. Switch = connects devices within one network</a:t>
                       </a:r>
-                      <a:endParaRPr lang="en-US" sz="1400" dirty="0">
+                      <a:endParaRPr lang="en-US" sz="2000" dirty="0">
                         <a:latin typeface="Calibri" charset="0"/>
                         <a:ea typeface="Calibri" charset="0"/>
                         <a:cs typeface="Calibri" charset="0"/>
@@ -3574,7 +3802,7 @@
                         <a:buNone/>
                       </a:pPr>
                       <a:r>
-                        <a:rPr lang="en-US" sz="1400" dirty="0">
+                        <a:rPr lang="en-US" sz="2000" dirty="0">
                           <a:solidFill>
                             <a:srgbClr val="222222"/>
                           </a:solidFill>
@@ -3584,7 +3812,7 @@
                         </a:rPr>
                         <a:t>HSRP</a:t>
                       </a:r>
-                      <a:endParaRPr lang="en-US" sz="1400" dirty="0">
+                      <a:endParaRPr lang="en-US" sz="2000" dirty="0">
                         <a:latin typeface="Calibri" charset="0"/>
                         <a:ea typeface="Calibri" charset="0"/>
                         <a:cs typeface="Calibri" charset="0"/>
@@ -3642,7 +3870,7 @@
                         <a:buNone/>
                       </a:pPr>
                       <a:r>
-                        <a:rPr lang="en-US" sz="1400" dirty="0">
+                        <a:rPr lang="en-US" sz="2000" dirty="0">
                           <a:solidFill>
                             <a:srgbClr val="222222"/>
                           </a:solidFill>
@@ -3652,7 +3880,7 @@
                         </a:rPr>
                         <a:t>Two routers share one address so a backup takes over instantly, like a duty-desk phone</a:t>
                       </a:r>
-                      <a:endParaRPr lang="en-US" sz="1400" dirty="0">
+                      <a:endParaRPr lang="en-US" sz="2000" dirty="0">
                         <a:latin typeface="Calibri" charset="0"/>
                         <a:ea typeface="Calibri" charset="0"/>
                         <a:cs typeface="Calibri" charset="0"/>
@@ -3717,7 +3945,7 @@
                         <a:buNone/>
                       </a:pPr>
                       <a:r>
-                        <a:rPr lang="en-US" sz="1400" dirty="0">
+                        <a:rPr lang="en-US" sz="2000" dirty="0">
                           <a:solidFill>
                             <a:srgbClr val="222222"/>
                           </a:solidFill>
@@ -3727,7 +3955,7 @@
                         </a:rPr>
                         <a:t>EtherChannel</a:t>
                       </a:r>
-                      <a:endParaRPr lang="en-US" sz="1400" dirty="0">
+                      <a:endParaRPr lang="en-US" sz="2000" dirty="0">
                         <a:latin typeface="Calibri" charset="0"/>
                         <a:ea typeface="Calibri" charset="0"/>
                         <a:cs typeface="Calibri" charset="0"/>
@@ -3785,7 +4013,7 @@
                         <a:buNone/>
                       </a:pPr>
                       <a:r>
-                        <a:rPr lang="en-US" sz="1400" dirty="0">
+                        <a:rPr lang="en-US" sz="2000" dirty="0">
                           <a:solidFill>
                             <a:srgbClr val="222222"/>
                           </a:solidFill>
@@ -3795,7 +4023,7 @@
                         </a:rPr>
                         <a:t>Two cables working as one wide road, so losing one doesn't stop traffic</a:t>
                       </a:r>
-                      <a:endParaRPr lang="en-US" sz="1400" dirty="0">
+                      <a:endParaRPr lang="en-US" sz="2000" dirty="0">
                         <a:latin typeface="Calibri" charset="0"/>
                         <a:ea typeface="Calibri" charset="0"/>
                         <a:cs typeface="Calibri" charset="0"/>
@@ -3860,7 +4088,7 @@
                         <a:buNone/>
                       </a:pPr>
                       <a:r>
-                        <a:rPr lang="en-US" sz="1400" dirty="0">
+                        <a:rPr lang="en-US" sz="2000" dirty="0">
                           <a:solidFill>
                             <a:srgbClr val="222222"/>
                           </a:solidFill>
@@ -3870,7 +4098,7 @@
                         </a:rPr>
                         <a:t>OSPF</a:t>
                       </a:r>
-                      <a:endParaRPr lang="en-US" sz="1400" dirty="0">
+                      <a:endParaRPr lang="en-US" sz="2000" dirty="0">
                         <a:latin typeface="Calibri" charset="0"/>
                         <a:ea typeface="Calibri" charset="0"/>
                         <a:cs typeface="Calibri" charset="0"/>
@@ -3928,7 +4156,7 @@
                         <a:buNone/>
                       </a:pPr>
                       <a:r>
-                        <a:rPr lang="en-US" sz="1400" dirty="0">
+                        <a:rPr lang="en-US" sz="2000" dirty="0">
                           <a:solidFill>
                             <a:srgbClr val="222222"/>
                           </a:solidFill>
@@ -3938,7 +4166,7 @@
                         </a:rPr>
                         <a:t>How routers share a live map so traffic always finds a path between offices</a:t>
                       </a:r>
-                      <a:endParaRPr lang="en-US" sz="1400" dirty="0">
+                      <a:endParaRPr lang="en-US" sz="2000" dirty="0">
                         <a:latin typeface="Calibri" charset="0"/>
                         <a:ea typeface="Calibri" charset="0"/>
                         <a:cs typeface="Calibri" charset="0"/>
@@ -4003,7 +4231,7 @@
                         <a:buNone/>
                       </a:pPr>
                       <a:r>
-                        <a:rPr lang="en-US" sz="1400" dirty="0">
+                        <a:rPr lang="en-US" sz="2000" dirty="0">
                           <a:solidFill>
                             <a:srgbClr val="222222"/>
                           </a:solidFill>
@@ -4013,7 +4241,7 @@
                         </a:rPr>
                         <a:t>ACL</a:t>
                       </a:r>
-                      <a:endParaRPr lang="en-US" sz="1400" dirty="0">
+                      <a:endParaRPr lang="en-US" sz="2000" dirty="0">
                         <a:latin typeface="Calibri" charset="0"/>
                         <a:ea typeface="Calibri" charset="0"/>
                         <a:cs typeface="Calibri" charset="0"/>
@@ -4071,7 +4299,7 @@
                         <a:buNone/>
                       </a:pPr>
                       <a:r>
-                        <a:rPr lang="en-US" sz="1400" dirty="0">
+                        <a:rPr lang="en-US" sz="2000" dirty="0">
                           <a:solidFill>
                             <a:srgbClr val="222222"/>
                           </a:solidFill>
@@ -4081,7 +4309,7 @@
                         </a:rPr>
                         <a:t>A guest list for the network: who may reach what</a:t>
                       </a:r>
-                      <a:endParaRPr lang="en-US" sz="1400" dirty="0">
+                      <a:endParaRPr lang="en-US" sz="2000" dirty="0">
                         <a:latin typeface="Calibri" charset="0"/>
                         <a:ea typeface="Calibri" charset="0"/>
                         <a:cs typeface="Calibri" charset="0"/>
@@ -4309,7 +4537,7 @@
               <a:buNone/>
             </a:pPr>
             <a:r>
-              <a:rPr lang="en-US" sz="3000" b="1" dirty="0">
+              <a:rPr lang="en-US" sz="2000" b="1" dirty="0">
                 <a:solidFill>
                   <a:srgbClr val="1E2761"/>
                 </a:solidFill>
@@ -4319,7 +4547,7 @@
               </a:rPr>
               <a:t>Scenario &amp; Objectives</a:t>
             </a:r>
-            <a:endParaRPr lang="en-US" sz="3000" dirty="0"/>
+            <a:endParaRPr lang="en-US" sz="2000" dirty="0"/>
           </a:p>
         </p:txBody>
       </p:sp>
@@ -4353,7 +4581,7 @@
         </p:nvSpPr>
         <p:spPr>
           <a:xfrm>
-            <a:off x="868680" y="1508760"/>
+            <a:off x="868680" y="1199920"/>
             <a:ext cx="4480560" cy="457200"/>
           </a:xfrm>
           <a:prstGeom prst="rect">
@@ -4370,7 +4598,7 @@
               <a:buNone/>
             </a:pPr>
             <a:r>
-              <a:rPr lang="en-US" sz="1800" b="1" dirty="0">
+              <a:rPr lang="en-US" sz="2000" b="1" dirty="0">
                 <a:solidFill>
                   <a:srgbClr val="1E2761"/>
                 </a:solidFill>
@@ -4380,7 +4608,7 @@
               </a:rPr>
               <a:t>Nexora Technologies Ltd.</a:t>
             </a:r>
-            <a:endParaRPr lang="en-US" sz="1800" dirty="0"/>
+            <a:endParaRPr lang="en-US" sz="2000" dirty="0"/>
           </a:p>
         </p:txBody>
       </p:sp>
@@ -4412,7 +4640,7 @@
               <a:buNone/>
             </a:pPr>
             <a:r>
-              <a:rPr lang="en-US" sz="1400" dirty="0">
+              <a:rPr lang="en-US" sz="2000" dirty="0">
                 <a:solidFill>
                   <a:srgbClr val="222222"/>
                 </a:solidFill>
@@ -4422,7 +4650,7 @@
               </a:rPr>
               <a:t>A mid-sized technology and digital solutions company operating from a Head Office in Nairobi and a Branch Office in Eldoret. Leadership asked for:</a:t>
             </a:r>
-            <a:endParaRPr lang="en-US" sz="1400" dirty="0"/>
+            <a:endParaRPr lang="en-US" sz="2000" dirty="0"/>
           </a:p>
         </p:txBody>
       </p:sp>
@@ -4434,8 +4662,8 @@
         </p:nvSpPr>
         <p:spPr>
           <a:xfrm>
-            <a:off x="745850" y="2192735"/>
-            <a:ext cx="4480560" cy="3108960"/>
+            <a:off x="868680" y="3164113"/>
+            <a:ext cx="4357730" cy="2137581"/>
           </a:xfrm>
           <a:prstGeom prst="rect">
             <a:avLst/>
@@ -4446,6 +4674,40 @@
         <p:txBody>
           <a:bodyPr wrap="square" lIns="0" tIns="0" rIns="0" bIns="0" rtlCol="0" anchor="ctr"/>
           <a:lstStyle/>
+          <a:p>
+            <a:pPr marL="342900" indent="-342900">
+              <a:spcAft>
+                <a:spcPts val="1000"/>
+              </a:spcAft>
+              <a:buSzPct val="100000"/>
+              <a:buChar char="•"/>
+            </a:pPr>
+            <a:endParaRPr lang="en-US" sz="2000" dirty="0" smtClean="0">
+              <a:solidFill>
+                <a:srgbClr val="222222"/>
+              </a:solidFill>
+              <a:latin typeface="Calibri" pitchFamily="34" charset="0"/>
+              <a:ea typeface="Calibri" pitchFamily="34" charset="-122"/>
+              <a:cs typeface="Calibri" pitchFamily="34" charset="-120"/>
+            </a:endParaRPr>
+          </a:p>
+          <a:p>
+            <a:pPr marL="342900" indent="-342900">
+              <a:spcAft>
+                <a:spcPts val="1000"/>
+              </a:spcAft>
+              <a:buSzPct val="100000"/>
+              <a:buChar char="•"/>
+            </a:pPr>
+            <a:endParaRPr lang="en-US" sz="2000" dirty="0">
+              <a:solidFill>
+                <a:srgbClr val="222222"/>
+              </a:solidFill>
+              <a:latin typeface="Calibri" pitchFamily="34" charset="0"/>
+              <a:ea typeface="Calibri" pitchFamily="34" charset="-122"/>
+              <a:cs typeface="Calibri" pitchFamily="34" charset="-120"/>
+            </a:endParaRPr>
+          </a:p>
           <a:p>
             <a:pPr marL="342900" indent="-342900">
               <a:spcAft>
@@ -4455,7 +4717,7 @@
               <a:buChar char="•"/>
             </a:pPr>
             <a:r>
-              <a:rPr lang="en-US" sz="1400" dirty="0">
+              <a:rPr lang="en-US" sz="2000" dirty="0" smtClean="0">
                 <a:solidFill>
                   <a:srgbClr val="222222"/>
                 </a:solidFill>
@@ -4463,9 +4725,20 @@
                 <a:ea typeface="Calibri" pitchFamily="34" charset="-122"/>
                 <a:cs typeface="Calibri" pitchFamily="34" charset="-120"/>
               </a:rPr>
-              <a:t>Departments kept logically separated</a:t>
+              <a:t>Departments </a:t>
             </a:r>
-            <a:endParaRPr lang="en-US" sz="1400" dirty="0"/>
+            <a:r>
+              <a:rPr lang="en-US" sz="2000" dirty="0">
+                <a:solidFill>
+                  <a:srgbClr val="222222"/>
+                </a:solidFill>
+                <a:latin typeface="Calibri" pitchFamily="34" charset="0"/>
+                <a:ea typeface="Calibri" pitchFamily="34" charset="-122"/>
+                <a:cs typeface="Calibri" pitchFamily="34" charset="-120"/>
+              </a:rPr>
+              <a:t>kept logically separated</a:t>
+            </a:r>
+            <a:endParaRPr lang="en-US" sz="2000" dirty="0"/>
           </a:p>
           <a:p>
             <a:pPr marL="342900" indent="-342900">
@@ -4476,7 +4749,7 @@
               <a:buChar char="•"/>
             </a:pPr>
             <a:r>
-              <a:rPr lang="en-US" sz="1400" dirty="0">
+              <a:rPr lang="en-US" sz="2000" dirty="0">
                 <a:solidFill>
                   <a:srgbClr val="222222"/>
                 </a:solidFill>
@@ -4486,7 +4759,7 @@
               </a:rPr>
               <a:t>Reliable routing between the two offices</a:t>
             </a:r>
-            <a:endParaRPr lang="en-US" sz="1400" dirty="0"/>
+            <a:endParaRPr lang="en-US" sz="2000" dirty="0"/>
           </a:p>
           <a:p>
             <a:pPr marL="342900" indent="-342900">
@@ -4497,7 +4770,7 @@
               <a:buChar char="•"/>
             </a:pPr>
             <a:r>
-              <a:rPr lang="en-US" sz="1400" dirty="0">
+              <a:rPr lang="en-US" sz="2000" dirty="0">
                 <a:solidFill>
                   <a:srgbClr val="222222"/>
                 </a:solidFill>
@@ -4507,7 +4780,7 @@
               </a:rPr>
               <a:t>Unauthorized devices and rogue DHCP blocked</a:t>
             </a:r>
-            <a:endParaRPr lang="en-US" sz="1400" dirty="0"/>
+            <a:endParaRPr lang="en-US" sz="2000" dirty="0"/>
           </a:p>
           <a:p>
             <a:pPr marL="342900" indent="-342900">
@@ -4518,7 +4791,7 @@
               <a:buChar char="•"/>
             </a:pPr>
             <a:r>
-              <a:rPr lang="en-US" sz="1400" dirty="0">
+              <a:rPr lang="en-US" sz="2000" dirty="0">
                 <a:solidFill>
                   <a:srgbClr val="222222"/>
                 </a:solidFill>
@@ -4528,7 +4801,7 @@
               </a:rPr>
               <a:t>Remote device management restricted to IT staff</a:t>
             </a:r>
-            <a:endParaRPr lang="en-US" sz="1400" dirty="0"/>
+            <a:endParaRPr lang="en-US" sz="2000" dirty="0"/>
           </a:p>
         </p:txBody>
       </p:sp>
@@ -4557,7 +4830,7 @@
               <a:buNone/>
             </a:pPr>
             <a:r>
-              <a:rPr lang="en-US" sz="1600" b="1" dirty="0">
+              <a:rPr lang="en-US" sz="2000" b="1" dirty="0">
                 <a:solidFill>
                   <a:srgbClr val="1E2761"/>
                 </a:solidFill>
@@ -4567,7 +4840,7 @@
               </a:rPr>
               <a:t>Separate Departments</a:t>
             </a:r>
-            <a:endParaRPr lang="en-US" sz="1600" dirty="0"/>
+            <a:endParaRPr lang="en-US" sz="2000" dirty="0"/>
           </a:p>
         </p:txBody>
       </p:sp>
@@ -4579,7 +4852,7 @@
         </p:nvSpPr>
         <p:spPr>
           <a:xfrm>
-            <a:off x="6080760" y="1644095"/>
+            <a:off x="6080760" y="1805940"/>
             <a:ext cx="4663440" cy="548640"/>
           </a:xfrm>
           <a:prstGeom prst="rect">
@@ -4599,7 +4872,7 @@
               <a:buNone/>
             </a:pPr>
             <a:r>
-              <a:rPr lang="en-US" sz="1250" dirty="0">
+              <a:rPr lang="en-US" sz="2000" dirty="0">
                 <a:solidFill>
                   <a:srgbClr val="222222"/>
                 </a:solidFill>
@@ -4609,7 +4882,7 @@
               </a:rPr>
               <a:t>Each department gets its own private network, kept apart from the others</a:t>
             </a:r>
-            <a:endParaRPr lang="en-US" sz="1250" dirty="0"/>
+            <a:endParaRPr lang="en-US" sz="2000" dirty="0"/>
           </a:p>
         </p:txBody>
       </p:sp>
@@ -4621,7 +4894,7 @@
         </p:nvSpPr>
         <p:spPr>
           <a:xfrm>
-            <a:off x="6080760" y="2385629"/>
+            <a:off x="6109063" y="2606040"/>
             <a:ext cx="4663440" cy="365760"/>
           </a:xfrm>
           <a:prstGeom prst="rect">
@@ -4638,7 +4911,7 @@
               <a:buNone/>
             </a:pPr>
             <a:r>
-              <a:rPr lang="en-US" sz="1600" b="1" dirty="0">
+              <a:rPr lang="en-US" sz="2000" b="1" dirty="0">
                 <a:solidFill>
                   <a:srgbClr val="1E2761"/>
                 </a:solidFill>
@@ -4648,7 +4921,7 @@
               </a:rPr>
               <a:t>Connected Offices</a:t>
             </a:r>
-            <a:endParaRPr lang="en-US" sz="1600" dirty="0"/>
+            <a:endParaRPr lang="en-US" sz="2000" dirty="0"/>
           </a:p>
         </p:txBody>
       </p:sp>
@@ -4660,8 +4933,8 @@
         </p:nvSpPr>
         <p:spPr>
           <a:xfrm>
-            <a:off x="6080760" y="2851256"/>
-            <a:ext cx="4663440" cy="548640"/>
+            <a:off x="6109062" y="3034751"/>
+            <a:ext cx="4635137" cy="649511"/>
           </a:xfrm>
           <a:prstGeom prst="rect">
             <a:avLst/>
@@ -4680,7 +4953,7 @@
               <a:buNone/>
             </a:pPr>
             <a:r>
-              <a:rPr lang="en-US" sz="1250" dirty="0">
+              <a:rPr lang="en-US" sz="2000" dirty="0">
                 <a:solidFill>
                   <a:srgbClr val="222222"/>
                 </a:solidFill>
@@ -4690,7 +4963,7 @@
               </a:rPr>
               <a:t>The two offices are linked so they work as one company</a:t>
             </a:r>
-            <a:endParaRPr lang="en-US" sz="1250" dirty="0"/>
+            <a:endParaRPr lang="en-US" sz="2000" dirty="0"/>
           </a:p>
         </p:txBody>
       </p:sp>
@@ -4702,8 +4975,8 @@
         </p:nvSpPr>
         <p:spPr>
           <a:xfrm>
-            <a:off x="6080760" y="3536595"/>
-            <a:ext cx="4663440" cy="365760"/>
+            <a:off x="6109062" y="3584395"/>
+            <a:ext cx="4635137" cy="648507"/>
           </a:xfrm>
           <a:prstGeom prst="rect">
             <a:avLst/>
@@ -4719,7 +4992,7 @@
               <a:buNone/>
             </a:pPr>
             <a:r>
-              <a:rPr lang="en-US" sz="1600" b="1" dirty="0">
+              <a:rPr lang="en-US" sz="2000" b="1" dirty="0">
                 <a:solidFill>
                   <a:srgbClr val="1E2761"/>
                 </a:solidFill>
@@ -4729,7 +5002,7 @@
               </a:rPr>
               <a:t>Controlled Access</a:t>
             </a:r>
-            <a:endParaRPr lang="en-US" sz="1600" dirty="0"/>
+            <a:endParaRPr lang="en-US" sz="2000" dirty="0"/>
           </a:p>
         </p:txBody>
       </p:sp>
@@ -4741,7 +5014,7 @@
         </p:nvSpPr>
         <p:spPr>
           <a:xfrm>
-            <a:off x="6080760" y="3976497"/>
+            <a:off x="6109063" y="4232903"/>
             <a:ext cx="4663440" cy="548640"/>
           </a:xfrm>
           <a:prstGeom prst="rect">
@@ -4761,7 +5034,7 @@
               <a:buNone/>
             </a:pPr>
             <a:r>
-              <a:rPr lang="en-US" sz="1250" dirty="0">
+              <a:rPr lang="en-US" sz="2000" dirty="0">
                 <a:solidFill>
                   <a:srgbClr val="222222"/>
                 </a:solidFill>
@@ -4771,7 +5044,7 @@
               </a:rPr>
               <a:t>Rules and checks stop unknown devices from joining the network</a:t>
             </a:r>
-            <a:endParaRPr lang="en-US" sz="1250" dirty="0"/>
+            <a:endParaRPr lang="en-US" sz="2000" dirty="0"/>
           </a:p>
         </p:txBody>
       </p:sp>
@@ -4783,7 +5056,7 @@
         </p:nvSpPr>
         <p:spPr>
           <a:xfrm>
-            <a:off x="6080760" y="4572461"/>
+            <a:off x="6109063" y="5000778"/>
             <a:ext cx="4663440" cy="365760"/>
           </a:xfrm>
           <a:prstGeom prst="rect">
@@ -4800,7 +5073,7 @@
               <a:buNone/>
             </a:pPr>
             <a:r>
-              <a:rPr lang="en-US" sz="1600" b="1" dirty="0">
+              <a:rPr lang="en-US" sz="2000" b="1" dirty="0">
                 <a:solidFill>
                   <a:srgbClr val="1E2761"/>
                 </a:solidFill>
@@ -4810,7 +5083,7 @@
               </a:rPr>
               <a:t>IT-Only Management</a:t>
             </a:r>
-            <a:endParaRPr lang="en-US" sz="1600" dirty="0"/>
+            <a:endParaRPr lang="en-US" sz="2000" dirty="0"/>
           </a:p>
         </p:txBody>
       </p:sp>
@@ -4822,7 +5095,7 @@
         </p:nvSpPr>
         <p:spPr>
           <a:xfrm>
-            <a:off x="6080760" y="5094027"/>
+            <a:off x="6080760" y="5623560"/>
             <a:ext cx="4663440" cy="548640"/>
           </a:xfrm>
           <a:prstGeom prst="rect">
@@ -4842,7 +5115,7 @@
               <a:buNone/>
             </a:pPr>
             <a:r>
-              <a:rPr lang="en-US" sz="1250" dirty="0">
+              <a:rPr lang="en-US" sz="2000" dirty="0">
                 <a:solidFill>
                   <a:srgbClr val="222222"/>
                 </a:solidFill>
@@ -4852,7 +5125,7 @@
               </a:rPr>
               <a:t>Only IT staff can log in to manage the network equipment</a:t>
             </a:r>
-            <a:endParaRPr lang="en-US" sz="1250" dirty="0"/>
+            <a:endParaRPr lang="en-US" sz="2000" dirty="0"/>
           </a:p>
         </p:txBody>
       </p:sp>
@@ -4914,7 +5187,7 @@
               <a:buNone/>
             </a:pPr>
             <a:r>
-              <a:rPr lang="en-US" sz="3000" b="1" dirty="0">
+              <a:rPr lang="en-US" sz="2000" b="1" dirty="0">
                 <a:solidFill>
                   <a:srgbClr val="1E2761"/>
                 </a:solidFill>
@@ -4924,7 +5197,7 @@
               </a:rPr>
               <a:t>How We Built It</a:t>
             </a:r>
-            <a:endParaRPr lang="en-US" sz="3000" dirty="0"/>
+            <a:endParaRPr lang="en-US" sz="2000" dirty="0"/>
           </a:p>
         </p:txBody>
       </p:sp>
@@ -4958,7 +5231,7 @@
         </p:nvSpPr>
         <p:spPr>
           <a:xfrm>
-            <a:off x="822960" y="1874520"/>
+            <a:off x="721360" y="1636040"/>
             <a:ext cx="1325880" cy="640080"/>
           </a:xfrm>
           <a:prstGeom prst="rect">
@@ -4975,7 +5248,7 @@
               <a:buNone/>
             </a:pPr>
             <a:r>
-              <a:rPr lang="en-US" sz="1600" b="1" dirty="0">
+              <a:rPr lang="en-US" sz="2000" b="1" dirty="0">
                 <a:solidFill>
                   <a:srgbClr val="1E2761"/>
                 </a:solidFill>
@@ -4985,7 +5258,7 @@
               </a:rPr>
               <a:t>1  Design</a:t>
             </a:r>
-            <a:endParaRPr lang="en-US" sz="1600" dirty="0"/>
+            <a:endParaRPr lang="en-US" sz="2000" dirty="0"/>
           </a:p>
         </p:txBody>
       </p:sp>
@@ -4997,8 +5270,8 @@
         </p:nvSpPr>
         <p:spPr>
           <a:xfrm>
-            <a:off x="822960" y="2697480"/>
-            <a:ext cx="2057400" cy="1965960"/>
+            <a:off x="822960" y="2276120"/>
+            <a:ext cx="2057400" cy="2245080"/>
           </a:xfrm>
           <a:prstGeom prst="rect">
             <a:avLst/>
@@ -5017,7 +5290,7 @@
               <a:buNone/>
             </a:pPr>
             <a:r>
-              <a:rPr lang="en-US" sz="1300" dirty="0">
+              <a:rPr lang="en-US" sz="2000" dirty="0">
                 <a:solidFill>
                   <a:srgbClr val="222222"/>
                 </a:solidFill>
@@ -5027,7 +5300,7 @@
               </a:rPr>
               <a:t>Planned the departments, the address scheme and the layout before touching any equipment.</a:t>
             </a:r>
-            <a:endParaRPr lang="en-US" sz="1300" dirty="0"/>
+            <a:endParaRPr lang="en-US" sz="2000" dirty="0"/>
           </a:p>
         </p:txBody>
       </p:sp>
@@ -5061,7 +5334,7 @@
         </p:nvSpPr>
         <p:spPr>
           <a:xfrm>
-            <a:off x="3611880" y="1878792"/>
+            <a:off x="3543300" y="1636040"/>
             <a:ext cx="1325880" cy="640080"/>
           </a:xfrm>
           <a:prstGeom prst="rect">
@@ -5078,7 +5351,7 @@
               <a:buNone/>
             </a:pPr>
             <a:r>
-              <a:rPr lang="en-US" sz="1600" b="1" dirty="0">
+              <a:rPr lang="en-US" sz="2000" b="1" dirty="0">
                 <a:solidFill>
                   <a:srgbClr val="1E2761"/>
                 </a:solidFill>
@@ -5088,7 +5361,7 @@
               </a:rPr>
               <a:t>2  Build</a:t>
             </a:r>
-            <a:endParaRPr lang="en-US" sz="1600" dirty="0"/>
+            <a:endParaRPr lang="en-US" sz="2000" dirty="0"/>
           </a:p>
         </p:txBody>
       </p:sp>
@@ -5100,8 +5373,8 @@
         </p:nvSpPr>
         <p:spPr>
           <a:xfrm>
-            <a:off x="3611880" y="2697480"/>
-            <a:ext cx="2057400" cy="1965960"/>
+            <a:off x="3543300" y="2357680"/>
+            <a:ext cx="2057400" cy="2163520"/>
           </a:xfrm>
           <a:prstGeom prst="rect">
             <a:avLst/>
@@ -5120,7 +5393,7 @@
               <a:buNone/>
             </a:pPr>
             <a:r>
-              <a:rPr lang="en-US" sz="1300" dirty="0">
+              <a:rPr lang="en-US" sz="2000" dirty="0">
                 <a:solidFill>
                   <a:srgbClr val="222222"/>
                 </a:solidFill>
@@ -5130,7 +5403,7 @@
               </a:rPr>
               <a:t>Connected the offices, set up routing, backup routers and automatic addressing.</a:t>
             </a:r>
-            <a:endParaRPr lang="en-US" sz="1300" dirty="0"/>
+            <a:endParaRPr lang="en-US" sz="2000" dirty="0"/>
           </a:p>
         </p:txBody>
       </p:sp>
@@ -5164,7 +5437,7 @@
         </p:nvSpPr>
         <p:spPr>
           <a:xfrm>
-            <a:off x="6400800" y="1956080"/>
+            <a:off x="6332220" y="1628980"/>
             <a:ext cx="1325880" cy="640080"/>
           </a:xfrm>
           <a:prstGeom prst="rect">
@@ -5181,7 +5454,7 @@
               <a:buNone/>
             </a:pPr>
             <a:r>
-              <a:rPr lang="en-US" sz="1600" b="1" dirty="0">
+              <a:rPr lang="en-US" sz="2000" b="1" dirty="0">
                 <a:solidFill>
                   <a:srgbClr val="1E2761"/>
                 </a:solidFill>
@@ -5191,7 +5464,7 @@
               </a:rPr>
               <a:t>3  Secure</a:t>
             </a:r>
-            <a:endParaRPr lang="en-US" sz="1600" dirty="0"/>
+            <a:endParaRPr lang="en-US" sz="2000" dirty="0"/>
           </a:p>
         </p:txBody>
       </p:sp>
@@ -5203,7 +5476,7 @@
         </p:nvSpPr>
         <p:spPr>
           <a:xfrm>
-            <a:off x="6400800" y="2697480"/>
+            <a:off x="6400800" y="2375460"/>
             <a:ext cx="2057400" cy="1965960"/>
           </a:xfrm>
           <a:prstGeom prst="rect">
@@ -5223,7 +5496,7 @@
               <a:buNone/>
             </a:pPr>
             <a:r>
-              <a:rPr lang="en-US" sz="1300" dirty="0">
+              <a:rPr lang="en-US" sz="2000" dirty="0">
                 <a:solidFill>
                   <a:srgbClr val="222222"/>
                 </a:solidFill>
@@ -5233,7 +5506,7 @@
               </a:rPr>
               <a:t>Added guest isolation, access rules, device lock-down and rogue-device protection.</a:t>
             </a:r>
-            <a:endParaRPr lang="en-US" sz="1300" dirty="0"/>
+            <a:endParaRPr lang="en-US" sz="2000" dirty="0"/>
           </a:p>
         </p:txBody>
       </p:sp>
@@ -5267,8 +5540,8 @@
         </p:nvSpPr>
         <p:spPr>
           <a:xfrm>
-            <a:off x="9304020" y="1878792"/>
-            <a:ext cx="1325880" cy="640080"/>
+            <a:off x="9189720" y="1693288"/>
+            <a:ext cx="1282700" cy="575772"/>
           </a:xfrm>
           <a:prstGeom prst="rect">
             <a:avLst/>
@@ -5284,7 +5557,7 @@
               <a:buNone/>
             </a:pPr>
             <a:r>
-              <a:rPr lang="en-US" sz="1600" b="1" dirty="0">
+              <a:rPr lang="en-US" sz="2000" b="1" dirty="0">
                 <a:solidFill>
                   <a:srgbClr val="1E2761"/>
                 </a:solidFill>
@@ -5294,7 +5567,7 @@
               </a:rPr>
               <a:t>4  Test</a:t>
             </a:r>
-            <a:endParaRPr lang="en-US" sz="1600" dirty="0"/>
+            <a:endParaRPr lang="en-US" sz="2000" dirty="0"/>
           </a:p>
         </p:txBody>
       </p:sp>
@@ -5306,8 +5579,8 @@
         </p:nvSpPr>
         <p:spPr>
           <a:xfrm>
-            <a:off x="9189720" y="2697480"/>
-            <a:ext cx="2057400" cy="1965960"/>
+            <a:off x="9006840" y="2357680"/>
+            <a:ext cx="2057400" cy="2163520"/>
           </a:xfrm>
           <a:prstGeom prst="rect">
             <a:avLst/>
@@ -5326,7 +5599,7 @@
               <a:buNone/>
             </a:pPr>
             <a:r>
-              <a:rPr lang="en-US" sz="1300" dirty="0">
+              <a:rPr lang="en-US" sz="2000" dirty="0">
                 <a:solidFill>
                   <a:srgbClr val="222222"/>
                 </a:solidFill>
@@ -5336,7 +5609,7 @@
               </a:rPr>
               <a:t>Proved each feature works by breaking things on purpose, like switching off a router.</a:t>
             </a:r>
-            <a:endParaRPr lang="en-US" sz="1300" dirty="0"/>
+            <a:endParaRPr lang="en-US" sz="2000" dirty="0"/>
           </a:p>
         </p:txBody>
       </p:sp>
@@ -5398,7 +5671,7 @@
               <a:buNone/>
             </a:pPr>
             <a:r>
-              <a:rPr lang="en-US" sz="3000" b="1" dirty="0">
+              <a:rPr lang="en-US" sz="2000" b="1" dirty="0">
                 <a:solidFill>
                   <a:srgbClr val="1E2761"/>
                 </a:solidFill>
@@ -5408,7 +5681,7 @@
               </a:rPr>
               <a:t>Network Topology</a:t>
             </a:r>
-            <a:endParaRPr lang="en-US" sz="3000" dirty="0"/>
+            <a:endParaRPr lang="en-US" sz="2000" dirty="0"/>
           </a:p>
         </p:txBody>
       </p:sp>
@@ -5420,7 +5693,7 @@
         </p:nvSpPr>
         <p:spPr>
           <a:xfrm>
-            <a:off x="548640" y="1417320"/>
+            <a:off x="330200" y="1234440"/>
             <a:ext cx="5029200" cy="4206240"/>
           </a:xfrm>
           <a:prstGeom prst="roundRect">
@@ -5447,7 +5720,7 @@
         </p:nvSpPr>
         <p:spPr>
           <a:xfrm>
-            <a:off x="548640" y="1600200"/>
+            <a:off x="444500" y="1577340"/>
             <a:ext cx="5029200" cy="365760"/>
           </a:xfrm>
           <a:prstGeom prst="rect">
@@ -5464,7 +5737,7 @@
               <a:buNone/>
             </a:pPr>
             <a:r>
-              <a:rPr lang="en-US" sz="1500" b="1" dirty="0">
+              <a:rPr lang="en-US" sz="2000" b="1" dirty="0">
                 <a:solidFill>
                   <a:srgbClr val="1E2761"/>
                 </a:solidFill>
@@ -5474,7 +5747,7 @@
               </a:rPr>
               <a:t>Head Office — Nairobi</a:t>
             </a:r>
-            <a:endParaRPr lang="en-US" sz="1500" dirty="0"/>
+            <a:endParaRPr lang="en-US" sz="2000" dirty="0"/>
           </a:p>
         </p:txBody>
       </p:sp>
@@ -5525,7 +5798,7 @@
               <a:buNone/>
             </a:pPr>
             <a:r>
-              <a:rPr lang="en-US" sz="1200" b="1" dirty="0">
+              <a:rPr lang="en-US" sz="2000" b="1" dirty="0">
                 <a:solidFill>
                   <a:srgbClr val="FFFFFF"/>
                 </a:solidFill>
@@ -5535,7 +5808,7 @@
               </a:rPr>
               <a:t>R1 (Active)</a:t>
             </a:r>
-            <a:endParaRPr lang="en-US" sz="1200" dirty="0"/>
+            <a:endParaRPr lang="en-US" sz="2000" dirty="0"/>
           </a:p>
         </p:txBody>
       </p:sp>
@@ -5586,7 +5859,7 @@
               <a:buNone/>
             </a:pPr>
             <a:r>
-              <a:rPr lang="en-US" sz="1200" b="1" dirty="0">
+              <a:rPr lang="en-US" sz="2000" b="1" dirty="0">
                 <a:solidFill>
                   <a:srgbClr val="FFFFFF"/>
                 </a:solidFill>
@@ -5596,7 +5869,7 @@
               </a:rPr>
               <a:t>R2 (Standby)</a:t>
             </a:r>
-            <a:endParaRPr lang="en-US" sz="1200" dirty="0"/>
+            <a:endParaRPr lang="en-US" sz="2000" dirty="0"/>
           </a:p>
         </p:txBody>
       </p:sp>
@@ -5647,7 +5920,7 @@
               <a:buNone/>
             </a:pPr>
             <a:r>
-              <a:rPr lang="en-US" sz="1200" b="1" dirty="0">
+              <a:rPr lang="en-US" sz="2000" b="1" dirty="0">
                 <a:solidFill>
                   <a:srgbClr val="FFFFFF"/>
                 </a:solidFill>
@@ -5657,7 +5930,7 @@
               </a:rPr>
               <a:t>SW1</a:t>
             </a:r>
-            <a:endParaRPr lang="en-US" sz="1200" dirty="0"/>
+            <a:endParaRPr lang="en-US" sz="2000" dirty="0"/>
           </a:p>
         </p:txBody>
       </p:sp>
@@ -5708,7 +5981,7 @@
               <a:buNone/>
             </a:pPr>
             <a:r>
-              <a:rPr lang="en-US" sz="1200" b="1" dirty="0">
+              <a:rPr lang="en-US" sz="2000" b="1" dirty="0">
                 <a:solidFill>
                   <a:srgbClr val="FFFFFF"/>
                 </a:solidFill>
@@ -5718,7 +5991,7 @@
               </a:rPr>
               <a:t>SW2</a:t>
             </a:r>
-            <a:endParaRPr lang="en-US" sz="1200" dirty="0"/>
+            <a:endParaRPr lang="en-US" sz="2000" dirty="0"/>
           </a:p>
         </p:txBody>
       </p:sp>
@@ -5750,7 +6023,7 @@
               <a:buNone/>
             </a:pPr>
             <a:r>
-              <a:rPr lang="en-US" sz="1100" i="1" dirty="0">
+              <a:rPr lang="en-US" sz="2000" i="1" dirty="0">
                 <a:solidFill>
                   <a:srgbClr val="1E2761"/>
                 </a:solidFill>
@@ -5760,7 +6033,7 @@
               </a:rPr>
               <a:t>Two switches linked by two cables</a:t>
             </a:r>
-            <a:endParaRPr lang="en-US" sz="1100" dirty="0"/>
+            <a:endParaRPr lang="en-US" sz="2000" dirty="0"/>
           </a:p>
           <a:p>
             <a:pPr marL="0" indent="0" algn="ctr">
@@ -5770,7 +6043,7 @@
               <a:buNone/>
             </a:pPr>
             <a:r>
-              <a:rPr lang="en-US" sz="1100" i="1" dirty="0">
+              <a:rPr lang="en-US" sz="2000" i="1" dirty="0">
                 <a:solidFill>
                   <a:srgbClr val="1E2761"/>
                 </a:solidFill>
@@ -5780,7 +6053,7 @@
               </a:rPr>
               <a:t>Two routers: one main, one backup</a:t>
             </a:r>
-            <a:endParaRPr lang="en-US" sz="1100" dirty="0"/>
+            <a:endParaRPr lang="en-US" sz="2000" dirty="0"/>
           </a:p>
         </p:txBody>
       </p:sp>
@@ -5792,7 +6065,7 @@
         </p:nvSpPr>
         <p:spPr>
           <a:xfrm>
-            <a:off x="6583680" y="1417320"/>
+            <a:off x="6766560" y="1234440"/>
             <a:ext cx="5029200" cy="4206240"/>
           </a:xfrm>
           <a:prstGeom prst="roundRect">
@@ -5836,7 +6109,7 @@
               <a:buNone/>
             </a:pPr>
             <a:r>
-              <a:rPr lang="en-US" sz="1500" b="1" dirty="0">
+              <a:rPr lang="en-US" sz="2000" b="1" dirty="0">
                 <a:solidFill>
                   <a:srgbClr val="1E2761"/>
                 </a:solidFill>
@@ -5846,7 +6119,7 @@
               </a:rPr>
               <a:t>Branch Office — Eldoret</a:t>
             </a:r>
-            <a:endParaRPr lang="en-US" sz="1500" dirty="0"/>
+            <a:endParaRPr lang="en-US" sz="2000" dirty="0"/>
           </a:p>
         </p:txBody>
       </p:sp>
@@ -5897,7 +6170,7 @@
               <a:buNone/>
             </a:pPr>
             <a:r>
-              <a:rPr lang="en-US" sz="1200" b="1" dirty="0">
+              <a:rPr lang="en-US" sz="2000" b="1" dirty="0">
                 <a:solidFill>
                   <a:srgbClr val="FFFFFF"/>
                 </a:solidFill>
@@ -5907,7 +6180,7 @@
               </a:rPr>
               <a:t>R1 (Active)</a:t>
             </a:r>
-            <a:endParaRPr lang="en-US" sz="1200" dirty="0"/>
+            <a:endParaRPr lang="en-US" sz="2000" dirty="0"/>
           </a:p>
         </p:txBody>
       </p:sp>
@@ -5958,7 +6231,7 @@
               <a:buNone/>
             </a:pPr>
             <a:r>
-              <a:rPr lang="en-US" sz="1200" b="1" dirty="0">
+              <a:rPr lang="en-US" sz="2000" b="1" dirty="0">
                 <a:solidFill>
                   <a:srgbClr val="FFFFFF"/>
                 </a:solidFill>
@@ -5968,7 +6241,7 @@
               </a:rPr>
               <a:t>R2 (Standby)</a:t>
             </a:r>
-            <a:endParaRPr lang="en-US" sz="1200" dirty="0"/>
+            <a:endParaRPr lang="en-US" sz="2000" dirty="0"/>
           </a:p>
         </p:txBody>
       </p:sp>
@@ -6019,7 +6292,7 @@
               <a:buNone/>
             </a:pPr>
             <a:r>
-              <a:rPr lang="en-US" sz="1200" b="1" dirty="0">
+              <a:rPr lang="en-US" sz="2000" b="1" dirty="0">
                 <a:solidFill>
                   <a:srgbClr val="FFFFFF"/>
                 </a:solidFill>
@@ -6029,7 +6302,7 @@
               </a:rPr>
               <a:t>SW1</a:t>
             </a:r>
-            <a:endParaRPr lang="en-US" sz="1200" dirty="0"/>
+            <a:endParaRPr lang="en-US" sz="2000" dirty="0"/>
           </a:p>
         </p:txBody>
       </p:sp>
@@ -6080,7 +6353,7 @@
               <a:buNone/>
             </a:pPr>
             <a:r>
-              <a:rPr lang="en-US" sz="1200" b="1" dirty="0">
+              <a:rPr lang="en-US" sz="2000" b="1" dirty="0">
                 <a:solidFill>
                   <a:srgbClr val="FFFFFF"/>
                 </a:solidFill>
@@ -6090,7 +6363,7 @@
               </a:rPr>
               <a:t>SW2</a:t>
             </a:r>
-            <a:endParaRPr lang="en-US" sz="1200" dirty="0"/>
+            <a:endParaRPr lang="en-US" sz="2000" dirty="0"/>
           </a:p>
         </p:txBody>
       </p:sp>
@@ -6122,7 +6395,7 @@
               <a:buNone/>
             </a:pPr>
             <a:r>
-              <a:rPr lang="en-US" sz="1100" i="1" dirty="0">
+              <a:rPr lang="en-US" sz="2000" i="1" dirty="0">
                 <a:solidFill>
                   <a:srgbClr val="1E2761"/>
                 </a:solidFill>
@@ -6132,7 +6405,7 @@
               </a:rPr>
               <a:t>Two switches linked by two cables</a:t>
             </a:r>
-            <a:endParaRPr lang="en-US" sz="1100" dirty="0"/>
+            <a:endParaRPr lang="en-US" sz="2000" dirty="0"/>
           </a:p>
           <a:p>
             <a:pPr marL="0" indent="0" algn="ctr">
@@ -6142,7 +6415,7 @@
               <a:buNone/>
             </a:pPr>
             <a:r>
-              <a:rPr lang="en-US" sz="1100" i="1" dirty="0">
+              <a:rPr lang="en-US" sz="2000" i="1" dirty="0">
                 <a:solidFill>
                   <a:srgbClr val="1E2761"/>
                 </a:solidFill>
@@ -6152,7 +6425,7 @@
               </a:rPr>
               <a:t>Two routers: one main, one backup</a:t>
             </a:r>
-            <a:endParaRPr lang="en-US" sz="1100" dirty="0"/>
+            <a:endParaRPr lang="en-US" sz="2000" dirty="0"/>
           </a:p>
         </p:txBody>
       </p:sp>
@@ -6164,8 +6437,8 @@
         </p:nvSpPr>
         <p:spPr>
           <a:xfrm>
-            <a:off x="5577840" y="2423160"/>
-            <a:ext cx="1005840" cy="0"/>
+            <a:off x="5359400" y="2834640"/>
+            <a:ext cx="1407160" cy="0"/>
           </a:xfrm>
           <a:prstGeom prst="line">
             <a:avLst/>
@@ -6187,8 +6460,8 @@
         </p:nvSpPr>
         <p:spPr>
           <a:xfrm>
-            <a:off x="5349240" y="1874520"/>
-            <a:ext cx="1463040" cy="502920"/>
+            <a:off x="5349240" y="1783081"/>
+            <a:ext cx="1463040" cy="274319"/>
           </a:xfrm>
           <a:prstGeom prst="rect">
             <a:avLst/>
@@ -6207,7 +6480,7 @@
               <a:buNone/>
             </a:pPr>
             <a:r>
-              <a:rPr lang="en-US" sz="1050" b="1" dirty="0">
+              <a:rPr lang="en-US" sz="2000" b="1" dirty="0">
                 <a:solidFill>
                   <a:srgbClr val="1E2761"/>
                 </a:solidFill>
@@ -6217,7 +6490,7 @@
               </a:rPr>
               <a:t>WAN Link</a:t>
             </a:r>
-            <a:endParaRPr lang="en-US" sz="1050" dirty="0"/>
+            <a:endParaRPr lang="en-US" sz="2000" dirty="0"/>
           </a:p>
           <a:p>
             <a:pPr marL="0" indent="0" algn="ctr">
@@ -6227,7 +6500,7 @@
               <a:buNone/>
             </a:pPr>
             <a:r>
-              <a:rPr lang="en-US" sz="1050" b="1" dirty="0">
+              <a:rPr lang="en-US" sz="2000" b="1" dirty="0">
                 <a:solidFill>
                   <a:srgbClr val="1E2761"/>
                 </a:solidFill>
@@ -6237,7 +6510,7 @@
               </a:rPr>
               <a:t>(between offices)</a:t>
             </a:r>
-            <a:endParaRPr lang="en-US" sz="1050" dirty="0"/>
+            <a:endParaRPr lang="en-US" sz="2000" dirty="0"/>
           </a:p>
         </p:txBody>
       </p:sp>
@@ -6266,7 +6539,7 @@
               <a:buNone/>
             </a:pPr>
             <a:r>
-              <a:rPr lang="en-US" sz="1250" i="1" dirty="0">
+              <a:rPr lang="en-US" sz="2000" i="1" dirty="0">
                 <a:solidFill>
                   <a:srgbClr val="222222"/>
                 </a:solidFill>
@@ -6274,9 +6547,31 @@
                 <a:ea typeface="Calibri" pitchFamily="34" charset="-122"/>
                 <a:cs typeface="Calibri" pitchFamily="34" charset="-120"/>
               </a:rPr>
-              <a:t>Routers direct traffic and switches connect the devices. Each office has two of each, so one can cover for the other.</a:t>
+              <a:t>Routers direct traffic and switches </a:t>
             </a:r>
-            <a:endParaRPr lang="en-US" sz="1250" dirty="0"/>
+            <a:r>
+              <a:rPr lang="en-US" sz="2000" i="1" dirty="0" smtClean="0">
+                <a:solidFill>
+                  <a:srgbClr val="222222"/>
+                </a:solidFill>
+                <a:latin typeface="Calibri" pitchFamily="34" charset="0"/>
+                <a:ea typeface="Calibri" pitchFamily="34" charset="-122"/>
+                <a:cs typeface="Calibri" pitchFamily="34" charset="-120"/>
+              </a:rPr>
+              <a:t>connect the </a:t>
+            </a:r>
+            <a:r>
+              <a:rPr lang="en-US" sz="2000" i="1" dirty="0">
+                <a:solidFill>
+                  <a:srgbClr val="222222"/>
+                </a:solidFill>
+                <a:latin typeface="Calibri" pitchFamily="34" charset="0"/>
+                <a:ea typeface="Calibri" pitchFamily="34" charset="-122"/>
+                <a:cs typeface="Calibri" pitchFamily="34" charset="-120"/>
+              </a:rPr>
+              <a:t>devices. Each office has two of each, so one can cover for the other.</a:t>
+            </a:r>
+            <a:endParaRPr lang="en-US" sz="2000" dirty="0"/>
           </a:p>
         </p:txBody>
       </p:sp>
@@ -6289,6 +6584,2517 @@
 </file>
 
 <file path=ppt/slides/slide5.xml><?xml version="1.0" encoding="utf-8"?>
+<p:sld xmlns:a="http://schemas.openxmlformats.org/drawingml/2006/main" xmlns:r="http://schemas.openxmlformats.org/officeDocument/2006/relationships" xmlns:p="http://schemas.openxmlformats.org/presentationml/2006/main">
+  <p:cSld name="Slide 7">
+    <p:bg>
+      <p:bgPr>
+        <a:solidFill>
+          <a:srgbClr val="FFFFFF"/>
+        </a:solidFill>
+        <a:effectLst/>
+      </p:bgPr>
+    </p:bg>
+    <p:spTree>
+      <p:nvGrpSpPr>
+        <p:cNvPr id="1" name=""/>
+        <p:cNvGrpSpPr/>
+        <p:nvPr/>
+      </p:nvGrpSpPr>
+      <p:grpSpPr>
+        <a:xfrm>
+          <a:off x="0" y="0"/>
+          <a:ext cx="0" cy="0"/>
+          <a:chOff x="0" y="0"/>
+          <a:chExt cx="0" cy="0"/>
+        </a:xfrm>
+      </p:grpSpPr>
+      <p:sp>
+        <p:nvSpPr>
+          <p:cNvPr id="2" name="Text 0"/>
+          <p:cNvSpPr txBox="1"/>
+          <p:nvPr/>
+        </p:nvSpPr>
+        <p:spPr>
+          <a:xfrm>
+            <a:off x="548640" y="320040"/>
+            <a:ext cx="11064240" cy="685800"/>
+          </a:xfrm>
+          <a:prstGeom prst="rect">
+            <a:avLst/>
+          </a:prstGeom>
+          <a:noFill/>
+          <a:ln/>
+        </p:spPr>
+        <p:txBody>
+          <a:bodyPr wrap="square" lIns="0" tIns="0" rIns="0" bIns="0" rtlCol="0" anchor="ctr"/>
+          <a:lstStyle/>
+          <a:p>
+            <a:pPr marL="0" indent="0" algn="l">
+              <a:buNone/>
+            </a:pPr>
+            <a:r>
+              <a:rPr lang="en-US" sz="3000" b="1" dirty="0">
+                <a:solidFill>
+                  <a:srgbClr val="1E2761"/>
+                </a:solidFill>
+                <a:latin typeface="Cambria" pitchFamily="34" charset="0"/>
+                <a:ea typeface="Cambria" pitchFamily="34" charset="-122"/>
+                <a:cs typeface="Cambria" pitchFamily="34" charset="-120"/>
+              </a:rPr>
+              <a:t>Each Department, Its Own Network</a:t>
+            </a:r>
+            <a:endParaRPr lang="en-US" sz="3000" dirty="0"/>
+          </a:p>
+        </p:txBody>
+      </p:sp>
+      <p:graphicFrame>
+        <p:nvGraphicFramePr>
+          <p:cNvPr id="8" name="Table 0"/>
+          <p:cNvGraphicFramePr>
+            <a:graphicFrameLocks noGrp="1"/>
+          </p:cNvGraphicFramePr>
+          <p:nvPr>
+            <p:extLst>
+              <p:ext uri="{D42A27DB-BD31-4B8C-83A1-F6EECF244321}">
+                <p14:modId xmlns:p14="http://schemas.microsoft.com/office/powerpoint/2010/main" val="3212266591"/>
+              </p:ext>
+            </p:extLst>
+          </p:nvPr>
+        </p:nvGraphicFramePr>
+        <p:xfrm>
+          <a:off x="640080" y="975360"/>
+          <a:ext cx="6949440" cy="4907280"/>
+        </p:xfrm>
+        <a:graphic>
+          <a:graphicData uri="http://schemas.openxmlformats.org/drawingml/2006/table">
+            <a:tbl>
+              <a:tblPr/>
+              <a:tblGrid>
+                <a:gridCol w="2377440">
+                  <a:extLst>
+                    <a:ext uri="{9D8B030D-6E8A-4147-A177-3AD203B41FA5}">
+                      <a16:colId xmlns:a16="http://schemas.microsoft.com/office/drawing/2014/main" val="20000"/>
+                    </a:ext>
+                  </a:extLst>
+                </a:gridCol>
+                <a:gridCol w="2560320">
+                  <a:extLst>
+                    <a:ext uri="{9D8B030D-6E8A-4147-A177-3AD203B41FA5}">
+                      <a16:colId xmlns:a16="http://schemas.microsoft.com/office/drawing/2014/main" val="20001"/>
+                    </a:ext>
+                  </a:extLst>
+                </a:gridCol>
+                <a:gridCol w="2011680">
+                  <a:extLst>
+                    <a:ext uri="{9D8B030D-6E8A-4147-A177-3AD203B41FA5}">
+                      <a16:colId xmlns:a16="http://schemas.microsoft.com/office/drawing/2014/main" val="20002"/>
+                    </a:ext>
+                  </a:extLst>
+                </a:gridCol>
+              </a:tblGrid>
+              <a:tr h="475488">
+                <a:tc>
+                  <a:txBody>
+                    <a:bodyPr/>
+                    <a:lstStyle/>
+                    <a:p>
+                      <a:pPr marL="0" indent="0" algn="l">
+                        <a:buNone/>
+                      </a:pPr>
+                      <a:r>
+                        <a:rPr lang="en-US" sz="2000" b="1" dirty="0">
+                          <a:solidFill>
+                            <a:srgbClr val="FFFFFF"/>
+                          </a:solidFill>
+                          <a:latin typeface="Calibri" pitchFamily="34" charset="0"/>
+                          <a:ea typeface="Calibri" pitchFamily="34" charset="-122"/>
+                          <a:cs typeface="Calibri" pitchFamily="34" charset="-120"/>
+                        </a:rPr>
+                        <a:t>VLAN</a:t>
+                      </a:r>
+                      <a:endParaRPr lang="en-US" sz="2000" dirty="0">
+                        <a:latin typeface="Calibri" charset="0"/>
+                        <a:ea typeface="Calibri" charset="0"/>
+                        <a:cs typeface="Calibri" charset="0"/>
+                      </a:endParaRPr>
+                    </a:p>
+                  </a:txBody>
+                  <a:tcPr anchor="ctr">
+                    <a:lnL w="12700" cap="flat" cmpd="sng" algn="ctr">
+                      <a:solidFill>
+                        <a:srgbClr val="DDDDDD"/>
+                      </a:solidFill>
+                      <a:prstDash val="solid"/>
+                      <a:round/>
+                      <a:headEnd type="none" w="med" len="med"/>
+                      <a:tailEnd type="none" w="med" len="med"/>
+                    </a:lnL>
+                    <a:lnR w="12700" cap="flat" cmpd="sng" algn="ctr">
+                      <a:solidFill>
+                        <a:srgbClr val="DDDDDD"/>
+                      </a:solidFill>
+                      <a:prstDash val="solid"/>
+                      <a:round/>
+                      <a:headEnd type="none" w="med" len="med"/>
+                      <a:tailEnd type="none" w="med" len="med"/>
+                    </a:lnR>
+                    <a:lnT w="12700" cap="flat" cmpd="sng" algn="ctr">
+                      <a:solidFill>
+                        <a:srgbClr val="DDDDDD"/>
+                      </a:solidFill>
+                      <a:prstDash val="solid"/>
+                      <a:round/>
+                      <a:headEnd type="none" w="med" len="med"/>
+                      <a:tailEnd type="none" w="med" len="med"/>
+                    </a:lnT>
+                    <a:lnB w="12700" cap="flat" cmpd="sng" algn="ctr">
+                      <a:solidFill>
+                        <a:srgbClr val="DDDDDD"/>
+                      </a:solidFill>
+                      <a:prstDash val="solid"/>
+                      <a:round/>
+                      <a:headEnd type="none" w="med" len="med"/>
+                      <a:tailEnd type="none" w="med" len="med"/>
+                    </a:lnB>
+                    <a:solidFill>
+                      <a:srgbClr val="1E2761"/>
+                    </a:solidFill>
+                  </a:tcPr>
+                </a:tc>
+                <a:tc>
+                  <a:txBody>
+                    <a:bodyPr/>
+                    <a:lstStyle/>
+                    <a:p>
+                      <a:pPr marL="0" indent="0" algn="l">
+                        <a:buNone/>
+                      </a:pPr>
+                      <a:r>
+                        <a:rPr lang="en-US" sz="2000" b="1" dirty="0">
+                          <a:solidFill>
+                            <a:srgbClr val="FFFFFF"/>
+                          </a:solidFill>
+                          <a:latin typeface="Calibri" pitchFamily="34" charset="0"/>
+                          <a:ea typeface="Calibri" pitchFamily="34" charset="-122"/>
+                          <a:cs typeface="Calibri" pitchFamily="34" charset="-120"/>
+                        </a:rPr>
+                        <a:t>Gateway (HQ / Branch)</a:t>
+                      </a:r>
+                      <a:endParaRPr lang="en-US" sz="2000" dirty="0">
+                        <a:latin typeface="Calibri" charset="0"/>
+                        <a:ea typeface="Calibri" charset="0"/>
+                        <a:cs typeface="Calibri" charset="0"/>
+                      </a:endParaRPr>
+                    </a:p>
+                  </a:txBody>
+                  <a:tcPr anchor="ctr">
+                    <a:lnL w="12700" cap="flat" cmpd="sng" algn="ctr">
+                      <a:solidFill>
+                        <a:srgbClr val="DDDDDD"/>
+                      </a:solidFill>
+                      <a:prstDash val="solid"/>
+                      <a:round/>
+                      <a:headEnd type="none" w="med" len="med"/>
+                      <a:tailEnd type="none" w="med" len="med"/>
+                    </a:lnL>
+                    <a:lnR w="12700" cap="flat" cmpd="sng" algn="ctr">
+                      <a:solidFill>
+                        <a:srgbClr val="DDDDDD"/>
+                      </a:solidFill>
+                      <a:prstDash val="solid"/>
+                      <a:round/>
+                      <a:headEnd type="none" w="med" len="med"/>
+                      <a:tailEnd type="none" w="med" len="med"/>
+                    </a:lnR>
+                    <a:lnT w="12700" cap="flat" cmpd="sng" algn="ctr">
+                      <a:solidFill>
+                        <a:srgbClr val="DDDDDD"/>
+                      </a:solidFill>
+                      <a:prstDash val="solid"/>
+                      <a:round/>
+                      <a:headEnd type="none" w="med" len="med"/>
+                      <a:tailEnd type="none" w="med" len="med"/>
+                    </a:lnT>
+                    <a:lnB w="12700" cap="flat" cmpd="sng" algn="ctr">
+                      <a:solidFill>
+                        <a:srgbClr val="DDDDDD"/>
+                      </a:solidFill>
+                      <a:prstDash val="solid"/>
+                      <a:round/>
+                      <a:headEnd type="none" w="med" len="med"/>
+                      <a:tailEnd type="none" w="med" len="med"/>
+                    </a:lnB>
+                    <a:solidFill>
+                      <a:srgbClr val="1E2761"/>
+                    </a:solidFill>
+                  </a:tcPr>
+                </a:tc>
+                <a:tc>
+                  <a:txBody>
+                    <a:bodyPr/>
+                    <a:lstStyle/>
+                    <a:p>
+                      <a:pPr marL="0" indent="0" algn="l">
+                        <a:buNone/>
+                      </a:pPr>
+                      <a:r>
+                        <a:rPr lang="en-US" sz="2000" b="1" dirty="0">
+                          <a:solidFill>
+                            <a:srgbClr val="FFFFFF"/>
+                          </a:solidFill>
+                          <a:latin typeface="Calibri" pitchFamily="34" charset="0"/>
+                          <a:ea typeface="Calibri" pitchFamily="34" charset="-122"/>
+                          <a:cs typeface="Calibri" pitchFamily="34" charset="-120"/>
+                        </a:rPr>
+                        <a:t>DHCP Range</a:t>
+                      </a:r>
+                      <a:endParaRPr lang="en-US" sz="2000" dirty="0">
+                        <a:latin typeface="Calibri" charset="0"/>
+                        <a:ea typeface="Calibri" charset="0"/>
+                        <a:cs typeface="Calibri" charset="0"/>
+                      </a:endParaRPr>
+                    </a:p>
+                  </a:txBody>
+                  <a:tcPr anchor="ctr">
+                    <a:lnL w="12700" cap="flat" cmpd="sng" algn="ctr">
+                      <a:solidFill>
+                        <a:srgbClr val="DDDDDD"/>
+                      </a:solidFill>
+                      <a:prstDash val="solid"/>
+                      <a:round/>
+                      <a:headEnd type="none" w="med" len="med"/>
+                      <a:tailEnd type="none" w="med" len="med"/>
+                    </a:lnL>
+                    <a:lnR w="12700" cap="flat" cmpd="sng" algn="ctr">
+                      <a:solidFill>
+                        <a:srgbClr val="DDDDDD"/>
+                      </a:solidFill>
+                      <a:prstDash val="solid"/>
+                      <a:round/>
+                      <a:headEnd type="none" w="med" len="med"/>
+                      <a:tailEnd type="none" w="med" len="med"/>
+                    </a:lnR>
+                    <a:lnT w="12700" cap="flat" cmpd="sng" algn="ctr">
+                      <a:solidFill>
+                        <a:srgbClr val="DDDDDD"/>
+                      </a:solidFill>
+                      <a:prstDash val="solid"/>
+                      <a:round/>
+                      <a:headEnd type="none" w="med" len="med"/>
+                      <a:tailEnd type="none" w="med" len="med"/>
+                    </a:lnT>
+                    <a:lnB w="12700" cap="flat" cmpd="sng" algn="ctr">
+                      <a:solidFill>
+                        <a:srgbClr val="DDDDDD"/>
+                      </a:solidFill>
+                      <a:prstDash val="solid"/>
+                      <a:round/>
+                      <a:headEnd type="none" w="med" len="med"/>
+                      <a:tailEnd type="none" w="med" len="med"/>
+                    </a:lnB>
+                    <a:solidFill>
+                      <a:srgbClr val="1E2761"/>
+                    </a:solidFill>
+                  </a:tcPr>
+                </a:tc>
+                <a:extLst>
+                  <a:ext uri="{0D108BD9-81ED-4DB2-BD59-A6C34878D82A}">
+                    <a16:rowId xmlns:a16="http://schemas.microsoft.com/office/drawing/2014/main" val="10000"/>
+                  </a:ext>
+                </a:extLst>
+              </a:tr>
+              <a:tr h="475488">
+                <a:tc>
+                  <a:txBody>
+                    <a:bodyPr/>
+                    <a:lstStyle/>
+                    <a:p>
+                      <a:pPr marL="0" indent="0" algn="l">
+                        <a:buNone/>
+                      </a:pPr>
+                      <a:r>
+                        <a:rPr lang="en-US" sz="2000" dirty="0">
+                          <a:solidFill>
+                            <a:srgbClr val="222222"/>
+                          </a:solidFill>
+                          <a:latin typeface="Calibri" pitchFamily="34" charset="0"/>
+                          <a:ea typeface="Calibri" pitchFamily="34" charset="-122"/>
+                          <a:cs typeface="Calibri" pitchFamily="34" charset="-120"/>
+                        </a:rPr>
+                        <a:t>10 - Sales</a:t>
+                      </a:r>
+                      <a:endParaRPr lang="en-US" sz="2000" dirty="0">
+                        <a:latin typeface="Calibri" charset="0"/>
+                        <a:ea typeface="Calibri" charset="0"/>
+                        <a:cs typeface="Calibri" charset="0"/>
+                      </a:endParaRPr>
+                    </a:p>
+                  </a:txBody>
+                  <a:tcPr anchor="ctr">
+                    <a:lnL w="12700" cap="flat" cmpd="sng" algn="ctr">
+                      <a:solidFill>
+                        <a:srgbClr val="DDDDDD"/>
+                      </a:solidFill>
+                      <a:prstDash val="solid"/>
+                      <a:round/>
+                      <a:headEnd type="none" w="med" len="med"/>
+                      <a:tailEnd type="none" w="med" len="med"/>
+                    </a:lnL>
+                    <a:lnR w="12700" cap="flat" cmpd="sng" algn="ctr">
+                      <a:solidFill>
+                        <a:srgbClr val="DDDDDD"/>
+                      </a:solidFill>
+                      <a:prstDash val="solid"/>
+                      <a:round/>
+                      <a:headEnd type="none" w="med" len="med"/>
+                      <a:tailEnd type="none" w="med" len="med"/>
+                    </a:lnR>
+                    <a:lnT w="12700" cap="flat" cmpd="sng" algn="ctr">
+                      <a:solidFill>
+                        <a:srgbClr val="DDDDDD"/>
+                      </a:solidFill>
+                      <a:prstDash val="solid"/>
+                      <a:round/>
+                      <a:headEnd type="none" w="med" len="med"/>
+                      <a:tailEnd type="none" w="med" len="med"/>
+                    </a:lnT>
+                    <a:lnB w="12700" cap="flat" cmpd="sng" algn="ctr">
+                      <a:solidFill>
+                        <a:srgbClr val="DDDDDD"/>
+                      </a:solidFill>
+                      <a:prstDash val="solid"/>
+                      <a:round/>
+                      <a:headEnd type="none" w="med" len="med"/>
+                      <a:tailEnd type="none" w="med" len="med"/>
+                    </a:lnB>
+                    <a:solidFill>
+                      <a:srgbClr val="FFFFFF"/>
+                    </a:solidFill>
+                  </a:tcPr>
+                </a:tc>
+                <a:tc>
+                  <a:txBody>
+                    <a:bodyPr/>
+                    <a:lstStyle/>
+                    <a:p>
+                      <a:pPr marL="0" indent="0" algn="l">
+                        <a:buNone/>
+                      </a:pPr>
+                      <a:r>
+                        <a:rPr lang="en-US" sz="2000" dirty="0">
+                          <a:solidFill>
+                            <a:srgbClr val="222222"/>
+                          </a:solidFill>
+                          <a:latin typeface="Calibri" pitchFamily="34" charset="0"/>
+                          <a:ea typeface="Calibri" pitchFamily="34" charset="-122"/>
+                          <a:cs typeface="Calibri" pitchFamily="34" charset="-120"/>
+                        </a:rPr>
+                        <a:t>10.10.10.1 / 10.20.10.1</a:t>
+                      </a:r>
+                      <a:endParaRPr lang="en-US" sz="2000" dirty="0">
+                        <a:latin typeface="Calibri" charset="0"/>
+                        <a:ea typeface="Calibri" charset="0"/>
+                        <a:cs typeface="Calibri" charset="0"/>
+                      </a:endParaRPr>
+                    </a:p>
+                  </a:txBody>
+                  <a:tcPr anchor="ctr">
+                    <a:lnL w="12700" cap="flat" cmpd="sng" algn="ctr">
+                      <a:solidFill>
+                        <a:srgbClr val="DDDDDD"/>
+                      </a:solidFill>
+                      <a:prstDash val="solid"/>
+                      <a:round/>
+                      <a:headEnd type="none" w="med" len="med"/>
+                      <a:tailEnd type="none" w="med" len="med"/>
+                    </a:lnL>
+                    <a:lnR w="12700" cap="flat" cmpd="sng" algn="ctr">
+                      <a:solidFill>
+                        <a:srgbClr val="DDDDDD"/>
+                      </a:solidFill>
+                      <a:prstDash val="solid"/>
+                      <a:round/>
+                      <a:headEnd type="none" w="med" len="med"/>
+                      <a:tailEnd type="none" w="med" len="med"/>
+                    </a:lnR>
+                    <a:lnT w="12700" cap="flat" cmpd="sng" algn="ctr">
+                      <a:solidFill>
+                        <a:srgbClr val="DDDDDD"/>
+                      </a:solidFill>
+                      <a:prstDash val="solid"/>
+                      <a:round/>
+                      <a:headEnd type="none" w="med" len="med"/>
+                      <a:tailEnd type="none" w="med" len="med"/>
+                    </a:lnT>
+                    <a:lnB w="12700" cap="flat" cmpd="sng" algn="ctr">
+                      <a:solidFill>
+                        <a:srgbClr val="DDDDDD"/>
+                      </a:solidFill>
+                      <a:prstDash val="solid"/>
+                      <a:round/>
+                      <a:headEnd type="none" w="med" len="med"/>
+                      <a:tailEnd type="none" w="med" len="med"/>
+                    </a:lnB>
+                    <a:solidFill>
+                      <a:srgbClr val="FFFFFF"/>
+                    </a:solidFill>
+                  </a:tcPr>
+                </a:tc>
+                <a:tc>
+                  <a:txBody>
+                    <a:bodyPr/>
+                    <a:lstStyle/>
+                    <a:p>
+                      <a:pPr marL="0" indent="0" algn="l">
+                        <a:buNone/>
+                      </a:pPr>
+                      <a:r>
+                        <a:rPr lang="en-US" sz="2000" dirty="0">
+                          <a:solidFill>
+                            <a:srgbClr val="222222"/>
+                          </a:solidFill>
+                          <a:latin typeface="Calibri" pitchFamily="34" charset="0"/>
+                          <a:ea typeface="Calibri" pitchFamily="34" charset="-122"/>
+                          <a:cs typeface="Calibri" pitchFamily="34" charset="-120"/>
+                        </a:rPr>
+                        <a:t>x.x.4-14</a:t>
+                      </a:r>
+                      <a:endParaRPr lang="en-US" sz="2000" dirty="0">
+                        <a:latin typeface="Calibri" charset="0"/>
+                        <a:ea typeface="Calibri" charset="0"/>
+                        <a:cs typeface="Calibri" charset="0"/>
+                      </a:endParaRPr>
+                    </a:p>
+                  </a:txBody>
+                  <a:tcPr anchor="ctr">
+                    <a:lnL w="12700" cap="flat" cmpd="sng" algn="ctr">
+                      <a:solidFill>
+                        <a:srgbClr val="DDDDDD"/>
+                      </a:solidFill>
+                      <a:prstDash val="solid"/>
+                      <a:round/>
+                      <a:headEnd type="none" w="med" len="med"/>
+                      <a:tailEnd type="none" w="med" len="med"/>
+                    </a:lnL>
+                    <a:lnR w="12700" cap="flat" cmpd="sng" algn="ctr">
+                      <a:solidFill>
+                        <a:srgbClr val="DDDDDD"/>
+                      </a:solidFill>
+                      <a:prstDash val="solid"/>
+                      <a:round/>
+                      <a:headEnd type="none" w="med" len="med"/>
+                      <a:tailEnd type="none" w="med" len="med"/>
+                    </a:lnR>
+                    <a:lnT w="12700" cap="flat" cmpd="sng" algn="ctr">
+                      <a:solidFill>
+                        <a:srgbClr val="DDDDDD"/>
+                      </a:solidFill>
+                      <a:prstDash val="solid"/>
+                      <a:round/>
+                      <a:headEnd type="none" w="med" len="med"/>
+                      <a:tailEnd type="none" w="med" len="med"/>
+                    </a:lnT>
+                    <a:lnB w="12700" cap="flat" cmpd="sng" algn="ctr">
+                      <a:solidFill>
+                        <a:srgbClr val="DDDDDD"/>
+                      </a:solidFill>
+                      <a:prstDash val="solid"/>
+                      <a:round/>
+                      <a:headEnd type="none" w="med" len="med"/>
+                      <a:tailEnd type="none" w="med" len="med"/>
+                    </a:lnB>
+                    <a:solidFill>
+                      <a:srgbClr val="FFFFFF"/>
+                    </a:solidFill>
+                  </a:tcPr>
+                </a:tc>
+                <a:extLst>
+                  <a:ext uri="{0D108BD9-81ED-4DB2-BD59-A6C34878D82A}">
+                    <a16:rowId xmlns:a16="http://schemas.microsoft.com/office/drawing/2014/main" val="10001"/>
+                  </a:ext>
+                </a:extLst>
+              </a:tr>
+              <a:tr h="475488">
+                <a:tc>
+                  <a:txBody>
+                    <a:bodyPr/>
+                    <a:lstStyle/>
+                    <a:p>
+                      <a:pPr marL="0" indent="0" algn="l">
+                        <a:buNone/>
+                      </a:pPr>
+                      <a:r>
+                        <a:rPr lang="en-US" sz="2000" dirty="0">
+                          <a:solidFill>
+                            <a:srgbClr val="222222"/>
+                          </a:solidFill>
+                          <a:latin typeface="Calibri" pitchFamily="34" charset="0"/>
+                          <a:ea typeface="Calibri" pitchFamily="34" charset="-122"/>
+                          <a:cs typeface="Calibri" pitchFamily="34" charset="-120"/>
+                        </a:rPr>
+                        <a:t>20 - Operations</a:t>
+                      </a:r>
+                      <a:endParaRPr lang="en-US" sz="2000" dirty="0">
+                        <a:latin typeface="Calibri" charset="0"/>
+                        <a:ea typeface="Calibri" charset="0"/>
+                        <a:cs typeface="Calibri" charset="0"/>
+                      </a:endParaRPr>
+                    </a:p>
+                  </a:txBody>
+                  <a:tcPr anchor="ctr">
+                    <a:lnL w="12700" cap="flat" cmpd="sng" algn="ctr">
+                      <a:solidFill>
+                        <a:srgbClr val="DDDDDD"/>
+                      </a:solidFill>
+                      <a:prstDash val="solid"/>
+                      <a:round/>
+                      <a:headEnd type="none" w="med" len="med"/>
+                      <a:tailEnd type="none" w="med" len="med"/>
+                    </a:lnL>
+                    <a:lnR w="12700" cap="flat" cmpd="sng" algn="ctr">
+                      <a:solidFill>
+                        <a:srgbClr val="DDDDDD"/>
+                      </a:solidFill>
+                      <a:prstDash val="solid"/>
+                      <a:round/>
+                      <a:headEnd type="none" w="med" len="med"/>
+                      <a:tailEnd type="none" w="med" len="med"/>
+                    </a:lnR>
+                    <a:lnT w="12700" cap="flat" cmpd="sng" algn="ctr">
+                      <a:solidFill>
+                        <a:srgbClr val="DDDDDD"/>
+                      </a:solidFill>
+                      <a:prstDash val="solid"/>
+                      <a:round/>
+                      <a:headEnd type="none" w="med" len="med"/>
+                      <a:tailEnd type="none" w="med" len="med"/>
+                    </a:lnT>
+                    <a:lnB w="12700" cap="flat" cmpd="sng" algn="ctr">
+                      <a:solidFill>
+                        <a:srgbClr val="DDDDDD"/>
+                      </a:solidFill>
+                      <a:prstDash val="solid"/>
+                      <a:round/>
+                      <a:headEnd type="none" w="med" len="med"/>
+                      <a:tailEnd type="none" w="med" len="med"/>
+                    </a:lnB>
+                    <a:solidFill>
+                      <a:srgbClr val="CADCFC"/>
+                    </a:solidFill>
+                  </a:tcPr>
+                </a:tc>
+                <a:tc>
+                  <a:txBody>
+                    <a:bodyPr/>
+                    <a:lstStyle/>
+                    <a:p>
+                      <a:pPr marL="0" indent="0" algn="l">
+                        <a:buNone/>
+                      </a:pPr>
+                      <a:r>
+                        <a:rPr lang="en-US" sz="2000" dirty="0">
+                          <a:solidFill>
+                            <a:srgbClr val="222222"/>
+                          </a:solidFill>
+                          <a:latin typeface="Calibri" pitchFamily="34" charset="0"/>
+                          <a:ea typeface="Calibri" pitchFamily="34" charset="-122"/>
+                          <a:cs typeface="Calibri" pitchFamily="34" charset="-120"/>
+                        </a:rPr>
+                        <a:t>10.10.20.1 / 10.20.20.1</a:t>
+                      </a:r>
+                      <a:endParaRPr lang="en-US" sz="2000" dirty="0">
+                        <a:latin typeface="Calibri" charset="0"/>
+                        <a:ea typeface="Calibri" charset="0"/>
+                        <a:cs typeface="Calibri" charset="0"/>
+                      </a:endParaRPr>
+                    </a:p>
+                  </a:txBody>
+                  <a:tcPr anchor="ctr">
+                    <a:lnL w="12700" cap="flat" cmpd="sng" algn="ctr">
+                      <a:solidFill>
+                        <a:srgbClr val="DDDDDD"/>
+                      </a:solidFill>
+                      <a:prstDash val="solid"/>
+                      <a:round/>
+                      <a:headEnd type="none" w="med" len="med"/>
+                      <a:tailEnd type="none" w="med" len="med"/>
+                    </a:lnL>
+                    <a:lnR w="12700" cap="flat" cmpd="sng" algn="ctr">
+                      <a:solidFill>
+                        <a:srgbClr val="DDDDDD"/>
+                      </a:solidFill>
+                      <a:prstDash val="solid"/>
+                      <a:round/>
+                      <a:headEnd type="none" w="med" len="med"/>
+                      <a:tailEnd type="none" w="med" len="med"/>
+                    </a:lnR>
+                    <a:lnT w="12700" cap="flat" cmpd="sng" algn="ctr">
+                      <a:solidFill>
+                        <a:srgbClr val="DDDDDD"/>
+                      </a:solidFill>
+                      <a:prstDash val="solid"/>
+                      <a:round/>
+                      <a:headEnd type="none" w="med" len="med"/>
+                      <a:tailEnd type="none" w="med" len="med"/>
+                    </a:lnT>
+                    <a:lnB w="12700" cap="flat" cmpd="sng" algn="ctr">
+                      <a:solidFill>
+                        <a:srgbClr val="DDDDDD"/>
+                      </a:solidFill>
+                      <a:prstDash val="solid"/>
+                      <a:round/>
+                      <a:headEnd type="none" w="med" len="med"/>
+                      <a:tailEnd type="none" w="med" len="med"/>
+                    </a:lnB>
+                    <a:solidFill>
+                      <a:srgbClr val="CADCFC"/>
+                    </a:solidFill>
+                  </a:tcPr>
+                </a:tc>
+                <a:tc>
+                  <a:txBody>
+                    <a:bodyPr/>
+                    <a:lstStyle/>
+                    <a:p>
+                      <a:pPr marL="0" indent="0" algn="l">
+                        <a:buNone/>
+                      </a:pPr>
+                      <a:r>
+                        <a:rPr lang="en-US" sz="2000" dirty="0">
+                          <a:solidFill>
+                            <a:srgbClr val="222222"/>
+                          </a:solidFill>
+                          <a:latin typeface="Calibri" pitchFamily="34" charset="0"/>
+                          <a:ea typeface="Calibri" pitchFamily="34" charset="-122"/>
+                          <a:cs typeface="Calibri" pitchFamily="34" charset="-120"/>
+                        </a:rPr>
+                        <a:t>x.x.4-14</a:t>
+                      </a:r>
+                      <a:endParaRPr lang="en-US" sz="2000" dirty="0">
+                        <a:latin typeface="Calibri" charset="0"/>
+                        <a:ea typeface="Calibri" charset="0"/>
+                        <a:cs typeface="Calibri" charset="0"/>
+                      </a:endParaRPr>
+                    </a:p>
+                  </a:txBody>
+                  <a:tcPr anchor="ctr">
+                    <a:lnL w="12700" cap="flat" cmpd="sng" algn="ctr">
+                      <a:solidFill>
+                        <a:srgbClr val="DDDDDD"/>
+                      </a:solidFill>
+                      <a:prstDash val="solid"/>
+                      <a:round/>
+                      <a:headEnd type="none" w="med" len="med"/>
+                      <a:tailEnd type="none" w="med" len="med"/>
+                    </a:lnL>
+                    <a:lnR w="12700" cap="flat" cmpd="sng" algn="ctr">
+                      <a:solidFill>
+                        <a:srgbClr val="DDDDDD"/>
+                      </a:solidFill>
+                      <a:prstDash val="solid"/>
+                      <a:round/>
+                      <a:headEnd type="none" w="med" len="med"/>
+                      <a:tailEnd type="none" w="med" len="med"/>
+                    </a:lnR>
+                    <a:lnT w="12700" cap="flat" cmpd="sng" algn="ctr">
+                      <a:solidFill>
+                        <a:srgbClr val="DDDDDD"/>
+                      </a:solidFill>
+                      <a:prstDash val="solid"/>
+                      <a:round/>
+                      <a:headEnd type="none" w="med" len="med"/>
+                      <a:tailEnd type="none" w="med" len="med"/>
+                    </a:lnT>
+                    <a:lnB w="12700" cap="flat" cmpd="sng" algn="ctr">
+                      <a:solidFill>
+                        <a:srgbClr val="DDDDDD"/>
+                      </a:solidFill>
+                      <a:prstDash val="solid"/>
+                      <a:round/>
+                      <a:headEnd type="none" w="med" len="med"/>
+                      <a:tailEnd type="none" w="med" len="med"/>
+                    </a:lnB>
+                    <a:solidFill>
+                      <a:srgbClr val="CADCFC"/>
+                    </a:solidFill>
+                  </a:tcPr>
+                </a:tc>
+                <a:extLst>
+                  <a:ext uri="{0D108BD9-81ED-4DB2-BD59-A6C34878D82A}">
+                    <a16:rowId xmlns:a16="http://schemas.microsoft.com/office/drawing/2014/main" val="10002"/>
+                  </a:ext>
+                </a:extLst>
+              </a:tr>
+              <a:tr h="475488">
+                <a:tc>
+                  <a:txBody>
+                    <a:bodyPr/>
+                    <a:lstStyle/>
+                    <a:p>
+                      <a:pPr marL="0" indent="0" algn="l">
+                        <a:buNone/>
+                      </a:pPr>
+                      <a:r>
+                        <a:rPr lang="en-US" sz="2000" dirty="0">
+                          <a:solidFill>
+                            <a:srgbClr val="222222"/>
+                          </a:solidFill>
+                          <a:latin typeface="Calibri" pitchFamily="34" charset="0"/>
+                          <a:ea typeface="Calibri" pitchFamily="34" charset="-122"/>
+                          <a:cs typeface="Calibri" pitchFamily="34" charset="-120"/>
+                        </a:rPr>
+                        <a:t>30 - IT</a:t>
+                      </a:r>
+                      <a:endParaRPr lang="en-US" sz="2000" dirty="0">
+                        <a:latin typeface="Calibri" charset="0"/>
+                        <a:ea typeface="Calibri" charset="0"/>
+                        <a:cs typeface="Calibri" charset="0"/>
+                      </a:endParaRPr>
+                    </a:p>
+                  </a:txBody>
+                  <a:tcPr anchor="ctr">
+                    <a:lnL w="12700" cap="flat" cmpd="sng" algn="ctr">
+                      <a:solidFill>
+                        <a:srgbClr val="DDDDDD"/>
+                      </a:solidFill>
+                      <a:prstDash val="solid"/>
+                      <a:round/>
+                      <a:headEnd type="none" w="med" len="med"/>
+                      <a:tailEnd type="none" w="med" len="med"/>
+                    </a:lnL>
+                    <a:lnR w="12700" cap="flat" cmpd="sng" algn="ctr">
+                      <a:solidFill>
+                        <a:srgbClr val="DDDDDD"/>
+                      </a:solidFill>
+                      <a:prstDash val="solid"/>
+                      <a:round/>
+                      <a:headEnd type="none" w="med" len="med"/>
+                      <a:tailEnd type="none" w="med" len="med"/>
+                    </a:lnR>
+                    <a:lnT w="12700" cap="flat" cmpd="sng" algn="ctr">
+                      <a:solidFill>
+                        <a:srgbClr val="DDDDDD"/>
+                      </a:solidFill>
+                      <a:prstDash val="solid"/>
+                      <a:round/>
+                      <a:headEnd type="none" w="med" len="med"/>
+                      <a:tailEnd type="none" w="med" len="med"/>
+                    </a:lnT>
+                    <a:lnB w="12700" cap="flat" cmpd="sng" algn="ctr">
+                      <a:solidFill>
+                        <a:srgbClr val="DDDDDD"/>
+                      </a:solidFill>
+                      <a:prstDash val="solid"/>
+                      <a:round/>
+                      <a:headEnd type="none" w="med" len="med"/>
+                      <a:tailEnd type="none" w="med" len="med"/>
+                    </a:lnB>
+                    <a:solidFill>
+                      <a:srgbClr val="FFFFFF"/>
+                    </a:solidFill>
+                  </a:tcPr>
+                </a:tc>
+                <a:tc>
+                  <a:txBody>
+                    <a:bodyPr/>
+                    <a:lstStyle/>
+                    <a:p>
+                      <a:pPr marL="0" indent="0" algn="l">
+                        <a:buNone/>
+                      </a:pPr>
+                      <a:r>
+                        <a:rPr lang="en-US" sz="2000" dirty="0">
+                          <a:solidFill>
+                            <a:srgbClr val="222222"/>
+                          </a:solidFill>
+                          <a:latin typeface="Calibri" pitchFamily="34" charset="0"/>
+                          <a:ea typeface="Calibri" pitchFamily="34" charset="-122"/>
+                          <a:cs typeface="Calibri" pitchFamily="34" charset="-120"/>
+                        </a:rPr>
+                        <a:t>10.10.30.1 / 10.20.30.1</a:t>
+                      </a:r>
+                      <a:endParaRPr lang="en-US" sz="2000" dirty="0">
+                        <a:latin typeface="Calibri" charset="0"/>
+                        <a:ea typeface="Calibri" charset="0"/>
+                        <a:cs typeface="Calibri" charset="0"/>
+                      </a:endParaRPr>
+                    </a:p>
+                  </a:txBody>
+                  <a:tcPr anchor="ctr">
+                    <a:lnL w="12700" cap="flat" cmpd="sng" algn="ctr">
+                      <a:solidFill>
+                        <a:srgbClr val="DDDDDD"/>
+                      </a:solidFill>
+                      <a:prstDash val="solid"/>
+                      <a:round/>
+                      <a:headEnd type="none" w="med" len="med"/>
+                      <a:tailEnd type="none" w="med" len="med"/>
+                    </a:lnL>
+                    <a:lnR w="12700" cap="flat" cmpd="sng" algn="ctr">
+                      <a:solidFill>
+                        <a:srgbClr val="DDDDDD"/>
+                      </a:solidFill>
+                      <a:prstDash val="solid"/>
+                      <a:round/>
+                      <a:headEnd type="none" w="med" len="med"/>
+                      <a:tailEnd type="none" w="med" len="med"/>
+                    </a:lnR>
+                    <a:lnT w="12700" cap="flat" cmpd="sng" algn="ctr">
+                      <a:solidFill>
+                        <a:srgbClr val="DDDDDD"/>
+                      </a:solidFill>
+                      <a:prstDash val="solid"/>
+                      <a:round/>
+                      <a:headEnd type="none" w="med" len="med"/>
+                      <a:tailEnd type="none" w="med" len="med"/>
+                    </a:lnT>
+                    <a:lnB w="12700" cap="flat" cmpd="sng" algn="ctr">
+                      <a:solidFill>
+                        <a:srgbClr val="DDDDDD"/>
+                      </a:solidFill>
+                      <a:prstDash val="solid"/>
+                      <a:round/>
+                      <a:headEnd type="none" w="med" len="med"/>
+                      <a:tailEnd type="none" w="med" len="med"/>
+                    </a:lnB>
+                    <a:solidFill>
+                      <a:srgbClr val="FFFFFF"/>
+                    </a:solidFill>
+                  </a:tcPr>
+                </a:tc>
+                <a:tc>
+                  <a:txBody>
+                    <a:bodyPr/>
+                    <a:lstStyle/>
+                    <a:p>
+                      <a:pPr marL="0" indent="0" algn="l">
+                        <a:buNone/>
+                      </a:pPr>
+                      <a:r>
+                        <a:rPr lang="en-US" sz="2000" dirty="0">
+                          <a:solidFill>
+                            <a:srgbClr val="222222"/>
+                          </a:solidFill>
+                          <a:latin typeface="Calibri" pitchFamily="34" charset="0"/>
+                          <a:ea typeface="Calibri" pitchFamily="34" charset="-122"/>
+                          <a:cs typeface="Calibri" pitchFamily="34" charset="-120"/>
+                        </a:rPr>
+                        <a:t>x.x.4/5-14</a:t>
+                      </a:r>
+                      <a:endParaRPr lang="en-US" sz="2000" dirty="0">
+                        <a:latin typeface="Calibri" charset="0"/>
+                        <a:ea typeface="Calibri" charset="0"/>
+                        <a:cs typeface="Calibri" charset="0"/>
+                      </a:endParaRPr>
+                    </a:p>
+                  </a:txBody>
+                  <a:tcPr anchor="ctr">
+                    <a:lnL w="12700" cap="flat" cmpd="sng" algn="ctr">
+                      <a:solidFill>
+                        <a:srgbClr val="DDDDDD"/>
+                      </a:solidFill>
+                      <a:prstDash val="solid"/>
+                      <a:round/>
+                      <a:headEnd type="none" w="med" len="med"/>
+                      <a:tailEnd type="none" w="med" len="med"/>
+                    </a:lnL>
+                    <a:lnR w="12700" cap="flat" cmpd="sng" algn="ctr">
+                      <a:solidFill>
+                        <a:srgbClr val="DDDDDD"/>
+                      </a:solidFill>
+                      <a:prstDash val="solid"/>
+                      <a:round/>
+                      <a:headEnd type="none" w="med" len="med"/>
+                      <a:tailEnd type="none" w="med" len="med"/>
+                    </a:lnR>
+                    <a:lnT w="12700" cap="flat" cmpd="sng" algn="ctr">
+                      <a:solidFill>
+                        <a:srgbClr val="DDDDDD"/>
+                      </a:solidFill>
+                      <a:prstDash val="solid"/>
+                      <a:round/>
+                      <a:headEnd type="none" w="med" len="med"/>
+                      <a:tailEnd type="none" w="med" len="med"/>
+                    </a:lnT>
+                    <a:lnB w="12700" cap="flat" cmpd="sng" algn="ctr">
+                      <a:solidFill>
+                        <a:srgbClr val="DDDDDD"/>
+                      </a:solidFill>
+                      <a:prstDash val="solid"/>
+                      <a:round/>
+                      <a:headEnd type="none" w="med" len="med"/>
+                      <a:tailEnd type="none" w="med" len="med"/>
+                    </a:lnB>
+                    <a:solidFill>
+                      <a:srgbClr val="FFFFFF"/>
+                    </a:solidFill>
+                  </a:tcPr>
+                </a:tc>
+                <a:extLst>
+                  <a:ext uri="{0D108BD9-81ED-4DB2-BD59-A6C34878D82A}">
+                    <a16:rowId xmlns:a16="http://schemas.microsoft.com/office/drawing/2014/main" val="10003"/>
+                  </a:ext>
+                </a:extLst>
+              </a:tr>
+              <a:tr h="475488">
+                <a:tc>
+                  <a:txBody>
+                    <a:bodyPr/>
+                    <a:lstStyle/>
+                    <a:p>
+                      <a:pPr marL="0" indent="0" algn="l">
+                        <a:buNone/>
+                      </a:pPr>
+                      <a:r>
+                        <a:rPr lang="en-US" sz="2000" dirty="0">
+                          <a:solidFill>
+                            <a:srgbClr val="222222"/>
+                          </a:solidFill>
+                          <a:latin typeface="Calibri" pitchFamily="34" charset="0"/>
+                          <a:ea typeface="Calibri" pitchFamily="34" charset="-122"/>
+                          <a:cs typeface="Calibri" pitchFamily="34" charset="-120"/>
+                        </a:rPr>
+                        <a:t>40 - Management (HQ)</a:t>
+                      </a:r>
+                      <a:endParaRPr lang="en-US" sz="2000" dirty="0">
+                        <a:latin typeface="Calibri" charset="0"/>
+                        <a:ea typeface="Calibri" charset="0"/>
+                        <a:cs typeface="Calibri" charset="0"/>
+                      </a:endParaRPr>
+                    </a:p>
+                  </a:txBody>
+                  <a:tcPr anchor="ctr">
+                    <a:lnL w="12700" cap="flat" cmpd="sng" algn="ctr">
+                      <a:solidFill>
+                        <a:srgbClr val="DDDDDD"/>
+                      </a:solidFill>
+                      <a:prstDash val="solid"/>
+                      <a:round/>
+                      <a:headEnd type="none" w="med" len="med"/>
+                      <a:tailEnd type="none" w="med" len="med"/>
+                    </a:lnL>
+                    <a:lnR w="12700" cap="flat" cmpd="sng" algn="ctr">
+                      <a:solidFill>
+                        <a:srgbClr val="DDDDDD"/>
+                      </a:solidFill>
+                      <a:prstDash val="solid"/>
+                      <a:round/>
+                      <a:headEnd type="none" w="med" len="med"/>
+                      <a:tailEnd type="none" w="med" len="med"/>
+                    </a:lnR>
+                    <a:lnT w="12700" cap="flat" cmpd="sng" algn="ctr">
+                      <a:solidFill>
+                        <a:srgbClr val="DDDDDD"/>
+                      </a:solidFill>
+                      <a:prstDash val="solid"/>
+                      <a:round/>
+                      <a:headEnd type="none" w="med" len="med"/>
+                      <a:tailEnd type="none" w="med" len="med"/>
+                    </a:lnT>
+                    <a:lnB w="12700" cap="flat" cmpd="sng" algn="ctr">
+                      <a:solidFill>
+                        <a:srgbClr val="DDDDDD"/>
+                      </a:solidFill>
+                      <a:prstDash val="solid"/>
+                      <a:round/>
+                      <a:headEnd type="none" w="med" len="med"/>
+                      <a:tailEnd type="none" w="med" len="med"/>
+                    </a:lnB>
+                    <a:solidFill>
+                      <a:srgbClr val="CADCFC"/>
+                    </a:solidFill>
+                  </a:tcPr>
+                </a:tc>
+                <a:tc>
+                  <a:txBody>
+                    <a:bodyPr/>
+                    <a:lstStyle/>
+                    <a:p>
+                      <a:pPr marL="0" indent="0" algn="l">
+                        <a:buNone/>
+                      </a:pPr>
+                      <a:r>
+                        <a:rPr lang="en-US" sz="2000" dirty="0">
+                          <a:solidFill>
+                            <a:srgbClr val="222222"/>
+                          </a:solidFill>
+                          <a:latin typeface="Calibri" pitchFamily="34" charset="0"/>
+                          <a:ea typeface="Calibri" pitchFamily="34" charset="-122"/>
+                          <a:cs typeface="Calibri" pitchFamily="34" charset="-120"/>
+                        </a:rPr>
+                        <a:t>10.10.40.1</a:t>
+                      </a:r>
+                      <a:endParaRPr lang="en-US" sz="2000" dirty="0">
+                        <a:latin typeface="Calibri" charset="0"/>
+                        <a:ea typeface="Calibri" charset="0"/>
+                        <a:cs typeface="Calibri" charset="0"/>
+                      </a:endParaRPr>
+                    </a:p>
+                  </a:txBody>
+                  <a:tcPr anchor="ctr">
+                    <a:lnL w="12700" cap="flat" cmpd="sng" algn="ctr">
+                      <a:solidFill>
+                        <a:srgbClr val="DDDDDD"/>
+                      </a:solidFill>
+                      <a:prstDash val="solid"/>
+                      <a:round/>
+                      <a:headEnd type="none" w="med" len="med"/>
+                      <a:tailEnd type="none" w="med" len="med"/>
+                    </a:lnL>
+                    <a:lnR w="12700" cap="flat" cmpd="sng" algn="ctr">
+                      <a:solidFill>
+                        <a:srgbClr val="DDDDDD"/>
+                      </a:solidFill>
+                      <a:prstDash val="solid"/>
+                      <a:round/>
+                      <a:headEnd type="none" w="med" len="med"/>
+                      <a:tailEnd type="none" w="med" len="med"/>
+                    </a:lnR>
+                    <a:lnT w="12700" cap="flat" cmpd="sng" algn="ctr">
+                      <a:solidFill>
+                        <a:srgbClr val="DDDDDD"/>
+                      </a:solidFill>
+                      <a:prstDash val="solid"/>
+                      <a:round/>
+                      <a:headEnd type="none" w="med" len="med"/>
+                      <a:tailEnd type="none" w="med" len="med"/>
+                    </a:lnT>
+                    <a:lnB w="12700" cap="flat" cmpd="sng" algn="ctr">
+                      <a:solidFill>
+                        <a:srgbClr val="DDDDDD"/>
+                      </a:solidFill>
+                      <a:prstDash val="solid"/>
+                      <a:round/>
+                      <a:headEnd type="none" w="med" len="med"/>
+                      <a:tailEnd type="none" w="med" len="med"/>
+                    </a:lnB>
+                    <a:solidFill>
+                      <a:srgbClr val="CADCFC"/>
+                    </a:solidFill>
+                  </a:tcPr>
+                </a:tc>
+                <a:tc>
+                  <a:txBody>
+                    <a:bodyPr/>
+                    <a:lstStyle/>
+                    <a:p>
+                      <a:pPr marL="0" indent="0" algn="l">
+                        <a:buNone/>
+                      </a:pPr>
+                      <a:r>
+                        <a:rPr lang="en-US" sz="2000" dirty="0">
+                          <a:solidFill>
+                            <a:srgbClr val="222222"/>
+                          </a:solidFill>
+                          <a:latin typeface="Calibri" pitchFamily="34" charset="0"/>
+                          <a:ea typeface="Calibri" pitchFamily="34" charset="-122"/>
+                          <a:cs typeface="Calibri" pitchFamily="34" charset="-120"/>
+                        </a:rPr>
+                        <a:t>x.x.4-6</a:t>
+                      </a:r>
+                      <a:endParaRPr lang="en-US" sz="2000" dirty="0">
+                        <a:latin typeface="Calibri" charset="0"/>
+                        <a:ea typeface="Calibri" charset="0"/>
+                        <a:cs typeface="Calibri" charset="0"/>
+                      </a:endParaRPr>
+                    </a:p>
+                  </a:txBody>
+                  <a:tcPr anchor="ctr">
+                    <a:lnL w="12700" cap="flat" cmpd="sng" algn="ctr">
+                      <a:solidFill>
+                        <a:srgbClr val="DDDDDD"/>
+                      </a:solidFill>
+                      <a:prstDash val="solid"/>
+                      <a:round/>
+                      <a:headEnd type="none" w="med" len="med"/>
+                      <a:tailEnd type="none" w="med" len="med"/>
+                    </a:lnL>
+                    <a:lnR w="12700" cap="flat" cmpd="sng" algn="ctr">
+                      <a:solidFill>
+                        <a:srgbClr val="DDDDDD"/>
+                      </a:solidFill>
+                      <a:prstDash val="solid"/>
+                      <a:round/>
+                      <a:headEnd type="none" w="med" len="med"/>
+                      <a:tailEnd type="none" w="med" len="med"/>
+                    </a:lnR>
+                    <a:lnT w="12700" cap="flat" cmpd="sng" algn="ctr">
+                      <a:solidFill>
+                        <a:srgbClr val="DDDDDD"/>
+                      </a:solidFill>
+                      <a:prstDash val="solid"/>
+                      <a:round/>
+                      <a:headEnd type="none" w="med" len="med"/>
+                      <a:tailEnd type="none" w="med" len="med"/>
+                    </a:lnT>
+                    <a:lnB w="12700" cap="flat" cmpd="sng" algn="ctr">
+                      <a:solidFill>
+                        <a:srgbClr val="DDDDDD"/>
+                      </a:solidFill>
+                      <a:prstDash val="solid"/>
+                      <a:round/>
+                      <a:headEnd type="none" w="med" len="med"/>
+                      <a:tailEnd type="none" w="med" len="med"/>
+                    </a:lnB>
+                    <a:solidFill>
+                      <a:srgbClr val="CADCFC"/>
+                    </a:solidFill>
+                  </a:tcPr>
+                </a:tc>
+                <a:extLst>
+                  <a:ext uri="{0D108BD9-81ED-4DB2-BD59-A6C34878D82A}">
+                    <a16:rowId xmlns:a16="http://schemas.microsoft.com/office/drawing/2014/main" val="10004"/>
+                  </a:ext>
+                </a:extLst>
+              </a:tr>
+              <a:tr h="475488">
+                <a:tc>
+                  <a:txBody>
+                    <a:bodyPr/>
+                    <a:lstStyle/>
+                    <a:p>
+                      <a:pPr marL="0" indent="0" algn="l">
+                        <a:buNone/>
+                      </a:pPr>
+                      <a:r>
+                        <a:rPr lang="en-US" sz="2000" dirty="0">
+                          <a:solidFill>
+                            <a:srgbClr val="222222"/>
+                          </a:solidFill>
+                          <a:latin typeface="Calibri" pitchFamily="34" charset="0"/>
+                          <a:ea typeface="Calibri" pitchFamily="34" charset="-122"/>
+                          <a:cs typeface="Calibri" pitchFamily="34" charset="-120"/>
+                        </a:rPr>
+                        <a:t>50 - Guest</a:t>
+                      </a:r>
+                      <a:endParaRPr lang="en-US" sz="2000" dirty="0">
+                        <a:latin typeface="Calibri" charset="0"/>
+                        <a:ea typeface="Calibri" charset="0"/>
+                        <a:cs typeface="Calibri" charset="0"/>
+                      </a:endParaRPr>
+                    </a:p>
+                  </a:txBody>
+                  <a:tcPr anchor="ctr">
+                    <a:lnL w="12700" cap="flat" cmpd="sng" algn="ctr">
+                      <a:solidFill>
+                        <a:srgbClr val="DDDDDD"/>
+                      </a:solidFill>
+                      <a:prstDash val="solid"/>
+                      <a:round/>
+                      <a:headEnd type="none" w="med" len="med"/>
+                      <a:tailEnd type="none" w="med" len="med"/>
+                    </a:lnL>
+                    <a:lnR w="12700" cap="flat" cmpd="sng" algn="ctr">
+                      <a:solidFill>
+                        <a:srgbClr val="DDDDDD"/>
+                      </a:solidFill>
+                      <a:prstDash val="solid"/>
+                      <a:round/>
+                      <a:headEnd type="none" w="med" len="med"/>
+                      <a:tailEnd type="none" w="med" len="med"/>
+                    </a:lnR>
+                    <a:lnT w="12700" cap="flat" cmpd="sng" algn="ctr">
+                      <a:solidFill>
+                        <a:srgbClr val="DDDDDD"/>
+                      </a:solidFill>
+                      <a:prstDash val="solid"/>
+                      <a:round/>
+                      <a:headEnd type="none" w="med" len="med"/>
+                      <a:tailEnd type="none" w="med" len="med"/>
+                    </a:lnT>
+                    <a:lnB w="12700" cap="flat" cmpd="sng" algn="ctr">
+                      <a:solidFill>
+                        <a:srgbClr val="DDDDDD"/>
+                      </a:solidFill>
+                      <a:prstDash val="solid"/>
+                      <a:round/>
+                      <a:headEnd type="none" w="med" len="med"/>
+                      <a:tailEnd type="none" w="med" len="med"/>
+                    </a:lnB>
+                    <a:solidFill>
+                      <a:srgbClr val="FFFFFF"/>
+                    </a:solidFill>
+                  </a:tcPr>
+                </a:tc>
+                <a:tc>
+                  <a:txBody>
+                    <a:bodyPr/>
+                    <a:lstStyle/>
+                    <a:p>
+                      <a:pPr marL="0" indent="0" algn="l">
+                        <a:buNone/>
+                      </a:pPr>
+                      <a:r>
+                        <a:rPr lang="en-US" sz="2000" dirty="0">
+                          <a:solidFill>
+                            <a:srgbClr val="222222"/>
+                          </a:solidFill>
+                          <a:latin typeface="Calibri" pitchFamily="34" charset="0"/>
+                          <a:ea typeface="Calibri" pitchFamily="34" charset="-122"/>
+                          <a:cs typeface="Calibri" pitchFamily="34" charset="-120"/>
+                        </a:rPr>
+                        <a:t>10.10.50.1 / 10.20.50.1</a:t>
+                      </a:r>
+                      <a:endParaRPr lang="en-US" sz="2000" dirty="0">
+                        <a:latin typeface="Calibri" charset="0"/>
+                        <a:ea typeface="Calibri" charset="0"/>
+                        <a:cs typeface="Calibri" charset="0"/>
+                      </a:endParaRPr>
+                    </a:p>
+                  </a:txBody>
+                  <a:tcPr anchor="ctr">
+                    <a:lnL w="12700" cap="flat" cmpd="sng" algn="ctr">
+                      <a:solidFill>
+                        <a:srgbClr val="DDDDDD"/>
+                      </a:solidFill>
+                      <a:prstDash val="solid"/>
+                      <a:round/>
+                      <a:headEnd type="none" w="med" len="med"/>
+                      <a:tailEnd type="none" w="med" len="med"/>
+                    </a:lnL>
+                    <a:lnR w="12700" cap="flat" cmpd="sng" algn="ctr">
+                      <a:solidFill>
+                        <a:srgbClr val="DDDDDD"/>
+                      </a:solidFill>
+                      <a:prstDash val="solid"/>
+                      <a:round/>
+                      <a:headEnd type="none" w="med" len="med"/>
+                      <a:tailEnd type="none" w="med" len="med"/>
+                    </a:lnR>
+                    <a:lnT w="12700" cap="flat" cmpd="sng" algn="ctr">
+                      <a:solidFill>
+                        <a:srgbClr val="DDDDDD"/>
+                      </a:solidFill>
+                      <a:prstDash val="solid"/>
+                      <a:round/>
+                      <a:headEnd type="none" w="med" len="med"/>
+                      <a:tailEnd type="none" w="med" len="med"/>
+                    </a:lnT>
+                    <a:lnB w="12700" cap="flat" cmpd="sng" algn="ctr">
+                      <a:solidFill>
+                        <a:srgbClr val="DDDDDD"/>
+                      </a:solidFill>
+                      <a:prstDash val="solid"/>
+                      <a:round/>
+                      <a:headEnd type="none" w="med" len="med"/>
+                      <a:tailEnd type="none" w="med" len="med"/>
+                    </a:lnB>
+                    <a:solidFill>
+                      <a:srgbClr val="FFFFFF"/>
+                    </a:solidFill>
+                  </a:tcPr>
+                </a:tc>
+                <a:tc>
+                  <a:txBody>
+                    <a:bodyPr/>
+                    <a:lstStyle/>
+                    <a:p>
+                      <a:pPr marL="0" indent="0" algn="l">
+                        <a:buNone/>
+                      </a:pPr>
+                      <a:r>
+                        <a:rPr lang="en-US" sz="2000" dirty="0">
+                          <a:solidFill>
+                            <a:srgbClr val="222222"/>
+                          </a:solidFill>
+                          <a:latin typeface="Calibri" pitchFamily="34" charset="0"/>
+                          <a:ea typeface="Calibri" pitchFamily="34" charset="-122"/>
+                          <a:cs typeface="Calibri" pitchFamily="34" charset="-120"/>
+                        </a:rPr>
+                        <a:t>x.x.4-6</a:t>
+                      </a:r>
+                      <a:endParaRPr lang="en-US" sz="2000" dirty="0">
+                        <a:latin typeface="Calibri" charset="0"/>
+                        <a:ea typeface="Calibri" charset="0"/>
+                        <a:cs typeface="Calibri" charset="0"/>
+                      </a:endParaRPr>
+                    </a:p>
+                  </a:txBody>
+                  <a:tcPr anchor="ctr">
+                    <a:lnL w="12700" cap="flat" cmpd="sng" algn="ctr">
+                      <a:solidFill>
+                        <a:srgbClr val="DDDDDD"/>
+                      </a:solidFill>
+                      <a:prstDash val="solid"/>
+                      <a:round/>
+                      <a:headEnd type="none" w="med" len="med"/>
+                      <a:tailEnd type="none" w="med" len="med"/>
+                    </a:lnL>
+                    <a:lnR w="12700" cap="flat" cmpd="sng" algn="ctr">
+                      <a:solidFill>
+                        <a:srgbClr val="DDDDDD"/>
+                      </a:solidFill>
+                      <a:prstDash val="solid"/>
+                      <a:round/>
+                      <a:headEnd type="none" w="med" len="med"/>
+                      <a:tailEnd type="none" w="med" len="med"/>
+                    </a:lnR>
+                    <a:lnT w="12700" cap="flat" cmpd="sng" algn="ctr">
+                      <a:solidFill>
+                        <a:srgbClr val="DDDDDD"/>
+                      </a:solidFill>
+                      <a:prstDash val="solid"/>
+                      <a:round/>
+                      <a:headEnd type="none" w="med" len="med"/>
+                      <a:tailEnd type="none" w="med" len="med"/>
+                    </a:lnT>
+                    <a:lnB w="12700" cap="flat" cmpd="sng" algn="ctr">
+                      <a:solidFill>
+                        <a:srgbClr val="DDDDDD"/>
+                      </a:solidFill>
+                      <a:prstDash val="solid"/>
+                      <a:round/>
+                      <a:headEnd type="none" w="med" len="med"/>
+                      <a:tailEnd type="none" w="med" len="med"/>
+                    </a:lnB>
+                    <a:solidFill>
+                      <a:srgbClr val="FFFFFF"/>
+                    </a:solidFill>
+                  </a:tcPr>
+                </a:tc>
+                <a:extLst>
+                  <a:ext uri="{0D108BD9-81ED-4DB2-BD59-A6C34878D82A}">
+                    <a16:rowId xmlns:a16="http://schemas.microsoft.com/office/drawing/2014/main" val="10005"/>
+                  </a:ext>
+                </a:extLst>
+              </a:tr>
+              <a:tr h="475488">
+                <a:tc>
+                  <a:txBody>
+                    <a:bodyPr/>
+                    <a:lstStyle/>
+                    <a:p>
+                      <a:pPr marL="0" indent="0" algn="l">
+                        <a:buNone/>
+                      </a:pPr>
+                      <a:r>
+                        <a:rPr lang="en-US" sz="2000" dirty="0">
+                          <a:solidFill>
+                            <a:srgbClr val="222222"/>
+                          </a:solidFill>
+                          <a:latin typeface="Calibri" pitchFamily="34" charset="0"/>
+                          <a:ea typeface="Calibri" pitchFamily="34" charset="-122"/>
+                          <a:cs typeface="Calibri" pitchFamily="34" charset="-120"/>
+                        </a:rPr>
+                        <a:t>99 - Network Mgmt</a:t>
+                      </a:r>
+                      <a:endParaRPr lang="en-US" sz="2000" dirty="0">
+                        <a:latin typeface="Calibri" charset="0"/>
+                        <a:ea typeface="Calibri" charset="0"/>
+                        <a:cs typeface="Calibri" charset="0"/>
+                      </a:endParaRPr>
+                    </a:p>
+                  </a:txBody>
+                  <a:tcPr anchor="ctr">
+                    <a:lnL w="12700" cap="flat" cmpd="sng" algn="ctr">
+                      <a:solidFill>
+                        <a:srgbClr val="DDDDDD"/>
+                      </a:solidFill>
+                      <a:prstDash val="solid"/>
+                      <a:round/>
+                      <a:headEnd type="none" w="med" len="med"/>
+                      <a:tailEnd type="none" w="med" len="med"/>
+                    </a:lnL>
+                    <a:lnR w="12700" cap="flat" cmpd="sng" algn="ctr">
+                      <a:solidFill>
+                        <a:srgbClr val="DDDDDD"/>
+                      </a:solidFill>
+                      <a:prstDash val="solid"/>
+                      <a:round/>
+                      <a:headEnd type="none" w="med" len="med"/>
+                      <a:tailEnd type="none" w="med" len="med"/>
+                    </a:lnR>
+                    <a:lnT w="12700" cap="flat" cmpd="sng" algn="ctr">
+                      <a:solidFill>
+                        <a:srgbClr val="DDDDDD"/>
+                      </a:solidFill>
+                      <a:prstDash val="solid"/>
+                      <a:round/>
+                      <a:headEnd type="none" w="med" len="med"/>
+                      <a:tailEnd type="none" w="med" len="med"/>
+                    </a:lnT>
+                    <a:lnB w="12700" cap="flat" cmpd="sng" algn="ctr">
+                      <a:solidFill>
+                        <a:srgbClr val="DDDDDD"/>
+                      </a:solidFill>
+                      <a:prstDash val="solid"/>
+                      <a:round/>
+                      <a:headEnd type="none" w="med" len="med"/>
+                      <a:tailEnd type="none" w="med" len="med"/>
+                    </a:lnB>
+                    <a:solidFill>
+                      <a:srgbClr val="CADCFC"/>
+                    </a:solidFill>
+                  </a:tcPr>
+                </a:tc>
+                <a:tc>
+                  <a:txBody>
+                    <a:bodyPr/>
+                    <a:lstStyle/>
+                    <a:p>
+                      <a:pPr marL="0" indent="0" algn="l">
+                        <a:buNone/>
+                      </a:pPr>
+                      <a:r>
+                        <a:rPr lang="en-US" sz="2000" dirty="0">
+                          <a:solidFill>
+                            <a:srgbClr val="222222"/>
+                          </a:solidFill>
+                          <a:latin typeface="Calibri" pitchFamily="34" charset="0"/>
+                          <a:ea typeface="Calibri" pitchFamily="34" charset="-122"/>
+                          <a:cs typeface="Calibri" pitchFamily="34" charset="-120"/>
+                        </a:rPr>
+                        <a:t>10.10.99.1 / 10.20.99.1</a:t>
+                      </a:r>
+                      <a:endParaRPr lang="en-US" sz="2000" dirty="0">
+                        <a:latin typeface="Calibri" charset="0"/>
+                        <a:ea typeface="Calibri" charset="0"/>
+                        <a:cs typeface="Calibri" charset="0"/>
+                      </a:endParaRPr>
+                    </a:p>
+                  </a:txBody>
+                  <a:tcPr anchor="ctr">
+                    <a:lnL w="12700" cap="flat" cmpd="sng" algn="ctr">
+                      <a:solidFill>
+                        <a:srgbClr val="DDDDDD"/>
+                      </a:solidFill>
+                      <a:prstDash val="solid"/>
+                      <a:round/>
+                      <a:headEnd type="none" w="med" len="med"/>
+                      <a:tailEnd type="none" w="med" len="med"/>
+                    </a:lnL>
+                    <a:lnR w="12700" cap="flat" cmpd="sng" algn="ctr">
+                      <a:solidFill>
+                        <a:srgbClr val="DDDDDD"/>
+                      </a:solidFill>
+                      <a:prstDash val="solid"/>
+                      <a:round/>
+                      <a:headEnd type="none" w="med" len="med"/>
+                      <a:tailEnd type="none" w="med" len="med"/>
+                    </a:lnR>
+                    <a:lnT w="12700" cap="flat" cmpd="sng" algn="ctr">
+                      <a:solidFill>
+                        <a:srgbClr val="DDDDDD"/>
+                      </a:solidFill>
+                      <a:prstDash val="solid"/>
+                      <a:round/>
+                      <a:headEnd type="none" w="med" len="med"/>
+                      <a:tailEnd type="none" w="med" len="med"/>
+                    </a:lnT>
+                    <a:lnB w="12700" cap="flat" cmpd="sng" algn="ctr">
+                      <a:solidFill>
+                        <a:srgbClr val="DDDDDD"/>
+                      </a:solidFill>
+                      <a:prstDash val="solid"/>
+                      <a:round/>
+                      <a:headEnd type="none" w="med" len="med"/>
+                      <a:tailEnd type="none" w="med" len="med"/>
+                    </a:lnB>
+                    <a:solidFill>
+                      <a:srgbClr val="CADCFC"/>
+                    </a:solidFill>
+                  </a:tcPr>
+                </a:tc>
+                <a:tc>
+                  <a:txBody>
+                    <a:bodyPr/>
+                    <a:lstStyle/>
+                    <a:p>
+                      <a:pPr marL="0" indent="0" algn="l">
+                        <a:buNone/>
+                      </a:pPr>
+                      <a:r>
+                        <a:rPr lang="en-US" sz="2000" dirty="0">
+                          <a:solidFill>
+                            <a:srgbClr val="222222"/>
+                          </a:solidFill>
+                          <a:latin typeface="Calibri" pitchFamily="34" charset="0"/>
+                          <a:ea typeface="Calibri" pitchFamily="34" charset="-122"/>
+                          <a:cs typeface="Calibri" pitchFamily="34" charset="-120"/>
+                        </a:rPr>
+                        <a:t>x.x.4-6 (static)</a:t>
+                      </a:r>
+                      <a:endParaRPr lang="en-US" sz="2000" dirty="0">
+                        <a:latin typeface="Calibri" charset="0"/>
+                        <a:ea typeface="Calibri" charset="0"/>
+                        <a:cs typeface="Calibri" charset="0"/>
+                      </a:endParaRPr>
+                    </a:p>
+                  </a:txBody>
+                  <a:tcPr anchor="ctr">
+                    <a:lnL w="12700" cap="flat" cmpd="sng" algn="ctr">
+                      <a:solidFill>
+                        <a:srgbClr val="DDDDDD"/>
+                      </a:solidFill>
+                      <a:prstDash val="solid"/>
+                      <a:round/>
+                      <a:headEnd type="none" w="med" len="med"/>
+                      <a:tailEnd type="none" w="med" len="med"/>
+                    </a:lnL>
+                    <a:lnR w="12700" cap="flat" cmpd="sng" algn="ctr">
+                      <a:solidFill>
+                        <a:srgbClr val="DDDDDD"/>
+                      </a:solidFill>
+                      <a:prstDash val="solid"/>
+                      <a:round/>
+                      <a:headEnd type="none" w="med" len="med"/>
+                      <a:tailEnd type="none" w="med" len="med"/>
+                    </a:lnR>
+                    <a:lnT w="12700" cap="flat" cmpd="sng" algn="ctr">
+                      <a:solidFill>
+                        <a:srgbClr val="DDDDDD"/>
+                      </a:solidFill>
+                      <a:prstDash val="solid"/>
+                      <a:round/>
+                      <a:headEnd type="none" w="med" len="med"/>
+                      <a:tailEnd type="none" w="med" len="med"/>
+                    </a:lnT>
+                    <a:lnB w="12700" cap="flat" cmpd="sng" algn="ctr">
+                      <a:solidFill>
+                        <a:srgbClr val="DDDDDD"/>
+                      </a:solidFill>
+                      <a:prstDash val="solid"/>
+                      <a:round/>
+                      <a:headEnd type="none" w="med" len="med"/>
+                      <a:tailEnd type="none" w="med" len="med"/>
+                    </a:lnB>
+                    <a:solidFill>
+                      <a:srgbClr val="CADCFC"/>
+                    </a:solidFill>
+                  </a:tcPr>
+                </a:tc>
+                <a:extLst>
+                  <a:ext uri="{0D108BD9-81ED-4DB2-BD59-A6C34878D82A}">
+                    <a16:rowId xmlns:a16="http://schemas.microsoft.com/office/drawing/2014/main" val="10006"/>
+                  </a:ext>
+                </a:extLst>
+              </a:tr>
+            </a:tbl>
+          </a:graphicData>
+        </a:graphic>
+      </p:graphicFrame>
+      <p:sp>
+        <p:nvSpPr>
+          <p:cNvPr id="4" name="Shape 1"/>
+          <p:cNvSpPr/>
+          <p:nvPr/>
+        </p:nvSpPr>
+        <p:spPr>
+          <a:xfrm>
+            <a:off x="7863840" y="1320800"/>
+            <a:ext cx="3749040" cy="3594100"/>
+          </a:xfrm>
+          <a:prstGeom prst="roundRect">
+            <a:avLst>
+              <a:gd name="adj" fmla="val 3636"/>
+            </a:avLst>
+          </a:prstGeom>
+          <a:solidFill>
+            <a:srgbClr val="1E2761"/>
+          </a:solidFill>
+          <a:ln/>
+        </p:spPr>
+      </p:sp>
+      <p:sp>
+        <p:nvSpPr>
+          <p:cNvPr id="5" name="Text 2"/>
+          <p:cNvSpPr txBox="1"/>
+          <p:nvPr/>
+        </p:nvSpPr>
+        <p:spPr>
+          <a:xfrm>
+            <a:off x="7863840" y="1524000"/>
+            <a:ext cx="3749040" cy="876300"/>
+          </a:xfrm>
+          <a:prstGeom prst="rect">
+            <a:avLst/>
+          </a:prstGeom>
+          <a:noFill/>
+          <a:ln/>
+        </p:spPr>
+        <p:txBody>
+          <a:bodyPr wrap="square" lIns="0" tIns="0" rIns="0" bIns="0" rtlCol="0" anchor="ctr"/>
+          <a:lstStyle/>
+          <a:p>
+            <a:pPr marL="0" indent="0" algn="ctr">
+              <a:buNone/>
+            </a:pPr>
+            <a:r>
+              <a:rPr lang="en-US" sz="5600" b="1" dirty="0">
+                <a:solidFill>
+                  <a:srgbClr val="FFFFFF"/>
+                </a:solidFill>
+                <a:latin typeface="Cambria" pitchFamily="34" charset="0"/>
+                <a:ea typeface="Cambria" pitchFamily="34" charset="-122"/>
+                <a:cs typeface="Cambria" pitchFamily="34" charset="-120"/>
+              </a:rPr>
+              <a:t>11</a:t>
+            </a:r>
+            <a:endParaRPr lang="en-US" sz="5600" dirty="0"/>
+          </a:p>
+        </p:txBody>
+      </p:sp>
+      <p:sp>
+        <p:nvSpPr>
+          <p:cNvPr id="6" name="Text 3"/>
+          <p:cNvSpPr txBox="1"/>
+          <p:nvPr/>
+        </p:nvSpPr>
+        <p:spPr>
+          <a:xfrm>
+            <a:off x="7863840" y="2400300"/>
+            <a:ext cx="3749040" cy="365760"/>
+          </a:xfrm>
+          <a:prstGeom prst="rect">
+            <a:avLst/>
+          </a:prstGeom>
+          <a:noFill/>
+          <a:ln/>
+        </p:spPr>
+        <p:txBody>
+          <a:bodyPr wrap="square" lIns="0" tIns="0" rIns="0" bIns="0" rtlCol="0" anchor="ctr"/>
+          <a:lstStyle/>
+          <a:p>
+            <a:pPr marL="0" indent="0" algn="ctr">
+              <a:buNone/>
+            </a:pPr>
+            <a:r>
+              <a:rPr lang="en-US" sz="1400" dirty="0" smtClean="0">
+                <a:solidFill>
+                  <a:srgbClr val="CADCFC"/>
+                </a:solidFill>
+                <a:latin typeface="Calibri" pitchFamily="34" charset="0"/>
+                <a:ea typeface="Calibri" pitchFamily="34" charset="-122"/>
+                <a:cs typeface="Calibri" pitchFamily="34" charset="-120"/>
+              </a:rPr>
+              <a:t>Separate networks</a:t>
+            </a:r>
+            <a:r>
+              <a:rPr lang="en-US" sz="1400" dirty="0">
+                <a:solidFill>
+                  <a:srgbClr val="CADCFC"/>
+                </a:solidFill>
+                <a:latin typeface="Calibri" pitchFamily="34" charset="0"/>
+                <a:ea typeface="Calibri" pitchFamily="34" charset="-122"/>
+                <a:cs typeface="Calibri" pitchFamily="34" charset="-120"/>
+              </a:rPr>
+              <a:t>, sized to fit</a:t>
+            </a:r>
+            <a:endParaRPr lang="en-US" sz="1400" dirty="0"/>
+          </a:p>
+        </p:txBody>
+      </p:sp>
+      <p:sp>
+        <p:nvSpPr>
+          <p:cNvPr id="7" name="Text 4"/>
+          <p:cNvSpPr txBox="1"/>
+          <p:nvPr/>
+        </p:nvSpPr>
+        <p:spPr>
+          <a:xfrm>
+            <a:off x="8138160" y="2715260"/>
+            <a:ext cx="3200400" cy="1719580"/>
+          </a:xfrm>
+          <a:prstGeom prst="rect">
+            <a:avLst/>
+          </a:prstGeom>
+          <a:noFill/>
+          <a:ln/>
+        </p:spPr>
+        <p:txBody>
+          <a:bodyPr wrap="square" lIns="0" tIns="0" rIns="0" bIns="0" rtlCol="0" anchor="ctr"/>
+          <a:lstStyle/>
+          <a:p>
+            <a:pPr marL="0" indent="0" algn="ctr">
+              <a:lnSpc>
+                <a:spcPct val="130000"/>
+              </a:lnSpc>
+              <a:buNone/>
+            </a:pPr>
+            <a:r>
+              <a:rPr lang="en-US" sz="2000" dirty="0">
+                <a:solidFill>
+                  <a:srgbClr val="FFFFFF"/>
+                </a:solidFill>
+                <a:latin typeface="Calibri" pitchFamily="34" charset="0"/>
+                <a:ea typeface="Calibri" pitchFamily="34" charset="-122"/>
+                <a:cs typeface="Calibri" pitchFamily="34" charset="-120"/>
+              </a:rPr>
+              <a:t>Bigger networks for bigger teams</a:t>
+            </a:r>
+            <a:endParaRPr lang="en-US" sz="2000" dirty="0"/>
+          </a:p>
+          <a:p>
+            <a:pPr marL="0" indent="0" algn="ctr">
+              <a:lnSpc>
+                <a:spcPct val="130000"/>
+              </a:lnSpc>
+              <a:buNone/>
+            </a:pPr>
+            <a:r>
+              <a:rPr lang="en-US" sz="2000" dirty="0">
+                <a:solidFill>
+                  <a:srgbClr val="FFFFFF"/>
+                </a:solidFill>
+                <a:latin typeface="Calibri" pitchFamily="34" charset="0"/>
+                <a:ea typeface="Calibri" pitchFamily="34" charset="-122"/>
+                <a:cs typeface="Calibri" pitchFamily="34" charset="-120"/>
+              </a:rPr>
+              <a:t>Smaller ones for Management,</a:t>
+            </a:r>
+            <a:endParaRPr lang="en-US" sz="2000" dirty="0"/>
+          </a:p>
+          <a:p>
+            <a:pPr marL="0" indent="0" algn="ctr">
+              <a:lnSpc>
+                <a:spcPct val="130000"/>
+              </a:lnSpc>
+              <a:buNone/>
+            </a:pPr>
+            <a:r>
+              <a:rPr lang="en-US" sz="2000" dirty="0">
+                <a:solidFill>
+                  <a:srgbClr val="FFFFFF"/>
+                </a:solidFill>
+                <a:latin typeface="Calibri" pitchFamily="34" charset="0"/>
+                <a:ea typeface="Calibri" pitchFamily="34" charset="-122"/>
+                <a:cs typeface="Calibri" pitchFamily="34" charset="-120"/>
+              </a:rPr>
+              <a:t>Guest and network equipment</a:t>
+            </a:r>
+            <a:endParaRPr lang="en-US" sz="2000" dirty="0"/>
+          </a:p>
+        </p:txBody>
+      </p:sp>
+      <p:sp>
+        <p:nvSpPr>
+          <p:cNvPr id="3" name="Text 5"/>
+          <p:cNvSpPr txBox="1"/>
+          <p:nvPr/>
+        </p:nvSpPr>
+        <p:spPr>
+          <a:xfrm>
+            <a:off x="548640" y="5806440"/>
+            <a:ext cx="11064240" cy="548640"/>
+          </a:xfrm>
+          <a:prstGeom prst="rect">
+            <a:avLst/>
+          </a:prstGeom>
+          <a:noFill/>
+          <a:ln/>
+        </p:spPr>
+        <p:txBody>
+          <a:bodyPr wrap="square" lIns="0" tIns="0" rIns="0" bIns="0" rtlCol="0" anchor="ctr"/>
+          <a:lstStyle/>
+          <a:p>
+            <a:pPr marL="0" indent="0" algn="ctr">
+              <a:buNone/>
+            </a:pPr>
+            <a:r>
+              <a:rPr lang="en-US" sz="2000" i="1" dirty="0">
+                <a:solidFill>
+                  <a:srgbClr val="222222"/>
+                </a:solidFill>
+                <a:latin typeface="Calibri" pitchFamily="34" charset="0"/>
+                <a:ea typeface="Calibri" pitchFamily="34" charset="-122"/>
+                <a:cs typeface="Calibri" pitchFamily="34" charset="-120"/>
+              </a:rPr>
+              <a:t>Think of each VLAN as a department's private street. Addresses are handed out automatically and sized to fit each team, with room to grow.</a:t>
+            </a:r>
+            <a:endParaRPr lang="en-US" sz="2000" dirty="0"/>
+          </a:p>
+        </p:txBody>
+      </p:sp>
+    </p:spTree>
+  </p:cSld>
+  <p:clrMapOvr>
+    <a:masterClrMapping/>
+  </p:clrMapOvr>
+</p:sld>
+</file>
+
+<file path=ppt/slides/slide6.xml><?xml version="1.0" encoding="utf-8"?>
+<p:sld xmlns:a="http://schemas.openxmlformats.org/drawingml/2006/main" xmlns:r="http://schemas.openxmlformats.org/officeDocument/2006/relationships" xmlns:p="http://schemas.openxmlformats.org/presentationml/2006/main">
+  <p:cSld name="Slide 6">
+    <p:bg>
+      <p:bgPr>
+        <a:solidFill>
+          <a:srgbClr val="FFFFFF"/>
+        </a:solidFill>
+        <a:effectLst/>
+      </p:bgPr>
+    </p:bg>
+    <p:spTree>
+      <p:nvGrpSpPr>
+        <p:cNvPr id="1" name=""/>
+        <p:cNvGrpSpPr/>
+        <p:nvPr/>
+      </p:nvGrpSpPr>
+      <p:grpSpPr>
+        <a:xfrm>
+          <a:off x="0" y="0"/>
+          <a:ext cx="0" cy="0"/>
+          <a:chOff x="0" y="0"/>
+          <a:chExt cx="0" cy="0"/>
+        </a:xfrm>
+      </p:grpSpPr>
+      <p:sp>
+        <p:nvSpPr>
+          <p:cNvPr id="2" name="Text 0"/>
+          <p:cNvSpPr txBox="1"/>
+          <p:nvPr/>
+        </p:nvSpPr>
+        <p:spPr>
+          <a:xfrm>
+            <a:off x="548640" y="320040"/>
+            <a:ext cx="11064240" cy="685800"/>
+          </a:xfrm>
+          <a:prstGeom prst="rect">
+            <a:avLst/>
+          </a:prstGeom>
+          <a:noFill/>
+          <a:ln/>
+        </p:spPr>
+        <p:txBody>
+          <a:bodyPr wrap="square" lIns="0" tIns="0" rIns="0" bIns="0" rtlCol="0" anchor="ctr"/>
+          <a:lstStyle/>
+          <a:p>
+            <a:pPr marL="0" indent="0" algn="l">
+              <a:buNone/>
+            </a:pPr>
+            <a:r>
+              <a:rPr lang="en-US" sz="2000" b="1" dirty="0">
+                <a:solidFill>
+                  <a:srgbClr val="1E2761"/>
+                </a:solidFill>
+                <a:latin typeface="Cambria" pitchFamily="34" charset="0"/>
+                <a:ea typeface="Cambria" pitchFamily="34" charset="-122"/>
+                <a:cs typeface="Cambria" pitchFamily="34" charset="-120"/>
+              </a:rPr>
+              <a:t>Reading an Address: 10.20.30.2</a:t>
+            </a:r>
+            <a:endParaRPr lang="en-US" sz="2000" dirty="0"/>
+          </a:p>
+        </p:txBody>
+      </p:sp>
+      <p:sp>
+        <p:nvSpPr>
+          <p:cNvPr id="3" name="Shape 1"/>
+          <p:cNvSpPr/>
+          <p:nvPr/>
+        </p:nvSpPr>
+        <p:spPr>
+          <a:xfrm>
+            <a:off x="548640" y="1554480"/>
+            <a:ext cx="2606040" cy="3566160"/>
+          </a:xfrm>
+          <a:prstGeom prst="roundRect">
+            <a:avLst>
+              <a:gd name="adj" fmla="val 3509"/>
+            </a:avLst>
+          </a:prstGeom>
+          <a:solidFill>
+            <a:srgbClr val="CADCFC"/>
+          </a:solidFill>
+          <a:ln/>
+        </p:spPr>
+      </p:sp>
+      <p:sp>
+        <p:nvSpPr>
+          <p:cNvPr id="4" name="Text 2"/>
+          <p:cNvSpPr txBox="1"/>
+          <p:nvPr/>
+        </p:nvSpPr>
+        <p:spPr>
+          <a:xfrm>
+            <a:off x="548640" y="1783080"/>
+            <a:ext cx="2606040" cy="642620"/>
+          </a:xfrm>
+          <a:prstGeom prst="rect">
+            <a:avLst/>
+          </a:prstGeom>
+          <a:noFill/>
+          <a:ln/>
+        </p:spPr>
+        <p:txBody>
+          <a:bodyPr wrap="square" lIns="0" tIns="0" rIns="0" bIns="0" rtlCol="0" anchor="ctr"/>
+          <a:lstStyle/>
+          <a:p>
+            <a:pPr marL="0" indent="0" algn="ctr">
+              <a:buNone/>
+            </a:pPr>
+            <a:r>
+              <a:rPr lang="en-US" sz="2000" b="1" dirty="0">
+                <a:solidFill>
+                  <a:srgbClr val="1E2761"/>
+                </a:solidFill>
+                <a:latin typeface="Cambria" pitchFamily="34" charset="0"/>
+                <a:ea typeface="Cambria" pitchFamily="34" charset="-122"/>
+                <a:cs typeface="Cambria" pitchFamily="34" charset="-120"/>
+              </a:rPr>
+              <a:t>10</a:t>
+            </a:r>
+            <a:endParaRPr lang="en-US" sz="2000" dirty="0"/>
+          </a:p>
+        </p:txBody>
+      </p:sp>
+      <p:sp>
+        <p:nvSpPr>
+          <p:cNvPr id="5" name="Text 3"/>
+          <p:cNvSpPr txBox="1"/>
+          <p:nvPr/>
+        </p:nvSpPr>
+        <p:spPr>
+          <a:xfrm>
+            <a:off x="731520" y="2331720"/>
+            <a:ext cx="2240280" cy="411480"/>
+          </a:xfrm>
+          <a:prstGeom prst="rect">
+            <a:avLst/>
+          </a:prstGeom>
+          <a:noFill/>
+          <a:ln/>
+        </p:spPr>
+        <p:txBody>
+          <a:bodyPr wrap="square" lIns="0" tIns="0" rIns="0" bIns="0" rtlCol="0" anchor="ctr"/>
+          <a:lstStyle/>
+          <a:p>
+            <a:pPr marL="0" indent="0" algn="ctr">
+              <a:buNone/>
+            </a:pPr>
+            <a:r>
+              <a:rPr lang="en-US" sz="2000" b="1" dirty="0">
+                <a:solidFill>
+                  <a:srgbClr val="1E2761"/>
+                </a:solidFill>
+                <a:latin typeface="Cambria" pitchFamily="34" charset="0"/>
+                <a:ea typeface="Cambria" pitchFamily="34" charset="-122"/>
+                <a:cs typeface="Cambria" pitchFamily="34" charset="-120"/>
+              </a:rPr>
+              <a:t>Company network</a:t>
+            </a:r>
+            <a:endParaRPr lang="en-US" sz="2000" dirty="0"/>
+          </a:p>
+        </p:txBody>
+      </p:sp>
+      <p:sp>
+        <p:nvSpPr>
+          <p:cNvPr id="6" name="Text 4"/>
+          <p:cNvSpPr txBox="1"/>
+          <p:nvPr/>
+        </p:nvSpPr>
+        <p:spPr>
+          <a:xfrm>
+            <a:off x="777240" y="3152140"/>
+            <a:ext cx="2148840" cy="1554480"/>
+          </a:xfrm>
+          <a:prstGeom prst="rect">
+            <a:avLst/>
+          </a:prstGeom>
+          <a:noFill/>
+          <a:ln/>
+        </p:spPr>
+        <p:txBody>
+          <a:bodyPr wrap="square" lIns="0" tIns="0" rIns="0" bIns="0" rtlCol="0" anchor="t"/>
+          <a:lstStyle/>
+          <a:p>
+            <a:pPr marL="0" indent="0" algn="ctr">
+              <a:lnSpc>
+                <a:spcPct val="120000"/>
+              </a:lnSpc>
+              <a:buNone/>
+            </a:pPr>
+            <a:r>
+              <a:rPr lang="en-US" sz="2000" dirty="0">
+                <a:solidFill>
+                  <a:srgbClr val="222222"/>
+                </a:solidFill>
+                <a:latin typeface="Calibri" pitchFamily="34" charset="0"/>
+                <a:ea typeface="Calibri" pitchFamily="34" charset="-122"/>
+                <a:cs typeface="Calibri" pitchFamily="34" charset="-120"/>
+              </a:rPr>
+              <a:t>Every Nexora address starts here: private, inside the company.</a:t>
+            </a:r>
+            <a:endParaRPr lang="en-US" sz="2000" dirty="0"/>
+          </a:p>
+        </p:txBody>
+      </p:sp>
+      <p:sp>
+        <p:nvSpPr>
+          <p:cNvPr id="7" name="Shape 5"/>
+          <p:cNvSpPr/>
+          <p:nvPr/>
+        </p:nvSpPr>
+        <p:spPr>
+          <a:xfrm>
+            <a:off x="3337560" y="1554480"/>
+            <a:ext cx="2606040" cy="3566160"/>
+          </a:xfrm>
+          <a:prstGeom prst="roundRect">
+            <a:avLst>
+              <a:gd name="adj" fmla="val 3509"/>
+            </a:avLst>
+          </a:prstGeom>
+          <a:solidFill>
+            <a:srgbClr val="CADCFC"/>
+          </a:solidFill>
+          <a:ln/>
+        </p:spPr>
+      </p:sp>
+      <p:sp>
+        <p:nvSpPr>
+          <p:cNvPr id="8" name="Text 6"/>
+          <p:cNvSpPr txBox="1"/>
+          <p:nvPr/>
+        </p:nvSpPr>
+        <p:spPr>
+          <a:xfrm>
+            <a:off x="3337560" y="1783080"/>
+            <a:ext cx="2606040" cy="642620"/>
+          </a:xfrm>
+          <a:prstGeom prst="rect">
+            <a:avLst/>
+          </a:prstGeom>
+          <a:noFill/>
+          <a:ln/>
+        </p:spPr>
+        <p:txBody>
+          <a:bodyPr wrap="square" lIns="0" tIns="0" rIns="0" bIns="0" rtlCol="0" anchor="ctr"/>
+          <a:lstStyle/>
+          <a:p>
+            <a:pPr marL="0" indent="0" algn="ctr">
+              <a:buNone/>
+            </a:pPr>
+            <a:r>
+              <a:rPr lang="en-US" sz="2000" b="1" dirty="0">
+                <a:solidFill>
+                  <a:srgbClr val="1E2761"/>
+                </a:solidFill>
+                <a:latin typeface="Cambria" pitchFamily="34" charset="0"/>
+                <a:ea typeface="Cambria" pitchFamily="34" charset="-122"/>
+                <a:cs typeface="Cambria" pitchFamily="34" charset="-120"/>
+              </a:rPr>
+              <a:t>20</a:t>
+            </a:r>
+            <a:endParaRPr lang="en-US" sz="2000" dirty="0"/>
+          </a:p>
+        </p:txBody>
+      </p:sp>
+      <p:sp>
+        <p:nvSpPr>
+          <p:cNvPr id="9" name="Text 7"/>
+          <p:cNvSpPr txBox="1"/>
+          <p:nvPr/>
+        </p:nvSpPr>
+        <p:spPr>
+          <a:xfrm>
+            <a:off x="3474720" y="2448560"/>
+            <a:ext cx="2240280" cy="411480"/>
+          </a:xfrm>
+          <a:prstGeom prst="rect">
+            <a:avLst/>
+          </a:prstGeom>
+          <a:noFill/>
+          <a:ln/>
+        </p:spPr>
+        <p:txBody>
+          <a:bodyPr wrap="square" lIns="0" tIns="0" rIns="0" bIns="0" rtlCol="0" anchor="ctr"/>
+          <a:lstStyle/>
+          <a:p>
+            <a:pPr marL="0" indent="0" algn="ctr">
+              <a:buNone/>
+            </a:pPr>
+            <a:r>
+              <a:rPr lang="en-US" sz="2000" b="1" dirty="0">
+                <a:solidFill>
+                  <a:srgbClr val="1E2761"/>
+                </a:solidFill>
+                <a:latin typeface="Cambria" pitchFamily="34" charset="0"/>
+                <a:ea typeface="Cambria" pitchFamily="34" charset="-122"/>
+                <a:cs typeface="Cambria" pitchFamily="34" charset="-120"/>
+              </a:rPr>
+              <a:t>Which office</a:t>
+            </a:r>
+            <a:endParaRPr lang="en-US" sz="2000" dirty="0"/>
+          </a:p>
+        </p:txBody>
+      </p:sp>
+      <p:sp>
+        <p:nvSpPr>
+          <p:cNvPr id="10" name="Text 8"/>
+          <p:cNvSpPr txBox="1"/>
+          <p:nvPr/>
+        </p:nvSpPr>
+        <p:spPr>
+          <a:xfrm>
+            <a:off x="3566160" y="3210560"/>
+            <a:ext cx="2148840" cy="1554480"/>
+          </a:xfrm>
+          <a:prstGeom prst="rect">
+            <a:avLst/>
+          </a:prstGeom>
+          <a:noFill/>
+          <a:ln/>
+        </p:spPr>
+        <p:txBody>
+          <a:bodyPr wrap="square" lIns="0" tIns="0" rIns="0" bIns="0" rtlCol="0" anchor="t"/>
+          <a:lstStyle/>
+          <a:p>
+            <a:pPr marL="0" indent="0" algn="ctr">
+              <a:lnSpc>
+                <a:spcPct val="120000"/>
+              </a:lnSpc>
+              <a:buNone/>
+            </a:pPr>
+            <a:r>
+              <a:rPr lang="en-US" sz="2000" dirty="0">
+                <a:solidFill>
+                  <a:srgbClr val="222222"/>
+                </a:solidFill>
+                <a:latin typeface="Calibri" pitchFamily="34" charset="0"/>
+                <a:ea typeface="Calibri" pitchFamily="34" charset="-122"/>
+                <a:cs typeface="Calibri" pitchFamily="34" charset="-120"/>
+              </a:rPr>
+              <a:t>10 = Head Office</a:t>
+            </a:r>
+            <a:r>
+              <a:rPr lang="en-US" sz="2000" dirty="0" smtClean="0">
+                <a:solidFill>
+                  <a:srgbClr val="222222"/>
+                </a:solidFill>
+                <a:latin typeface="Calibri" pitchFamily="34" charset="0"/>
+                <a:ea typeface="Calibri" pitchFamily="34" charset="-122"/>
+                <a:cs typeface="Calibri" pitchFamily="34" charset="-120"/>
+              </a:rPr>
+              <a:t>,</a:t>
+            </a:r>
+          </a:p>
+          <a:p>
+            <a:pPr marL="0" indent="0" algn="ctr">
+              <a:lnSpc>
+                <a:spcPct val="120000"/>
+              </a:lnSpc>
+              <a:buNone/>
+            </a:pPr>
+            <a:r>
+              <a:rPr lang="en-US" sz="2000" dirty="0" smtClean="0">
+                <a:solidFill>
+                  <a:srgbClr val="222222"/>
+                </a:solidFill>
+                <a:latin typeface="Calibri" pitchFamily="34" charset="0"/>
+                <a:ea typeface="Calibri" pitchFamily="34" charset="-122"/>
+                <a:cs typeface="Calibri" pitchFamily="34" charset="-120"/>
+              </a:rPr>
+              <a:t> </a:t>
+            </a:r>
+            <a:r>
+              <a:rPr lang="en-US" sz="2000" dirty="0">
+                <a:solidFill>
+                  <a:srgbClr val="222222"/>
+                </a:solidFill>
+                <a:latin typeface="Calibri" pitchFamily="34" charset="0"/>
+                <a:ea typeface="Calibri" pitchFamily="34" charset="-122"/>
+                <a:cs typeface="Calibri" pitchFamily="34" charset="-120"/>
+              </a:rPr>
+              <a:t>20 = Branch. </a:t>
+            </a:r>
+            <a:endParaRPr lang="en-US" sz="2000" dirty="0"/>
+          </a:p>
+        </p:txBody>
+      </p:sp>
+      <p:sp>
+        <p:nvSpPr>
+          <p:cNvPr id="11" name="Shape 9"/>
+          <p:cNvSpPr/>
+          <p:nvPr/>
+        </p:nvSpPr>
+        <p:spPr>
+          <a:xfrm>
+            <a:off x="6126480" y="1554480"/>
+            <a:ext cx="2606040" cy="3566160"/>
+          </a:xfrm>
+          <a:prstGeom prst="roundRect">
+            <a:avLst>
+              <a:gd name="adj" fmla="val 3509"/>
+            </a:avLst>
+          </a:prstGeom>
+          <a:solidFill>
+            <a:srgbClr val="CADCFC"/>
+          </a:solidFill>
+          <a:ln/>
+        </p:spPr>
+      </p:sp>
+      <p:sp>
+        <p:nvSpPr>
+          <p:cNvPr id="12" name="Text 10"/>
+          <p:cNvSpPr txBox="1"/>
+          <p:nvPr/>
+        </p:nvSpPr>
+        <p:spPr>
+          <a:xfrm>
+            <a:off x="6126480" y="1783080"/>
+            <a:ext cx="2606040" cy="548640"/>
+          </a:xfrm>
+          <a:prstGeom prst="rect">
+            <a:avLst/>
+          </a:prstGeom>
+          <a:noFill/>
+          <a:ln/>
+        </p:spPr>
+        <p:txBody>
+          <a:bodyPr wrap="square" lIns="0" tIns="0" rIns="0" bIns="0" rtlCol="0" anchor="ctr"/>
+          <a:lstStyle/>
+          <a:p>
+            <a:pPr marL="0" indent="0" algn="ctr">
+              <a:buNone/>
+            </a:pPr>
+            <a:r>
+              <a:rPr lang="en-US" sz="2000" b="1" dirty="0">
+                <a:solidFill>
+                  <a:srgbClr val="1E2761"/>
+                </a:solidFill>
+                <a:latin typeface="Cambria" pitchFamily="34" charset="0"/>
+                <a:ea typeface="Cambria" pitchFamily="34" charset="-122"/>
+                <a:cs typeface="Cambria" pitchFamily="34" charset="-120"/>
+              </a:rPr>
+              <a:t>30</a:t>
+            </a:r>
+            <a:endParaRPr lang="en-US" sz="2000" dirty="0"/>
+          </a:p>
+        </p:txBody>
+      </p:sp>
+      <p:sp>
+        <p:nvSpPr>
+          <p:cNvPr id="13" name="Text 11"/>
+          <p:cNvSpPr txBox="1"/>
+          <p:nvPr/>
+        </p:nvSpPr>
+        <p:spPr>
+          <a:xfrm>
+            <a:off x="6355080" y="2448560"/>
+            <a:ext cx="2240280" cy="411480"/>
+          </a:xfrm>
+          <a:prstGeom prst="rect">
+            <a:avLst/>
+          </a:prstGeom>
+          <a:noFill/>
+          <a:ln/>
+        </p:spPr>
+        <p:txBody>
+          <a:bodyPr wrap="square" lIns="0" tIns="0" rIns="0" bIns="0" rtlCol="0" anchor="ctr"/>
+          <a:lstStyle/>
+          <a:p>
+            <a:pPr marL="0" indent="0" algn="ctr">
+              <a:buNone/>
+            </a:pPr>
+            <a:r>
+              <a:rPr lang="en-US" sz="2000" b="1" dirty="0">
+                <a:solidFill>
+                  <a:srgbClr val="1E2761"/>
+                </a:solidFill>
+                <a:latin typeface="Cambria" pitchFamily="34" charset="0"/>
+                <a:ea typeface="Cambria" pitchFamily="34" charset="-122"/>
+                <a:cs typeface="Cambria" pitchFamily="34" charset="-120"/>
+              </a:rPr>
+              <a:t>Which department</a:t>
+            </a:r>
+            <a:endParaRPr lang="en-US" sz="2000" dirty="0"/>
+          </a:p>
+        </p:txBody>
+      </p:sp>
+      <p:sp>
+        <p:nvSpPr>
+          <p:cNvPr id="14" name="Text 12"/>
+          <p:cNvSpPr txBox="1"/>
+          <p:nvPr/>
+        </p:nvSpPr>
+        <p:spPr>
+          <a:xfrm>
+            <a:off x="6309360" y="3086100"/>
+            <a:ext cx="2148840" cy="1554480"/>
+          </a:xfrm>
+          <a:prstGeom prst="rect">
+            <a:avLst/>
+          </a:prstGeom>
+          <a:noFill/>
+          <a:ln/>
+        </p:spPr>
+        <p:txBody>
+          <a:bodyPr wrap="square" lIns="0" tIns="0" rIns="0" bIns="0" rtlCol="0" anchor="t"/>
+          <a:lstStyle/>
+          <a:p>
+            <a:pPr marL="0" indent="0" algn="ctr">
+              <a:lnSpc>
+                <a:spcPct val="120000"/>
+              </a:lnSpc>
+              <a:buNone/>
+            </a:pPr>
+            <a:r>
+              <a:rPr lang="en-US" sz="2000" dirty="0">
+                <a:solidFill>
+                  <a:srgbClr val="222222"/>
+                </a:solidFill>
+                <a:latin typeface="Calibri" pitchFamily="34" charset="0"/>
+                <a:ea typeface="Calibri" pitchFamily="34" charset="-122"/>
+                <a:cs typeface="Calibri" pitchFamily="34" charset="-120"/>
+              </a:rPr>
+              <a:t>Matches the VLAN: 10 = Sales, 20 = Operations, 30 = IT.</a:t>
+            </a:r>
+            <a:endParaRPr lang="en-US" sz="2000" dirty="0"/>
+          </a:p>
+        </p:txBody>
+      </p:sp>
+      <p:sp>
+        <p:nvSpPr>
+          <p:cNvPr id="15" name="Shape 13"/>
+          <p:cNvSpPr/>
+          <p:nvPr/>
+        </p:nvSpPr>
+        <p:spPr>
+          <a:xfrm>
+            <a:off x="8915400" y="1554480"/>
+            <a:ext cx="2606040" cy="3566160"/>
+          </a:xfrm>
+          <a:prstGeom prst="roundRect">
+            <a:avLst>
+              <a:gd name="adj" fmla="val 3509"/>
+            </a:avLst>
+          </a:prstGeom>
+          <a:solidFill>
+            <a:srgbClr val="CADCFC"/>
+          </a:solidFill>
+          <a:ln/>
+        </p:spPr>
+      </p:sp>
+      <p:sp>
+        <p:nvSpPr>
+          <p:cNvPr id="16" name="Text 14"/>
+          <p:cNvSpPr txBox="1"/>
+          <p:nvPr/>
+        </p:nvSpPr>
+        <p:spPr>
+          <a:xfrm>
+            <a:off x="8915400" y="1676400"/>
+            <a:ext cx="2606040" cy="655320"/>
+          </a:xfrm>
+          <a:prstGeom prst="rect">
+            <a:avLst/>
+          </a:prstGeom>
+          <a:noFill/>
+          <a:ln/>
+        </p:spPr>
+        <p:txBody>
+          <a:bodyPr wrap="square" lIns="0" tIns="0" rIns="0" bIns="0" rtlCol="0" anchor="ctr"/>
+          <a:lstStyle/>
+          <a:p>
+            <a:pPr marL="0" indent="0" algn="ctr">
+              <a:buNone/>
+            </a:pPr>
+            <a:r>
+              <a:rPr lang="en-US" sz="2000" b="1" dirty="0">
+                <a:solidFill>
+                  <a:srgbClr val="1E2761"/>
+                </a:solidFill>
+                <a:latin typeface="Cambria" pitchFamily="34" charset="0"/>
+                <a:ea typeface="Cambria" pitchFamily="34" charset="-122"/>
+                <a:cs typeface="Cambria" pitchFamily="34" charset="-120"/>
+              </a:rPr>
+              <a:t>2</a:t>
+            </a:r>
+            <a:endParaRPr lang="en-US" sz="2000" dirty="0"/>
+          </a:p>
+        </p:txBody>
+      </p:sp>
+      <p:sp>
+        <p:nvSpPr>
+          <p:cNvPr id="17" name="Text 15"/>
+          <p:cNvSpPr txBox="1"/>
+          <p:nvPr/>
+        </p:nvSpPr>
+        <p:spPr>
+          <a:xfrm>
+            <a:off x="9052560" y="2491740"/>
+            <a:ext cx="2240280" cy="411480"/>
+          </a:xfrm>
+          <a:prstGeom prst="rect">
+            <a:avLst/>
+          </a:prstGeom>
+          <a:noFill/>
+          <a:ln/>
+        </p:spPr>
+        <p:txBody>
+          <a:bodyPr wrap="square" lIns="0" tIns="0" rIns="0" bIns="0" rtlCol="0" anchor="ctr"/>
+          <a:lstStyle/>
+          <a:p>
+            <a:pPr marL="0" indent="0" algn="ctr">
+              <a:buNone/>
+            </a:pPr>
+            <a:r>
+              <a:rPr lang="en-US" sz="2000" b="1" dirty="0">
+                <a:solidFill>
+                  <a:srgbClr val="1E2761"/>
+                </a:solidFill>
+                <a:latin typeface="Cambria" pitchFamily="34" charset="0"/>
+                <a:ea typeface="Cambria" pitchFamily="34" charset="-122"/>
+                <a:cs typeface="Cambria" pitchFamily="34" charset="-120"/>
+              </a:rPr>
+              <a:t>Which device</a:t>
+            </a:r>
+            <a:endParaRPr lang="en-US" sz="2000" dirty="0"/>
+          </a:p>
+        </p:txBody>
+      </p:sp>
+      <p:sp>
+        <p:nvSpPr>
+          <p:cNvPr id="18" name="Text 16"/>
+          <p:cNvSpPr txBox="1"/>
+          <p:nvPr/>
+        </p:nvSpPr>
+        <p:spPr>
+          <a:xfrm>
+            <a:off x="9144000" y="3152140"/>
+            <a:ext cx="2148840" cy="1554480"/>
+          </a:xfrm>
+          <a:prstGeom prst="rect">
+            <a:avLst/>
+          </a:prstGeom>
+          <a:noFill/>
+          <a:ln/>
+        </p:spPr>
+        <p:txBody>
+          <a:bodyPr wrap="square" lIns="0" tIns="0" rIns="0" bIns="0" rtlCol="0" anchor="t"/>
+          <a:lstStyle/>
+          <a:p>
+            <a:pPr marL="0" indent="0" algn="ctr">
+              <a:lnSpc>
+                <a:spcPct val="120000"/>
+              </a:lnSpc>
+              <a:buNone/>
+            </a:pPr>
+            <a:r>
+              <a:rPr lang="en-US" sz="2000" dirty="0">
+                <a:solidFill>
+                  <a:srgbClr val="222222"/>
+                </a:solidFill>
+                <a:latin typeface="Calibri" pitchFamily="34" charset="0"/>
+                <a:ea typeface="Calibri" pitchFamily="34" charset="-122"/>
+                <a:cs typeface="Calibri" pitchFamily="34" charset="-120"/>
+              </a:rPr>
+              <a:t>1 = shared gateway, 2 = main router, 3 = backup router, 4 and up = devices.</a:t>
+            </a:r>
+            <a:endParaRPr lang="en-US" sz="2000" dirty="0"/>
+          </a:p>
+        </p:txBody>
+      </p:sp>
+    </p:spTree>
+  </p:cSld>
+  <p:clrMapOvr>
+    <a:masterClrMapping/>
+  </p:clrMapOvr>
+</p:sld>
+</file>
+
+<file path=ppt/slides/slide7.xml><?xml version="1.0" encoding="utf-8"?>
 <p:sld xmlns:a="http://schemas.openxmlformats.org/drawingml/2006/main" xmlns:r="http://schemas.openxmlformats.org/officeDocument/2006/relationships" xmlns:p="http://schemas.openxmlformats.org/presentationml/2006/main">
   <p:cSld name="Slide 5">
     <p:bg>
@@ -8519,2465 +11325,6 @@
 </p:sld>
 </file>
 
-<file path=ppt/slides/slide6.xml><?xml version="1.0" encoding="utf-8"?>
-<p:sld xmlns:a="http://schemas.openxmlformats.org/drawingml/2006/main" xmlns:r="http://schemas.openxmlformats.org/officeDocument/2006/relationships" xmlns:p="http://schemas.openxmlformats.org/presentationml/2006/main">
-  <p:cSld name="Slide 6">
-    <p:bg>
-      <p:bgPr>
-        <a:solidFill>
-          <a:srgbClr val="FFFFFF"/>
-        </a:solidFill>
-        <a:effectLst/>
-      </p:bgPr>
-    </p:bg>
-    <p:spTree>
-      <p:nvGrpSpPr>
-        <p:cNvPr id="1" name=""/>
-        <p:cNvGrpSpPr/>
-        <p:nvPr/>
-      </p:nvGrpSpPr>
-      <p:grpSpPr>
-        <a:xfrm>
-          <a:off x="0" y="0"/>
-          <a:ext cx="0" cy="0"/>
-          <a:chOff x="0" y="0"/>
-          <a:chExt cx="0" cy="0"/>
-        </a:xfrm>
-      </p:grpSpPr>
-      <p:sp>
-        <p:nvSpPr>
-          <p:cNvPr id="2" name="Text 0"/>
-          <p:cNvSpPr txBox="1"/>
-          <p:nvPr/>
-        </p:nvSpPr>
-        <p:spPr>
-          <a:xfrm>
-            <a:off x="548640" y="320040"/>
-            <a:ext cx="11064240" cy="685800"/>
-          </a:xfrm>
-          <a:prstGeom prst="rect">
-            <a:avLst/>
-          </a:prstGeom>
-          <a:noFill/>
-          <a:ln/>
-        </p:spPr>
-        <p:txBody>
-          <a:bodyPr wrap="square" lIns="0" tIns="0" rIns="0" bIns="0" rtlCol="0" anchor="ctr"/>
-          <a:lstStyle/>
-          <a:p>
-            <a:pPr marL="0" indent="0" algn="l">
-              <a:buNone/>
-            </a:pPr>
-            <a:r>
-              <a:rPr lang="en-US" sz="3000" b="1" dirty="0">
-                <a:solidFill>
-                  <a:srgbClr val="1E2761"/>
-                </a:solidFill>
-                <a:latin typeface="Cambria" pitchFamily="34" charset="0"/>
-                <a:ea typeface="Cambria" pitchFamily="34" charset="-122"/>
-                <a:cs typeface="Cambria" pitchFamily="34" charset="-120"/>
-              </a:rPr>
-              <a:t>Reading an Address: 10.20.30.2</a:t>
-            </a:r>
-            <a:endParaRPr lang="en-US" sz="3000" dirty="0"/>
-          </a:p>
-        </p:txBody>
-      </p:sp>
-      <p:sp>
-        <p:nvSpPr>
-          <p:cNvPr id="3" name="Shape 1"/>
-          <p:cNvSpPr/>
-          <p:nvPr/>
-        </p:nvSpPr>
-        <p:spPr>
-          <a:xfrm>
-            <a:off x="548640" y="1554480"/>
-            <a:ext cx="2606040" cy="3566160"/>
-          </a:xfrm>
-          <a:prstGeom prst="roundRect">
-            <a:avLst>
-              <a:gd name="adj" fmla="val 3509"/>
-            </a:avLst>
-          </a:prstGeom>
-          <a:solidFill>
-            <a:srgbClr val="CADCFC"/>
-          </a:solidFill>
-          <a:ln/>
-        </p:spPr>
-      </p:sp>
-      <p:sp>
-        <p:nvSpPr>
-          <p:cNvPr id="4" name="Text 2"/>
-          <p:cNvSpPr txBox="1"/>
-          <p:nvPr/>
-        </p:nvSpPr>
-        <p:spPr>
-          <a:xfrm>
-            <a:off x="548640" y="1783080"/>
-            <a:ext cx="2606040" cy="1005840"/>
-          </a:xfrm>
-          <a:prstGeom prst="rect">
-            <a:avLst/>
-          </a:prstGeom>
-          <a:noFill/>
-          <a:ln/>
-        </p:spPr>
-        <p:txBody>
-          <a:bodyPr wrap="square" lIns="0" tIns="0" rIns="0" bIns="0" rtlCol="0" anchor="ctr"/>
-          <a:lstStyle/>
-          <a:p>
-            <a:pPr marL="0" indent="0" algn="ctr">
-              <a:buNone/>
-            </a:pPr>
-            <a:r>
-              <a:rPr lang="en-US" sz="5400" b="1" dirty="0">
-                <a:solidFill>
-                  <a:srgbClr val="1E2761"/>
-                </a:solidFill>
-                <a:latin typeface="Cambria" pitchFamily="34" charset="0"/>
-                <a:ea typeface="Cambria" pitchFamily="34" charset="-122"/>
-                <a:cs typeface="Cambria" pitchFamily="34" charset="-120"/>
-              </a:rPr>
-              <a:t>10</a:t>
-            </a:r>
-            <a:endParaRPr lang="en-US" sz="5400" dirty="0"/>
-          </a:p>
-        </p:txBody>
-      </p:sp>
-      <p:sp>
-        <p:nvSpPr>
-          <p:cNvPr id="5" name="Text 3"/>
-          <p:cNvSpPr txBox="1"/>
-          <p:nvPr/>
-        </p:nvSpPr>
-        <p:spPr>
-          <a:xfrm>
-            <a:off x="731520" y="2880360"/>
-            <a:ext cx="2240280" cy="411480"/>
-          </a:xfrm>
-          <a:prstGeom prst="rect">
-            <a:avLst/>
-          </a:prstGeom>
-          <a:noFill/>
-          <a:ln/>
-        </p:spPr>
-        <p:txBody>
-          <a:bodyPr wrap="square" lIns="0" tIns="0" rIns="0" bIns="0" rtlCol="0" anchor="ctr"/>
-          <a:lstStyle/>
-          <a:p>
-            <a:pPr marL="0" indent="0" algn="ctr">
-              <a:buNone/>
-            </a:pPr>
-            <a:r>
-              <a:rPr lang="en-US" sz="1600" b="1" dirty="0">
-                <a:solidFill>
-                  <a:srgbClr val="1E2761"/>
-                </a:solidFill>
-                <a:latin typeface="Cambria" pitchFamily="34" charset="0"/>
-                <a:ea typeface="Cambria" pitchFamily="34" charset="-122"/>
-                <a:cs typeface="Cambria" pitchFamily="34" charset="-120"/>
-              </a:rPr>
-              <a:t>Company network</a:t>
-            </a:r>
-            <a:endParaRPr lang="en-US" sz="1600" dirty="0"/>
-          </a:p>
-        </p:txBody>
-      </p:sp>
-      <p:sp>
-        <p:nvSpPr>
-          <p:cNvPr id="6" name="Text 4"/>
-          <p:cNvSpPr txBox="1"/>
-          <p:nvPr/>
-        </p:nvSpPr>
-        <p:spPr>
-          <a:xfrm>
-            <a:off x="777240" y="3383280"/>
-            <a:ext cx="2148840" cy="1554480"/>
-          </a:xfrm>
-          <a:prstGeom prst="rect">
-            <a:avLst/>
-          </a:prstGeom>
-          <a:noFill/>
-          <a:ln/>
-        </p:spPr>
-        <p:txBody>
-          <a:bodyPr wrap="square" lIns="0" tIns="0" rIns="0" bIns="0" rtlCol="0" anchor="t"/>
-          <a:lstStyle/>
-          <a:p>
-            <a:pPr marL="0" indent="0" algn="ctr">
-              <a:lnSpc>
-                <a:spcPct val="120000"/>
-              </a:lnSpc>
-              <a:buNone/>
-            </a:pPr>
-            <a:r>
-              <a:rPr lang="en-US" sz="1300" dirty="0">
-                <a:solidFill>
-                  <a:srgbClr val="222222"/>
-                </a:solidFill>
-                <a:latin typeface="Calibri" pitchFamily="34" charset="0"/>
-                <a:ea typeface="Calibri" pitchFamily="34" charset="-122"/>
-                <a:cs typeface="Calibri" pitchFamily="34" charset="-120"/>
-              </a:rPr>
-              <a:t>Every Nexora address starts here: private, inside the company.</a:t>
-            </a:r>
-            <a:endParaRPr lang="en-US" sz="1300" dirty="0"/>
-          </a:p>
-        </p:txBody>
-      </p:sp>
-      <p:sp>
-        <p:nvSpPr>
-          <p:cNvPr id="7" name="Shape 5"/>
-          <p:cNvSpPr/>
-          <p:nvPr/>
-        </p:nvSpPr>
-        <p:spPr>
-          <a:xfrm>
-            <a:off x="3337560" y="1554480"/>
-            <a:ext cx="2606040" cy="3566160"/>
-          </a:xfrm>
-          <a:prstGeom prst="roundRect">
-            <a:avLst>
-              <a:gd name="adj" fmla="val 3509"/>
-            </a:avLst>
-          </a:prstGeom>
-          <a:solidFill>
-            <a:srgbClr val="CADCFC"/>
-          </a:solidFill>
-          <a:ln/>
-        </p:spPr>
-      </p:sp>
-      <p:sp>
-        <p:nvSpPr>
-          <p:cNvPr id="8" name="Text 6"/>
-          <p:cNvSpPr txBox="1"/>
-          <p:nvPr/>
-        </p:nvSpPr>
-        <p:spPr>
-          <a:xfrm>
-            <a:off x="3337560" y="1783080"/>
-            <a:ext cx="2606040" cy="1005840"/>
-          </a:xfrm>
-          <a:prstGeom prst="rect">
-            <a:avLst/>
-          </a:prstGeom>
-          <a:noFill/>
-          <a:ln/>
-        </p:spPr>
-        <p:txBody>
-          <a:bodyPr wrap="square" lIns="0" tIns="0" rIns="0" bIns="0" rtlCol="0" anchor="ctr"/>
-          <a:lstStyle/>
-          <a:p>
-            <a:pPr marL="0" indent="0" algn="ctr">
-              <a:buNone/>
-            </a:pPr>
-            <a:r>
-              <a:rPr lang="en-US" sz="5400" b="1" dirty="0">
-                <a:solidFill>
-                  <a:srgbClr val="1E2761"/>
-                </a:solidFill>
-                <a:latin typeface="Cambria" pitchFamily="34" charset="0"/>
-                <a:ea typeface="Cambria" pitchFamily="34" charset="-122"/>
-                <a:cs typeface="Cambria" pitchFamily="34" charset="-120"/>
-              </a:rPr>
-              <a:t>20</a:t>
-            </a:r>
-            <a:endParaRPr lang="en-US" sz="5400" dirty="0"/>
-          </a:p>
-        </p:txBody>
-      </p:sp>
-      <p:sp>
-        <p:nvSpPr>
-          <p:cNvPr id="9" name="Text 7"/>
-          <p:cNvSpPr txBox="1"/>
-          <p:nvPr/>
-        </p:nvSpPr>
-        <p:spPr>
-          <a:xfrm>
-            <a:off x="3520440" y="2880360"/>
-            <a:ext cx="2240280" cy="411480"/>
-          </a:xfrm>
-          <a:prstGeom prst="rect">
-            <a:avLst/>
-          </a:prstGeom>
-          <a:noFill/>
-          <a:ln/>
-        </p:spPr>
-        <p:txBody>
-          <a:bodyPr wrap="square" lIns="0" tIns="0" rIns="0" bIns="0" rtlCol="0" anchor="ctr"/>
-          <a:lstStyle/>
-          <a:p>
-            <a:pPr marL="0" indent="0" algn="ctr">
-              <a:buNone/>
-            </a:pPr>
-            <a:r>
-              <a:rPr lang="en-US" sz="1600" b="1" dirty="0">
-                <a:solidFill>
-                  <a:srgbClr val="1E2761"/>
-                </a:solidFill>
-                <a:latin typeface="Cambria" pitchFamily="34" charset="0"/>
-                <a:ea typeface="Cambria" pitchFamily="34" charset="-122"/>
-                <a:cs typeface="Cambria" pitchFamily="34" charset="-120"/>
-              </a:rPr>
-              <a:t>Which office</a:t>
-            </a:r>
-            <a:endParaRPr lang="en-US" sz="1600" dirty="0"/>
-          </a:p>
-        </p:txBody>
-      </p:sp>
-      <p:sp>
-        <p:nvSpPr>
-          <p:cNvPr id="10" name="Text 8"/>
-          <p:cNvSpPr txBox="1"/>
-          <p:nvPr/>
-        </p:nvSpPr>
-        <p:spPr>
-          <a:xfrm>
-            <a:off x="3566160" y="3383280"/>
-            <a:ext cx="2148840" cy="1554480"/>
-          </a:xfrm>
-          <a:prstGeom prst="rect">
-            <a:avLst/>
-          </a:prstGeom>
-          <a:noFill/>
-          <a:ln/>
-        </p:spPr>
-        <p:txBody>
-          <a:bodyPr wrap="square" lIns="0" tIns="0" rIns="0" bIns="0" rtlCol="0" anchor="t"/>
-          <a:lstStyle/>
-          <a:p>
-            <a:pPr marL="0" indent="0" algn="ctr">
-              <a:lnSpc>
-                <a:spcPct val="120000"/>
-              </a:lnSpc>
-              <a:buNone/>
-            </a:pPr>
-            <a:r>
-              <a:rPr lang="en-US" sz="1300" dirty="0">
-                <a:solidFill>
-                  <a:srgbClr val="222222"/>
-                </a:solidFill>
-                <a:latin typeface="Calibri" pitchFamily="34" charset="0"/>
-                <a:ea typeface="Calibri" pitchFamily="34" charset="-122"/>
-                <a:cs typeface="Calibri" pitchFamily="34" charset="-120"/>
-              </a:rPr>
-              <a:t>10 = Head Office, 20 = Branch. This one is the Branch.</a:t>
-            </a:r>
-            <a:endParaRPr lang="en-US" sz="1300" dirty="0"/>
-          </a:p>
-        </p:txBody>
-      </p:sp>
-      <p:sp>
-        <p:nvSpPr>
-          <p:cNvPr id="11" name="Shape 9"/>
-          <p:cNvSpPr/>
-          <p:nvPr/>
-        </p:nvSpPr>
-        <p:spPr>
-          <a:xfrm>
-            <a:off x="6126480" y="1554480"/>
-            <a:ext cx="2606040" cy="3566160"/>
-          </a:xfrm>
-          <a:prstGeom prst="roundRect">
-            <a:avLst>
-              <a:gd name="adj" fmla="val 3509"/>
-            </a:avLst>
-          </a:prstGeom>
-          <a:solidFill>
-            <a:srgbClr val="CADCFC"/>
-          </a:solidFill>
-          <a:ln/>
-        </p:spPr>
-      </p:sp>
-      <p:sp>
-        <p:nvSpPr>
-          <p:cNvPr id="12" name="Text 10"/>
-          <p:cNvSpPr txBox="1"/>
-          <p:nvPr/>
-        </p:nvSpPr>
-        <p:spPr>
-          <a:xfrm>
-            <a:off x="6126480" y="1783080"/>
-            <a:ext cx="2606040" cy="1005840"/>
-          </a:xfrm>
-          <a:prstGeom prst="rect">
-            <a:avLst/>
-          </a:prstGeom>
-          <a:noFill/>
-          <a:ln/>
-        </p:spPr>
-        <p:txBody>
-          <a:bodyPr wrap="square" lIns="0" tIns="0" rIns="0" bIns="0" rtlCol="0" anchor="ctr"/>
-          <a:lstStyle/>
-          <a:p>
-            <a:pPr marL="0" indent="0" algn="ctr">
-              <a:buNone/>
-            </a:pPr>
-            <a:r>
-              <a:rPr lang="en-US" sz="5400" b="1" dirty="0">
-                <a:solidFill>
-                  <a:srgbClr val="1E2761"/>
-                </a:solidFill>
-                <a:latin typeface="Cambria" pitchFamily="34" charset="0"/>
-                <a:ea typeface="Cambria" pitchFamily="34" charset="-122"/>
-                <a:cs typeface="Cambria" pitchFamily="34" charset="-120"/>
-              </a:rPr>
-              <a:t>30</a:t>
-            </a:r>
-            <a:endParaRPr lang="en-US" sz="5400" dirty="0"/>
-          </a:p>
-        </p:txBody>
-      </p:sp>
-      <p:sp>
-        <p:nvSpPr>
-          <p:cNvPr id="13" name="Text 11"/>
-          <p:cNvSpPr txBox="1"/>
-          <p:nvPr/>
-        </p:nvSpPr>
-        <p:spPr>
-          <a:xfrm>
-            <a:off x="6309360" y="2880360"/>
-            <a:ext cx="2240280" cy="411480"/>
-          </a:xfrm>
-          <a:prstGeom prst="rect">
-            <a:avLst/>
-          </a:prstGeom>
-          <a:noFill/>
-          <a:ln/>
-        </p:spPr>
-        <p:txBody>
-          <a:bodyPr wrap="square" lIns="0" tIns="0" rIns="0" bIns="0" rtlCol="0" anchor="ctr"/>
-          <a:lstStyle/>
-          <a:p>
-            <a:pPr marL="0" indent="0" algn="ctr">
-              <a:buNone/>
-            </a:pPr>
-            <a:r>
-              <a:rPr lang="en-US" sz="1600" b="1" dirty="0">
-                <a:solidFill>
-                  <a:srgbClr val="1E2761"/>
-                </a:solidFill>
-                <a:latin typeface="Cambria" pitchFamily="34" charset="0"/>
-                <a:ea typeface="Cambria" pitchFamily="34" charset="-122"/>
-                <a:cs typeface="Cambria" pitchFamily="34" charset="-120"/>
-              </a:rPr>
-              <a:t>Which department</a:t>
-            </a:r>
-            <a:endParaRPr lang="en-US" sz="1600" dirty="0"/>
-          </a:p>
-        </p:txBody>
-      </p:sp>
-      <p:sp>
-        <p:nvSpPr>
-          <p:cNvPr id="14" name="Text 12"/>
-          <p:cNvSpPr txBox="1"/>
-          <p:nvPr/>
-        </p:nvSpPr>
-        <p:spPr>
-          <a:xfrm>
-            <a:off x="6355080" y="3383280"/>
-            <a:ext cx="2148840" cy="1554480"/>
-          </a:xfrm>
-          <a:prstGeom prst="rect">
-            <a:avLst/>
-          </a:prstGeom>
-          <a:noFill/>
-          <a:ln/>
-        </p:spPr>
-        <p:txBody>
-          <a:bodyPr wrap="square" lIns="0" tIns="0" rIns="0" bIns="0" rtlCol="0" anchor="t"/>
-          <a:lstStyle/>
-          <a:p>
-            <a:pPr marL="0" indent="0" algn="ctr">
-              <a:lnSpc>
-                <a:spcPct val="120000"/>
-              </a:lnSpc>
-              <a:buNone/>
-            </a:pPr>
-            <a:r>
-              <a:rPr lang="en-US" sz="1300" dirty="0">
-                <a:solidFill>
-                  <a:srgbClr val="222222"/>
-                </a:solidFill>
-                <a:latin typeface="Calibri" pitchFamily="34" charset="0"/>
-                <a:ea typeface="Calibri" pitchFamily="34" charset="-122"/>
-                <a:cs typeface="Calibri" pitchFamily="34" charset="-120"/>
-              </a:rPr>
-              <a:t>Matches the VLAN: 10 = Sales, 20 = Operations, 30 = IT.</a:t>
-            </a:r>
-            <a:endParaRPr lang="en-US" sz="1300" dirty="0"/>
-          </a:p>
-        </p:txBody>
-      </p:sp>
-      <p:sp>
-        <p:nvSpPr>
-          <p:cNvPr id="15" name="Shape 13"/>
-          <p:cNvSpPr/>
-          <p:nvPr/>
-        </p:nvSpPr>
-        <p:spPr>
-          <a:xfrm>
-            <a:off x="8915400" y="1554480"/>
-            <a:ext cx="2606040" cy="3566160"/>
-          </a:xfrm>
-          <a:prstGeom prst="roundRect">
-            <a:avLst>
-              <a:gd name="adj" fmla="val 3509"/>
-            </a:avLst>
-          </a:prstGeom>
-          <a:solidFill>
-            <a:srgbClr val="CADCFC"/>
-          </a:solidFill>
-          <a:ln/>
-        </p:spPr>
-      </p:sp>
-      <p:sp>
-        <p:nvSpPr>
-          <p:cNvPr id="16" name="Text 14"/>
-          <p:cNvSpPr txBox="1"/>
-          <p:nvPr/>
-        </p:nvSpPr>
-        <p:spPr>
-          <a:xfrm>
-            <a:off x="8915400" y="1783080"/>
-            <a:ext cx="2606040" cy="1005840"/>
-          </a:xfrm>
-          <a:prstGeom prst="rect">
-            <a:avLst/>
-          </a:prstGeom>
-          <a:noFill/>
-          <a:ln/>
-        </p:spPr>
-        <p:txBody>
-          <a:bodyPr wrap="square" lIns="0" tIns="0" rIns="0" bIns="0" rtlCol="0" anchor="ctr"/>
-          <a:lstStyle/>
-          <a:p>
-            <a:pPr marL="0" indent="0" algn="ctr">
-              <a:buNone/>
-            </a:pPr>
-            <a:r>
-              <a:rPr lang="en-US" sz="5400" b="1" dirty="0">
-                <a:solidFill>
-                  <a:srgbClr val="1E2761"/>
-                </a:solidFill>
-                <a:latin typeface="Cambria" pitchFamily="34" charset="0"/>
-                <a:ea typeface="Cambria" pitchFamily="34" charset="-122"/>
-                <a:cs typeface="Cambria" pitchFamily="34" charset="-120"/>
-              </a:rPr>
-              <a:t>2</a:t>
-            </a:r>
-            <a:endParaRPr lang="en-US" sz="5400" dirty="0"/>
-          </a:p>
-        </p:txBody>
-      </p:sp>
-      <p:sp>
-        <p:nvSpPr>
-          <p:cNvPr id="17" name="Text 15"/>
-          <p:cNvSpPr txBox="1"/>
-          <p:nvPr/>
-        </p:nvSpPr>
-        <p:spPr>
-          <a:xfrm>
-            <a:off x="9098280" y="2880360"/>
-            <a:ext cx="2240280" cy="411480"/>
-          </a:xfrm>
-          <a:prstGeom prst="rect">
-            <a:avLst/>
-          </a:prstGeom>
-          <a:noFill/>
-          <a:ln/>
-        </p:spPr>
-        <p:txBody>
-          <a:bodyPr wrap="square" lIns="0" tIns="0" rIns="0" bIns="0" rtlCol="0" anchor="ctr"/>
-          <a:lstStyle/>
-          <a:p>
-            <a:pPr marL="0" indent="0" algn="ctr">
-              <a:buNone/>
-            </a:pPr>
-            <a:r>
-              <a:rPr lang="en-US" sz="1600" b="1" dirty="0">
-                <a:solidFill>
-                  <a:srgbClr val="1E2761"/>
-                </a:solidFill>
-                <a:latin typeface="Cambria" pitchFamily="34" charset="0"/>
-                <a:ea typeface="Cambria" pitchFamily="34" charset="-122"/>
-                <a:cs typeface="Cambria" pitchFamily="34" charset="-120"/>
-              </a:rPr>
-              <a:t>Which device</a:t>
-            </a:r>
-            <a:endParaRPr lang="en-US" sz="1600" dirty="0"/>
-          </a:p>
-        </p:txBody>
-      </p:sp>
-      <p:sp>
-        <p:nvSpPr>
-          <p:cNvPr id="18" name="Text 16"/>
-          <p:cNvSpPr txBox="1"/>
-          <p:nvPr/>
-        </p:nvSpPr>
-        <p:spPr>
-          <a:xfrm>
-            <a:off x="9144000" y="3383280"/>
-            <a:ext cx="2148840" cy="1554480"/>
-          </a:xfrm>
-          <a:prstGeom prst="rect">
-            <a:avLst/>
-          </a:prstGeom>
-          <a:noFill/>
-          <a:ln/>
-        </p:spPr>
-        <p:txBody>
-          <a:bodyPr wrap="square" lIns="0" tIns="0" rIns="0" bIns="0" rtlCol="0" anchor="t"/>
-          <a:lstStyle/>
-          <a:p>
-            <a:pPr marL="0" indent="0" algn="ctr">
-              <a:lnSpc>
-                <a:spcPct val="120000"/>
-              </a:lnSpc>
-              <a:buNone/>
-            </a:pPr>
-            <a:r>
-              <a:rPr lang="en-US" sz="1300" dirty="0">
-                <a:solidFill>
-                  <a:srgbClr val="222222"/>
-                </a:solidFill>
-                <a:latin typeface="Calibri" pitchFamily="34" charset="0"/>
-                <a:ea typeface="Calibri" pitchFamily="34" charset="-122"/>
-                <a:cs typeface="Calibri" pitchFamily="34" charset="-120"/>
-              </a:rPr>
-              <a:t>1 = shared gateway, 2 = main router, 3 = backup router, 4 and up = devices.</a:t>
-            </a:r>
-            <a:endParaRPr lang="en-US" sz="1300" dirty="0"/>
-          </a:p>
-        </p:txBody>
-      </p:sp>
-    </p:spTree>
-  </p:cSld>
-  <p:clrMapOvr>
-    <a:masterClrMapping/>
-  </p:clrMapOvr>
-</p:sld>
-</file>
-
-<file path=ppt/slides/slide7.xml><?xml version="1.0" encoding="utf-8"?>
-<p:sld xmlns:a="http://schemas.openxmlformats.org/drawingml/2006/main" xmlns:r="http://schemas.openxmlformats.org/officeDocument/2006/relationships" xmlns:p="http://schemas.openxmlformats.org/presentationml/2006/main">
-  <p:cSld name="Slide 7">
-    <p:bg>
-      <p:bgPr>
-        <a:solidFill>
-          <a:srgbClr val="FFFFFF"/>
-        </a:solidFill>
-        <a:effectLst/>
-      </p:bgPr>
-    </p:bg>
-    <p:spTree>
-      <p:nvGrpSpPr>
-        <p:cNvPr id="1" name=""/>
-        <p:cNvGrpSpPr/>
-        <p:nvPr/>
-      </p:nvGrpSpPr>
-      <p:grpSpPr>
-        <a:xfrm>
-          <a:off x="0" y="0"/>
-          <a:ext cx="0" cy="0"/>
-          <a:chOff x="0" y="0"/>
-          <a:chExt cx="0" cy="0"/>
-        </a:xfrm>
-      </p:grpSpPr>
-      <p:sp>
-        <p:nvSpPr>
-          <p:cNvPr id="2" name="Text 0"/>
-          <p:cNvSpPr txBox="1"/>
-          <p:nvPr/>
-        </p:nvSpPr>
-        <p:spPr>
-          <a:xfrm>
-            <a:off x="548640" y="320040"/>
-            <a:ext cx="11064240" cy="685800"/>
-          </a:xfrm>
-          <a:prstGeom prst="rect">
-            <a:avLst/>
-          </a:prstGeom>
-          <a:noFill/>
-          <a:ln/>
-        </p:spPr>
-        <p:txBody>
-          <a:bodyPr wrap="square" lIns="0" tIns="0" rIns="0" bIns="0" rtlCol="0" anchor="ctr"/>
-          <a:lstStyle/>
-          <a:p>
-            <a:pPr marL="0" indent="0" algn="l">
-              <a:buNone/>
-            </a:pPr>
-            <a:r>
-              <a:rPr lang="en-US" sz="3000" b="1" dirty="0">
-                <a:solidFill>
-                  <a:srgbClr val="1E2761"/>
-                </a:solidFill>
-                <a:latin typeface="Cambria" pitchFamily="34" charset="0"/>
-                <a:ea typeface="Cambria" pitchFamily="34" charset="-122"/>
-                <a:cs typeface="Cambria" pitchFamily="34" charset="-120"/>
-              </a:rPr>
-              <a:t>Each Department, Its Own Network</a:t>
-            </a:r>
-            <a:endParaRPr lang="en-US" sz="3000" dirty="0"/>
-          </a:p>
-        </p:txBody>
-      </p:sp>
-      <p:graphicFrame>
-        <p:nvGraphicFramePr>
-          <p:cNvPr id="8" name="Table 0"/>
-          <p:cNvGraphicFramePr>
-            <a:graphicFrameLocks noGrp="1"/>
-          </p:cNvGraphicFramePr>
-          <p:nvPr>
-            <p:extLst>
-              <p:ext uri="{D42A27DB-BD31-4B8C-83A1-F6EECF244321}">
-                <p14:modId xmlns:p14="http://schemas.microsoft.com/office/powerpoint/2010/main" val="1579011935"/>
-              </p:ext>
-            </p:extLst>
-          </p:nvPr>
-        </p:nvGraphicFramePr>
-        <p:xfrm>
-          <a:off x="548640" y="1371600"/>
-          <a:ext cx="6949440" cy="3328416"/>
-        </p:xfrm>
-        <a:graphic>
-          <a:graphicData uri="http://schemas.openxmlformats.org/drawingml/2006/table">
-            <a:tbl>
-              <a:tblPr/>
-              <a:tblGrid>
-                <a:gridCol w="2377440">
-                  <a:extLst>
-                    <a:ext uri="{9D8B030D-6E8A-4147-A177-3AD203B41FA5}">
-                      <a16:colId xmlns:a16="http://schemas.microsoft.com/office/drawing/2014/main" val="20000"/>
-                    </a:ext>
-                  </a:extLst>
-                </a:gridCol>
-                <a:gridCol w="2560320">
-                  <a:extLst>
-                    <a:ext uri="{9D8B030D-6E8A-4147-A177-3AD203B41FA5}">
-                      <a16:colId xmlns:a16="http://schemas.microsoft.com/office/drawing/2014/main" val="20001"/>
-                    </a:ext>
-                  </a:extLst>
-                </a:gridCol>
-                <a:gridCol w="2011680">
-                  <a:extLst>
-                    <a:ext uri="{9D8B030D-6E8A-4147-A177-3AD203B41FA5}">
-                      <a16:colId xmlns:a16="http://schemas.microsoft.com/office/drawing/2014/main" val="20002"/>
-                    </a:ext>
-                  </a:extLst>
-                </a:gridCol>
-              </a:tblGrid>
-              <a:tr h="475488">
-                <a:tc>
-                  <a:txBody>
-                    <a:bodyPr/>
-                    <a:lstStyle/>
-                    <a:p>
-                      <a:pPr marL="0" indent="0" algn="l">
-                        <a:buNone/>
-                      </a:pPr>
-                      <a:r>
-                        <a:rPr lang="en-US" sz="1250" b="1" dirty="0">
-                          <a:solidFill>
-                            <a:srgbClr val="FFFFFF"/>
-                          </a:solidFill>
-                          <a:latin typeface="Calibri" pitchFamily="34" charset="0"/>
-                          <a:ea typeface="Calibri" pitchFamily="34" charset="-122"/>
-                          <a:cs typeface="Calibri" pitchFamily="34" charset="-120"/>
-                        </a:rPr>
-                        <a:t>VLAN</a:t>
-                      </a:r>
-                      <a:endParaRPr lang="en-US" sz="1250" dirty="0">
-                        <a:latin typeface="Calibri" charset="0"/>
-                        <a:ea typeface="Calibri" charset="0"/>
-                        <a:cs typeface="Calibri" charset="0"/>
-                      </a:endParaRPr>
-                    </a:p>
-                  </a:txBody>
-                  <a:tcPr anchor="ctr">
-                    <a:lnL w="12700" cap="flat" cmpd="sng" algn="ctr">
-                      <a:solidFill>
-                        <a:srgbClr val="DDDDDD"/>
-                      </a:solidFill>
-                      <a:prstDash val="solid"/>
-                      <a:round/>
-                      <a:headEnd type="none" w="med" len="med"/>
-                      <a:tailEnd type="none" w="med" len="med"/>
-                    </a:lnL>
-                    <a:lnR w="12700" cap="flat" cmpd="sng" algn="ctr">
-                      <a:solidFill>
-                        <a:srgbClr val="DDDDDD"/>
-                      </a:solidFill>
-                      <a:prstDash val="solid"/>
-                      <a:round/>
-                      <a:headEnd type="none" w="med" len="med"/>
-                      <a:tailEnd type="none" w="med" len="med"/>
-                    </a:lnR>
-                    <a:lnT w="12700" cap="flat" cmpd="sng" algn="ctr">
-                      <a:solidFill>
-                        <a:srgbClr val="DDDDDD"/>
-                      </a:solidFill>
-                      <a:prstDash val="solid"/>
-                      <a:round/>
-                      <a:headEnd type="none" w="med" len="med"/>
-                      <a:tailEnd type="none" w="med" len="med"/>
-                    </a:lnT>
-                    <a:lnB w="12700" cap="flat" cmpd="sng" algn="ctr">
-                      <a:solidFill>
-                        <a:srgbClr val="DDDDDD"/>
-                      </a:solidFill>
-                      <a:prstDash val="solid"/>
-                      <a:round/>
-                      <a:headEnd type="none" w="med" len="med"/>
-                      <a:tailEnd type="none" w="med" len="med"/>
-                    </a:lnB>
-                    <a:solidFill>
-                      <a:srgbClr val="1E2761"/>
-                    </a:solidFill>
-                  </a:tcPr>
-                </a:tc>
-                <a:tc>
-                  <a:txBody>
-                    <a:bodyPr/>
-                    <a:lstStyle/>
-                    <a:p>
-                      <a:pPr marL="0" indent="0" algn="l">
-                        <a:buNone/>
-                      </a:pPr>
-                      <a:r>
-                        <a:rPr lang="en-US" sz="1250" b="1" dirty="0">
-                          <a:solidFill>
-                            <a:srgbClr val="FFFFFF"/>
-                          </a:solidFill>
-                          <a:latin typeface="Calibri" pitchFamily="34" charset="0"/>
-                          <a:ea typeface="Calibri" pitchFamily="34" charset="-122"/>
-                          <a:cs typeface="Calibri" pitchFamily="34" charset="-120"/>
-                        </a:rPr>
-                        <a:t>Gateway (HQ / Branch)</a:t>
-                      </a:r>
-                      <a:endParaRPr lang="en-US" sz="1250" dirty="0">
-                        <a:latin typeface="Calibri" charset="0"/>
-                        <a:ea typeface="Calibri" charset="0"/>
-                        <a:cs typeface="Calibri" charset="0"/>
-                      </a:endParaRPr>
-                    </a:p>
-                  </a:txBody>
-                  <a:tcPr anchor="ctr">
-                    <a:lnL w="12700" cap="flat" cmpd="sng" algn="ctr">
-                      <a:solidFill>
-                        <a:srgbClr val="DDDDDD"/>
-                      </a:solidFill>
-                      <a:prstDash val="solid"/>
-                      <a:round/>
-                      <a:headEnd type="none" w="med" len="med"/>
-                      <a:tailEnd type="none" w="med" len="med"/>
-                    </a:lnL>
-                    <a:lnR w="12700" cap="flat" cmpd="sng" algn="ctr">
-                      <a:solidFill>
-                        <a:srgbClr val="DDDDDD"/>
-                      </a:solidFill>
-                      <a:prstDash val="solid"/>
-                      <a:round/>
-                      <a:headEnd type="none" w="med" len="med"/>
-                      <a:tailEnd type="none" w="med" len="med"/>
-                    </a:lnR>
-                    <a:lnT w="12700" cap="flat" cmpd="sng" algn="ctr">
-                      <a:solidFill>
-                        <a:srgbClr val="DDDDDD"/>
-                      </a:solidFill>
-                      <a:prstDash val="solid"/>
-                      <a:round/>
-                      <a:headEnd type="none" w="med" len="med"/>
-                      <a:tailEnd type="none" w="med" len="med"/>
-                    </a:lnT>
-                    <a:lnB w="12700" cap="flat" cmpd="sng" algn="ctr">
-                      <a:solidFill>
-                        <a:srgbClr val="DDDDDD"/>
-                      </a:solidFill>
-                      <a:prstDash val="solid"/>
-                      <a:round/>
-                      <a:headEnd type="none" w="med" len="med"/>
-                      <a:tailEnd type="none" w="med" len="med"/>
-                    </a:lnB>
-                    <a:solidFill>
-                      <a:srgbClr val="1E2761"/>
-                    </a:solidFill>
-                  </a:tcPr>
-                </a:tc>
-                <a:tc>
-                  <a:txBody>
-                    <a:bodyPr/>
-                    <a:lstStyle/>
-                    <a:p>
-                      <a:pPr marL="0" indent="0" algn="l">
-                        <a:buNone/>
-                      </a:pPr>
-                      <a:r>
-                        <a:rPr lang="en-US" sz="1250" b="1" dirty="0">
-                          <a:solidFill>
-                            <a:srgbClr val="FFFFFF"/>
-                          </a:solidFill>
-                          <a:latin typeface="Calibri" pitchFamily="34" charset="0"/>
-                          <a:ea typeface="Calibri" pitchFamily="34" charset="-122"/>
-                          <a:cs typeface="Calibri" pitchFamily="34" charset="-120"/>
-                        </a:rPr>
-                        <a:t>DHCP Range</a:t>
-                      </a:r>
-                      <a:endParaRPr lang="en-US" sz="1250" dirty="0">
-                        <a:latin typeface="Calibri" charset="0"/>
-                        <a:ea typeface="Calibri" charset="0"/>
-                        <a:cs typeface="Calibri" charset="0"/>
-                      </a:endParaRPr>
-                    </a:p>
-                  </a:txBody>
-                  <a:tcPr anchor="ctr">
-                    <a:lnL w="12700" cap="flat" cmpd="sng" algn="ctr">
-                      <a:solidFill>
-                        <a:srgbClr val="DDDDDD"/>
-                      </a:solidFill>
-                      <a:prstDash val="solid"/>
-                      <a:round/>
-                      <a:headEnd type="none" w="med" len="med"/>
-                      <a:tailEnd type="none" w="med" len="med"/>
-                    </a:lnL>
-                    <a:lnR w="12700" cap="flat" cmpd="sng" algn="ctr">
-                      <a:solidFill>
-                        <a:srgbClr val="DDDDDD"/>
-                      </a:solidFill>
-                      <a:prstDash val="solid"/>
-                      <a:round/>
-                      <a:headEnd type="none" w="med" len="med"/>
-                      <a:tailEnd type="none" w="med" len="med"/>
-                    </a:lnR>
-                    <a:lnT w="12700" cap="flat" cmpd="sng" algn="ctr">
-                      <a:solidFill>
-                        <a:srgbClr val="DDDDDD"/>
-                      </a:solidFill>
-                      <a:prstDash val="solid"/>
-                      <a:round/>
-                      <a:headEnd type="none" w="med" len="med"/>
-                      <a:tailEnd type="none" w="med" len="med"/>
-                    </a:lnT>
-                    <a:lnB w="12700" cap="flat" cmpd="sng" algn="ctr">
-                      <a:solidFill>
-                        <a:srgbClr val="DDDDDD"/>
-                      </a:solidFill>
-                      <a:prstDash val="solid"/>
-                      <a:round/>
-                      <a:headEnd type="none" w="med" len="med"/>
-                      <a:tailEnd type="none" w="med" len="med"/>
-                    </a:lnB>
-                    <a:solidFill>
-                      <a:srgbClr val="1E2761"/>
-                    </a:solidFill>
-                  </a:tcPr>
-                </a:tc>
-                <a:extLst>
-                  <a:ext uri="{0D108BD9-81ED-4DB2-BD59-A6C34878D82A}">
-                    <a16:rowId xmlns:a16="http://schemas.microsoft.com/office/drawing/2014/main" val="10000"/>
-                  </a:ext>
-                </a:extLst>
-              </a:tr>
-              <a:tr h="475488">
-                <a:tc>
-                  <a:txBody>
-                    <a:bodyPr/>
-                    <a:lstStyle/>
-                    <a:p>
-                      <a:pPr marL="0" indent="0" algn="l">
-                        <a:buNone/>
-                      </a:pPr>
-                      <a:r>
-                        <a:rPr lang="en-US" sz="1250" dirty="0">
-                          <a:solidFill>
-                            <a:srgbClr val="222222"/>
-                          </a:solidFill>
-                          <a:latin typeface="Calibri" pitchFamily="34" charset="0"/>
-                          <a:ea typeface="Calibri" pitchFamily="34" charset="-122"/>
-                          <a:cs typeface="Calibri" pitchFamily="34" charset="-120"/>
-                        </a:rPr>
-                        <a:t>10 - Sales</a:t>
-                      </a:r>
-                      <a:endParaRPr lang="en-US" sz="1250" dirty="0">
-                        <a:latin typeface="Calibri" charset="0"/>
-                        <a:ea typeface="Calibri" charset="0"/>
-                        <a:cs typeface="Calibri" charset="0"/>
-                      </a:endParaRPr>
-                    </a:p>
-                  </a:txBody>
-                  <a:tcPr anchor="ctr">
-                    <a:lnL w="12700" cap="flat" cmpd="sng" algn="ctr">
-                      <a:solidFill>
-                        <a:srgbClr val="DDDDDD"/>
-                      </a:solidFill>
-                      <a:prstDash val="solid"/>
-                      <a:round/>
-                      <a:headEnd type="none" w="med" len="med"/>
-                      <a:tailEnd type="none" w="med" len="med"/>
-                    </a:lnL>
-                    <a:lnR w="12700" cap="flat" cmpd="sng" algn="ctr">
-                      <a:solidFill>
-                        <a:srgbClr val="DDDDDD"/>
-                      </a:solidFill>
-                      <a:prstDash val="solid"/>
-                      <a:round/>
-                      <a:headEnd type="none" w="med" len="med"/>
-                      <a:tailEnd type="none" w="med" len="med"/>
-                    </a:lnR>
-                    <a:lnT w="12700" cap="flat" cmpd="sng" algn="ctr">
-                      <a:solidFill>
-                        <a:srgbClr val="DDDDDD"/>
-                      </a:solidFill>
-                      <a:prstDash val="solid"/>
-                      <a:round/>
-                      <a:headEnd type="none" w="med" len="med"/>
-                      <a:tailEnd type="none" w="med" len="med"/>
-                    </a:lnT>
-                    <a:lnB w="12700" cap="flat" cmpd="sng" algn="ctr">
-                      <a:solidFill>
-                        <a:srgbClr val="DDDDDD"/>
-                      </a:solidFill>
-                      <a:prstDash val="solid"/>
-                      <a:round/>
-                      <a:headEnd type="none" w="med" len="med"/>
-                      <a:tailEnd type="none" w="med" len="med"/>
-                    </a:lnB>
-                    <a:solidFill>
-                      <a:srgbClr val="FFFFFF"/>
-                    </a:solidFill>
-                  </a:tcPr>
-                </a:tc>
-                <a:tc>
-                  <a:txBody>
-                    <a:bodyPr/>
-                    <a:lstStyle/>
-                    <a:p>
-                      <a:pPr marL="0" indent="0" algn="l">
-                        <a:buNone/>
-                      </a:pPr>
-                      <a:r>
-                        <a:rPr lang="en-US" sz="1250" dirty="0">
-                          <a:solidFill>
-                            <a:srgbClr val="222222"/>
-                          </a:solidFill>
-                          <a:latin typeface="Calibri" pitchFamily="34" charset="0"/>
-                          <a:ea typeface="Calibri" pitchFamily="34" charset="-122"/>
-                          <a:cs typeface="Calibri" pitchFamily="34" charset="-120"/>
-                        </a:rPr>
-                        <a:t>10.10.10.1 / 10.20.10.1</a:t>
-                      </a:r>
-                      <a:endParaRPr lang="en-US" sz="1250" dirty="0">
-                        <a:latin typeface="Calibri" charset="0"/>
-                        <a:ea typeface="Calibri" charset="0"/>
-                        <a:cs typeface="Calibri" charset="0"/>
-                      </a:endParaRPr>
-                    </a:p>
-                  </a:txBody>
-                  <a:tcPr anchor="ctr">
-                    <a:lnL w="12700" cap="flat" cmpd="sng" algn="ctr">
-                      <a:solidFill>
-                        <a:srgbClr val="DDDDDD"/>
-                      </a:solidFill>
-                      <a:prstDash val="solid"/>
-                      <a:round/>
-                      <a:headEnd type="none" w="med" len="med"/>
-                      <a:tailEnd type="none" w="med" len="med"/>
-                    </a:lnL>
-                    <a:lnR w="12700" cap="flat" cmpd="sng" algn="ctr">
-                      <a:solidFill>
-                        <a:srgbClr val="DDDDDD"/>
-                      </a:solidFill>
-                      <a:prstDash val="solid"/>
-                      <a:round/>
-                      <a:headEnd type="none" w="med" len="med"/>
-                      <a:tailEnd type="none" w="med" len="med"/>
-                    </a:lnR>
-                    <a:lnT w="12700" cap="flat" cmpd="sng" algn="ctr">
-                      <a:solidFill>
-                        <a:srgbClr val="DDDDDD"/>
-                      </a:solidFill>
-                      <a:prstDash val="solid"/>
-                      <a:round/>
-                      <a:headEnd type="none" w="med" len="med"/>
-                      <a:tailEnd type="none" w="med" len="med"/>
-                    </a:lnT>
-                    <a:lnB w="12700" cap="flat" cmpd="sng" algn="ctr">
-                      <a:solidFill>
-                        <a:srgbClr val="DDDDDD"/>
-                      </a:solidFill>
-                      <a:prstDash val="solid"/>
-                      <a:round/>
-                      <a:headEnd type="none" w="med" len="med"/>
-                      <a:tailEnd type="none" w="med" len="med"/>
-                    </a:lnB>
-                    <a:solidFill>
-                      <a:srgbClr val="FFFFFF"/>
-                    </a:solidFill>
-                  </a:tcPr>
-                </a:tc>
-                <a:tc>
-                  <a:txBody>
-                    <a:bodyPr/>
-                    <a:lstStyle/>
-                    <a:p>
-                      <a:pPr marL="0" indent="0" algn="l">
-                        <a:buNone/>
-                      </a:pPr>
-                      <a:r>
-                        <a:rPr lang="en-US" sz="1250" dirty="0">
-                          <a:solidFill>
-                            <a:srgbClr val="222222"/>
-                          </a:solidFill>
-                          <a:latin typeface="Calibri" pitchFamily="34" charset="0"/>
-                          <a:ea typeface="Calibri" pitchFamily="34" charset="-122"/>
-                          <a:cs typeface="Calibri" pitchFamily="34" charset="-120"/>
-                        </a:rPr>
-                        <a:t>x.x.4-14</a:t>
-                      </a:r>
-                      <a:endParaRPr lang="en-US" sz="1250" dirty="0">
-                        <a:latin typeface="Calibri" charset="0"/>
-                        <a:ea typeface="Calibri" charset="0"/>
-                        <a:cs typeface="Calibri" charset="0"/>
-                      </a:endParaRPr>
-                    </a:p>
-                  </a:txBody>
-                  <a:tcPr anchor="ctr">
-                    <a:lnL w="12700" cap="flat" cmpd="sng" algn="ctr">
-                      <a:solidFill>
-                        <a:srgbClr val="DDDDDD"/>
-                      </a:solidFill>
-                      <a:prstDash val="solid"/>
-                      <a:round/>
-                      <a:headEnd type="none" w="med" len="med"/>
-                      <a:tailEnd type="none" w="med" len="med"/>
-                    </a:lnL>
-                    <a:lnR w="12700" cap="flat" cmpd="sng" algn="ctr">
-                      <a:solidFill>
-                        <a:srgbClr val="DDDDDD"/>
-                      </a:solidFill>
-                      <a:prstDash val="solid"/>
-                      <a:round/>
-                      <a:headEnd type="none" w="med" len="med"/>
-                      <a:tailEnd type="none" w="med" len="med"/>
-                    </a:lnR>
-                    <a:lnT w="12700" cap="flat" cmpd="sng" algn="ctr">
-                      <a:solidFill>
-                        <a:srgbClr val="DDDDDD"/>
-                      </a:solidFill>
-                      <a:prstDash val="solid"/>
-                      <a:round/>
-                      <a:headEnd type="none" w="med" len="med"/>
-                      <a:tailEnd type="none" w="med" len="med"/>
-                    </a:lnT>
-                    <a:lnB w="12700" cap="flat" cmpd="sng" algn="ctr">
-                      <a:solidFill>
-                        <a:srgbClr val="DDDDDD"/>
-                      </a:solidFill>
-                      <a:prstDash val="solid"/>
-                      <a:round/>
-                      <a:headEnd type="none" w="med" len="med"/>
-                      <a:tailEnd type="none" w="med" len="med"/>
-                    </a:lnB>
-                    <a:solidFill>
-                      <a:srgbClr val="FFFFFF"/>
-                    </a:solidFill>
-                  </a:tcPr>
-                </a:tc>
-                <a:extLst>
-                  <a:ext uri="{0D108BD9-81ED-4DB2-BD59-A6C34878D82A}">
-                    <a16:rowId xmlns:a16="http://schemas.microsoft.com/office/drawing/2014/main" val="10001"/>
-                  </a:ext>
-                </a:extLst>
-              </a:tr>
-              <a:tr h="475488">
-                <a:tc>
-                  <a:txBody>
-                    <a:bodyPr/>
-                    <a:lstStyle/>
-                    <a:p>
-                      <a:pPr marL="0" indent="0" algn="l">
-                        <a:buNone/>
-                      </a:pPr>
-                      <a:r>
-                        <a:rPr lang="en-US" sz="1250" dirty="0">
-                          <a:solidFill>
-                            <a:srgbClr val="222222"/>
-                          </a:solidFill>
-                          <a:latin typeface="Calibri" pitchFamily="34" charset="0"/>
-                          <a:ea typeface="Calibri" pitchFamily="34" charset="-122"/>
-                          <a:cs typeface="Calibri" pitchFamily="34" charset="-120"/>
-                        </a:rPr>
-                        <a:t>20 - Operations</a:t>
-                      </a:r>
-                      <a:endParaRPr lang="en-US" sz="1250" dirty="0">
-                        <a:latin typeface="Calibri" charset="0"/>
-                        <a:ea typeface="Calibri" charset="0"/>
-                        <a:cs typeface="Calibri" charset="0"/>
-                      </a:endParaRPr>
-                    </a:p>
-                  </a:txBody>
-                  <a:tcPr anchor="ctr">
-                    <a:lnL w="12700" cap="flat" cmpd="sng" algn="ctr">
-                      <a:solidFill>
-                        <a:srgbClr val="DDDDDD"/>
-                      </a:solidFill>
-                      <a:prstDash val="solid"/>
-                      <a:round/>
-                      <a:headEnd type="none" w="med" len="med"/>
-                      <a:tailEnd type="none" w="med" len="med"/>
-                    </a:lnL>
-                    <a:lnR w="12700" cap="flat" cmpd="sng" algn="ctr">
-                      <a:solidFill>
-                        <a:srgbClr val="DDDDDD"/>
-                      </a:solidFill>
-                      <a:prstDash val="solid"/>
-                      <a:round/>
-                      <a:headEnd type="none" w="med" len="med"/>
-                      <a:tailEnd type="none" w="med" len="med"/>
-                    </a:lnR>
-                    <a:lnT w="12700" cap="flat" cmpd="sng" algn="ctr">
-                      <a:solidFill>
-                        <a:srgbClr val="DDDDDD"/>
-                      </a:solidFill>
-                      <a:prstDash val="solid"/>
-                      <a:round/>
-                      <a:headEnd type="none" w="med" len="med"/>
-                      <a:tailEnd type="none" w="med" len="med"/>
-                    </a:lnT>
-                    <a:lnB w="12700" cap="flat" cmpd="sng" algn="ctr">
-                      <a:solidFill>
-                        <a:srgbClr val="DDDDDD"/>
-                      </a:solidFill>
-                      <a:prstDash val="solid"/>
-                      <a:round/>
-                      <a:headEnd type="none" w="med" len="med"/>
-                      <a:tailEnd type="none" w="med" len="med"/>
-                    </a:lnB>
-                    <a:solidFill>
-                      <a:srgbClr val="CADCFC"/>
-                    </a:solidFill>
-                  </a:tcPr>
-                </a:tc>
-                <a:tc>
-                  <a:txBody>
-                    <a:bodyPr/>
-                    <a:lstStyle/>
-                    <a:p>
-                      <a:pPr marL="0" indent="0" algn="l">
-                        <a:buNone/>
-                      </a:pPr>
-                      <a:r>
-                        <a:rPr lang="en-US" sz="1250" dirty="0">
-                          <a:solidFill>
-                            <a:srgbClr val="222222"/>
-                          </a:solidFill>
-                          <a:latin typeface="Calibri" pitchFamily="34" charset="0"/>
-                          <a:ea typeface="Calibri" pitchFamily="34" charset="-122"/>
-                          <a:cs typeface="Calibri" pitchFamily="34" charset="-120"/>
-                        </a:rPr>
-                        <a:t>10.10.20.1 / 10.20.20.1</a:t>
-                      </a:r>
-                      <a:endParaRPr lang="en-US" sz="1250" dirty="0">
-                        <a:latin typeface="Calibri" charset="0"/>
-                        <a:ea typeface="Calibri" charset="0"/>
-                        <a:cs typeface="Calibri" charset="0"/>
-                      </a:endParaRPr>
-                    </a:p>
-                  </a:txBody>
-                  <a:tcPr anchor="ctr">
-                    <a:lnL w="12700" cap="flat" cmpd="sng" algn="ctr">
-                      <a:solidFill>
-                        <a:srgbClr val="DDDDDD"/>
-                      </a:solidFill>
-                      <a:prstDash val="solid"/>
-                      <a:round/>
-                      <a:headEnd type="none" w="med" len="med"/>
-                      <a:tailEnd type="none" w="med" len="med"/>
-                    </a:lnL>
-                    <a:lnR w="12700" cap="flat" cmpd="sng" algn="ctr">
-                      <a:solidFill>
-                        <a:srgbClr val="DDDDDD"/>
-                      </a:solidFill>
-                      <a:prstDash val="solid"/>
-                      <a:round/>
-                      <a:headEnd type="none" w="med" len="med"/>
-                      <a:tailEnd type="none" w="med" len="med"/>
-                    </a:lnR>
-                    <a:lnT w="12700" cap="flat" cmpd="sng" algn="ctr">
-                      <a:solidFill>
-                        <a:srgbClr val="DDDDDD"/>
-                      </a:solidFill>
-                      <a:prstDash val="solid"/>
-                      <a:round/>
-                      <a:headEnd type="none" w="med" len="med"/>
-                      <a:tailEnd type="none" w="med" len="med"/>
-                    </a:lnT>
-                    <a:lnB w="12700" cap="flat" cmpd="sng" algn="ctr">
-                      <a:solidFill>
-                        <a:srgbClr val="DDDDDD"/>
-                      </a:solidFill>
-                      <a:prstDash val="solid"/>
-                      <a:round/>
-                      <a:headEnd type="none" w="med" len="med"/>
-                      <a:tailEnd type="none" w="med" len="med"/>
-                    </a:lnB>
-                    <a:solidFill>
-                      <a:srgbClr val="CADCFC"/>
-                    </a:solidFill>
-                  </a:tcPr>
-                </a:tc>
-                <a:tc>
-                  <a:txBody>
-                    <a:bodyPr/>
-                    <a:lstStyle/>
-                    <a:p>
-                      <a:pPr marL="0" indent="0" algn="l">
-                        <a:buNone/>
-                      </a:pPr>
-                      <a:r>
-                        <a:rPr lang="en-US" sz="1250" dirty="0">
-                          <a:solidFill>
-                            <a:srgbClr val="222222"/>
-                          </a:solidFill>
-                          <a:latin typeface="Calibri" pitchFamily="34" charset="0"/>
-                          <a:ea typeface="Calibri" pitchFamily="34" charset="-122"/>
-                          <a:cs typeface="Calibri" pitchFamily="34" charset="-120"/>
-                        </a:rPr>
-                        <a:t>x.x.4-14</a:t>
-                      </a:r>
-                      <a:endParaRPr lang="en-US" sz="1250" dirty="0">
-                        <a:latin typeface="Calibri" charset="0"/>
-                        <a:ea typeface="Calibri" charset="0"/>
-                        <a:cs typeface="Calibri" charset="0"/>
-                      </a:endParaRPr>
-                    </a:p>
-                  </a:txBody>
-                  <a:tcPr anchor="ctr">
-                    <a:lnL w="12700" cap="flat" cmpd="sng" algn="ctr">
-                      <a:solidFill>
-                        <a:srgbClr val="DDDDDD"/>
-                      </a:solidFill>
-                      <a:prstDash val="solid"/>
-                      <a:round/>
-                      <a:headEnd type="none" w="med" len="med"/>
-                      <a:tailEnd type="none" w="med" len="med"/>
-                    </a:lnL>
-                    <a:lnR w="12700" cap="flat" cmpd="sng" algn="ctr">
-                      <a:solidFill>
-                        <a:srgbClr val="DDDDDD"/>
-                      </a:solidFill>
-                      <a:prstDash val="solid"/>
-                      <a:round/>
-                      <a:headEnd type="none" w="med" len="med"/>
-                      <a:tailEnd type="none" w="med" len="med"/>
-                    </a:lnR>
-                    <a:lnT w="12700" cap="flat" cmpd="sng" algn="ctr">
-                      <a:solidFill>
-                        <a:srgbClr val="DDDDDD"/>
-                      </a:solidFill>
-                      <a:prstDash val="solid"/>
-                      <a:round/>
-                      <a:headEnd type="none" w="med" len="med"/>
-                      <a:tailEnd type="none" w="med" len="med"/>
-                    </a:lnT>
-                    <a:lnB w="12700" cap="flat" cmpd="sng" algn="ctr">
-                      <a:solidFill>
-                        <a:srgbClr val="DDDDDD"/>
-                      </a:solidFill>
-                      <a:prstDash val="solid"/>
-                      <a:round/>
-                      <a:headEnd type="none" w="med" len="med"/>
-                      <a:tailEnd type="none" w="med" len="med"/>
-                    </a:lnB>
-                    <a:solidFill>
-                      <a:srgbClr val="CADCFC"/>
-                    </a:solidFill>
-                  </a:tcPr>
-                </a:tc>
-                <a:extLst>
-                  <a:ext uri="{0D108BD9-81ED-4DB2-BD59-A6C34878D82A}">
-                    <a16:rowId xmlns:a16="http://schemas.microsoft.com/office/drawing/2014/main" val="10002"/>
-                  </a:ext>
-                </a:extLst>
-              </a:tr>
-              <a:tr h="475488">
-                <a:tc>
-                  <a:txBody>
-                    <a:bodyPr/>
-                    <a:lstStyle/>
-                    <a:p>
-                      <a:pPr marL="0" indent="0" algn="l">
-                        <a:buNone/>
-                      </a:pPr>
-                      <a:r>
-                        <a:rPr lang="en-US" sz="1250" dirty="0">
-                          <a:solidFill>
-                            <a:srgbClr val="222222"/>
-                          </a:solidFill>
-                          <a:latin typeface="Calibri" pitchFamily="34" charset="0"/>
-                          <a:ea typeface="Calibri" pitchFamily="34" charset="-122"/>
-                          <a:cs typeface="Calibri" pitchFamily="34" charset="-120"/>
-                        </a:rPr>
-                        <a:t>30 - IT</a:t>
-                      </a:r>
-                      <a:endParaRPr lang="en-US" sz="1250" dirty="0">
-                        <a:latin typeface="Calibri" charset="0"/>
-                        <a:ea typeface="Calibri" charset="0"/>
-                        <a:cs typeface="Calibri" charset="0"/>
-                      </a:endParaRPr>
-                    </a:p>
-                  </a:txBody>
-                  <a:tcPr anchor="ctr">
-                    <a:lnL w="12700" cap="flat" cmpd="sng" algn="ctr">
-                      <a:solidFill>
-                        <a:srgbClr val="DDDDDD"/>
-                      </a:solidFill>
-                      <a:prstDash val="solid"/>
-                      <a:round/>
-                      <a:headEnd type="none" w="med" len="med"/>
-                      <a:tailEnd type="none" w="med" len="med"/>
-                    </a:lnL>
-                    <a:lnR w="12700" cap="flat" cmpd="sng" algn="ctr">
-                      <a:solidFill>
-                        <a:srgbClr val="DDDDDD"/>
-                      </a:solidFill>
-                      <a:prstDash val="solid"/>
-                      <a:round/>
-                      <a:headEnd type="none" w="med" len="med"/>
-                      <a:tailEnd type="none" w="med" len="med"/>
-                    </a:lnR>
-                    <a:lnT w="12700" cap="flat" cmpd="sng" algn="ctr">
-                      <a:solidFill>
-                        <a:srgbClr val="DDDDDD"/>
-                      </a:solidFill>
-                      <a:prstDash val="solid"/>
-                      <a:round/>
-                      <a:headEnd type="none" w="med" len="med"/>
-                      <a:tailEnd type="none" w="med" len="med"/>
-                    </a:lnT>
-                    <a:lnB w="12700" cap="flat" cmpd="sng" algn="ctr">
-                      <a:solidFill>
-                        <a:srgbClr val="DDDDDD"/>
-                      </a:solidFill>
-                      <a:prstDash val="solid"/>
-                      <a:round/>
-                      <a:headEnd type="none" w="med" len="med"/>
-                      <a:tailEnd type="none" w="med" len="med"/>
-                    </a:lnB>
-                    <a:solidFill>
-                      <a:srgbClr val="FFFFFF"/>
-                    </a:solidFill>
-                  </a:tcPr>
-                </a:tc>
-                <a:tc>
-                  <a:txBody>
-                    <a:bodyPr/>
-                    <a:lstStyle/>
-                    <a:p>
-                      <a:pPr marL="0" indent="0" algn="l">
-                        <a:buNone/>
-                      </a:pPr>
-                      <a:r>
-                        <a:rPr lang="en-US" sz="1250" dirty="0">
-                          <a:solidFill>
-                            <a:srgbClr val="222222"/>
-                          </a:solidFill>
-                          <a:latin typeface="Calibri" pitchFamily="34" charset="0"/>
-                          <a:ea typeface="Calibri" pitchFamily="34" charset="-122"/>
-                          <a:cs typeface="Calibri" pitchFamily="34" charset="-120"/>
-                        </a:rPr>
-                        <a:t>10.10.30.1 / 10.20.30.1</a:t>
-                      </a:r>
-                      <a:endParaRPr lang="en-US" sz="1250" dirty="0">
-                        <a:latin typeface="Calibri" charset="0"/>
-                        <a:ea typeface="Calibri" charset="0"/>
-                        <a:cs typeface="Calibri" charset="0"/>
-                      </a:endParaRPr>
-                    </a:p>
-                  </a:txBody>
-                  <a:tcPr anchor="ctr">
-                    <a:lnL w="12700" cap="flat" cmpd="sng" algn="ctr">
-                      <a:solidFill>
-                        <a:srgbClr val="DDDDDD"/>
-                      </a:solidFill>
-                      <a:prstDash val="solid"/>
-                      <a:round/>
-                      <a:headEnd type="none" w="med" len="med"/>
-                      <a:tailEnd type="none" w="med" len="med"/>
-                    </a:lnL>
-                    <a:lnR w="12700" cap="flat" cmpd="sng" algn="ctr">
-                      <a:solidFill>
-                        <a:srgbClr val="DDDDDD"/>
-                      </a:solidFill>
-                      <a:prstDash val="solid"/>
-                      <a:round/>
-                      <a:headEnd type="none" w="med" len="med"/>
-                      <a:tailEnd type="none" w="med" len="med"/>
-                    </a:lnR>
-                    <a:lnT w="12700" cap="flat" cmpd="sng" algn="ctr">
-                      <a:solidFill>
-                        <a:srgbClr val="DDDDDD"/>
-                      </a:solidFill>
-                      <a:prstDash val="solid"/>
-                      <a:round/>
-                      <a:headEnd type="none" w="med" len="med"/>
-                      <a:tailEnd type="none" w="med" len="med"/>
-                    </a:lnT>
-                    <a:lnB w="12700" cap="flat" cmpd="sng" algn="ctr">
-                      <a:solidFill>
-                        <a:srgbClr val="DDDDDD"/>
-                      </a:solidFill>
-                      <a:prstDash val="solid"/>
-                      <a:round/>
-                      <a:headEnd type="none" w="med" len="med"/>
-                      <a:tailEnd type="none" w="med" len="med"/>
-                    </a:lnB>
-                    <a:solidFill>
-                      <a:srgbClr val="FFFFFF"/>
-                    </a:solidFill>
-                  </a:tcPr>
-                </a:tc>
-                <a:tc>
-                  <a:txBody>
-                    <a:bodyPr/>
-                    <a:lstStyle/>
-                    <a:p>
-                      <a:pPr marL="0" indent="0" algn="l">
-                        <a:buNone/>
-                      </a:pPr>
-                      <a:r>
-                        <a:rPr lang="en-US" sz="1250" dirty="0">
-                          <a:solidFill>
-                            <a:srgbClr val="222222"/>
-                          </a:solidFill>
-                          <a:latin typeface="Calibri" pitchFamily="34" charset="0"/>
-                          <a:ea typeface="Calibri" pitchFamily="34" charset="-122"/>
-                          <a:cs typeface="Calibri" pitchFamily="34" charset="-120"/>
-                        </a:rPr>
-                        <a:t>x.x.4/5-14</a:t>
-                      </a:r>
-                      <a:endParaRPr lang="en-US" sz="1250" dirty="0">
-                        <a:latin typeface="Calibri" charset="0"/>
-                        <a:ea typeface="Calibri" charset="0"/>
-                        <a:cs typeface="Calibri" charset="0"/>
-                      </a:endParaRPr>
-                    </a:p>
-                  </a:txBody>
-                  <a:tcPr anchor="ctr">
-                    <a:lnL w="12700" cap="flat" cmpd="sng" algn="ctr">
-                      <a:solidFill>
-                        <a:srgbClr val="DDDDDD"/>
-                      </a:solidFill>
-                      <a:prstDash val="solid"/>
-                      <a:round/>
-                      <a:headEnd type="none" w="med" len="med"/>
-                      <a:tailEnd type="none" w="med" len="med"/>
-                    </a:lnL>
-                    <a:lnR w="12700" cap="flat" cmpd="sng" algn="ctr">
-                      <a:solidFill>
-                        <a:srgbClr val="DDDDDD"/>
-                      </a:solidFill>
-                      <a:prstDash val="solid"/>
-                      <a:round/>
-                      <a:headEnd type="none" w="med" len="med"/>
-                      <a:tailEnd type="none" w="med" len="med"/>
-                    </a:lnR>
-                    <a:lnT w="12700" cap="flat" cmpd="sng" algn="ctr">
-                      <a:solidFill>
-                        <a:srgbClr val="DDDDDD"/>
-                      </a:solidFill>
-                      <a:prstDash val="solid"/>
-                      <a:round/>
-                      <a:headEnd type="none" w="med" len="med"/>
-                      <a:tailEnd type="none" w="med" len="med"/>
-                    </a:lnT>
-                    <a:lnB w="12700" cap="flat" cmpd="sng" algn="ctr">
-                      <a:solidFill>
-                        <a:srgbClr val="DDDDDD"/>
-                      </a:solidFill>
-                      <a:prstDash val="solid"/>
-                      <a:round/>
-                      <a:headEnd type="none" w="med" len="med"/>
-                      <a:tailEnd type="none" w="med" len="med"/>
-                    </a:lnB>
-                    <a:solidFill>
-                      <a:srgbClr val="FFFFFF"/>
-                    </a:solidFill>
-                  </a:tcPr>
-                </a:tc>
-                <a:extLst>
-                  <a:ext uri="{0D108BD9-81ED-4DB2-BD59-A6C34878D82A}">
-                    <a16:rowId xmlns:a16="http://schemas.microsoft.com/office/drawing/2014/main" val="10003"/>
-                  </a:ext>
-                </a:extLst>
-              </a:tr>
-              <a:tr h="475488">
-                <a:tc>
-                  <a:txBody>
-                    <a:bodyPr/>
-                    <a:lstStyle/>
-                    <a:p>
-                      <a:pPr marL="0" indent="0" algn="l">
-                        <a:buNone/>
-                      </a:pPr>
-                      <a:r>
-                        <a:rPr lang="en-US" sz="1250" dirty="0">
-                          <a:solidFill>
-                            <a:srgbClr val="222222"/>
-                          </a:solidFill>
-                          <a:latin typeface="Calibri" pitchFamily="34" charset="0"/>
-                          <a:ea typeface="Calibri" pitchFamily="34" charset="-122"/>
-                          <a:cs typeface="Calibri" pitchFamily="34" charset="-120"/>
-                        </a:rPr>
-                        <a:t>40 - Management (HQ)</a:t>
-                      </a:r>
-                      <a:endParaRPr lang="en-US" sz="1250" dirty="0">
-                        <a:latin typeface="Calibri" charset="0"/>
-                        <a:ea typeface="Calibri" charset="0"/>
-                        <a:cs typeface="Calibri" charset="0"/>
-                      </a:endParaRPr>
-                    </a:p>
-                  </a:txBody>
-                  <a:tcPr anchor="ctr">
-                    <a:lnL w="12700" cap="flat" cmpd="sng" algn="ctr">
-                      <a:solidFill>
-                        <a:srgbClr val="DDDDDD"/>
-                      </a:solidFill>
-                      <a:prstDash val="solid"/>
-                      <a:round/>
-                      <a:headEnd type="none" w="med" len="med"/>
-                      <a:tailEnd type="none" w="med" len="med"/>
-                    </a:lnL>
-                    <a:lnR w="12700" cap="flat" cmpd="sng" algn="ctr">
-                      <a:solidFill>
-                        <a:srgbClr val="DDDDDD"/>
-                      </a:solidFill>
-                      <a:prstDash val="solid"/>
-                      <a:round/>
-                      <a:headEnd type="none" w="med" len="med"/>
-                      <a:tailEnd type="none" w="med" len="med"/>
-                    </a:lnR>
-                    <a:lnT w="12700" cap="flat" cmpd="sng" algn="ctr">
-                      <a:solidFill>
-                        <a:srgbClr val="DDDDDD"/>
-                      </a:solidFill>
-                      <a:prstDash val="solid"/>
-                      <a:round/>
-                      <a:headEnd type="none" w="med" len="med"/>
-                      <a:tailEnd type="none" w="med" len="med"/>
-                    </a:lnT>
-                    <a:lnB w="12700" cap="flat" cmpd="sng" algn="ctr">
-                      <a:solidFill>
-                        <a:srgbClr val="DDDDDD"/>
-                      </a:solidFill>
-                      <a:prstDash val="solid"/>
-                      <a:round/>
-                      <a:headEnd type="none" w="med" len="med"/>
-                      <a:tailEnd type="none" w="med" len="med"/>
-                    </a:lnB>
-                    <a:solidFill>
-                      <a:srgbClr val="CADCFC"/>
-                    </a:solidFill>
-                  </a:tcPr>
-                </a:tc>
-                <a:tc>
-                  <a:txBody>
-                    <a:bodyPr/>
-                    <a:lstStyle/>
-                    <a:p>
-                      <a:pPr marL="0" indent="0" algn="l">
-                        <a:buNone/>
-                      </a:pPr>
-                      <a:r>
-                        <a:rPr lang="en-US" sz="1250" dirty="0">
-                          <a:solidFill>
-                            <a:srgbClr val="222222"/>
-                          </a:solidFill>
-                          <a:latin typeface="Calibri" pitchFamily="34" charset="0"/>
-                          <a:ea typeface="Calibri" pitchFamily="34" charset="-122"/>
-                          <a:cs typeface="Calibri" pitchFamily="34" charset="-120"/>
-                        </a:rPr>
-                        <a:t>10.10.40.1</a:t>
-                      </a:r>
-                      <a:endParaRPr lang="en-US" sz="1250" dirty="0">
-                        <a:latin typeface="Calibri" charset="0"/>
-                        <a:ea typeface="Calibri" charset="0"/>
-                        <a:cs typeface="Calibri" charset="0"/>
-                      </a:endParaRPr>
-                    </a:p>
-                  </a:txBody>
-                  <a:tcPr anchor="ctr">
-                    <a:lnL w="12700" cap="flat" cmpd="sng" algn="ctr">
-                      <a:solidFill>
-                        <a:srgbClr val="DDDDDD"/>
-                      </a:solidFill>
-                      <a:prstDash val="solid"/>
-                      <a:round/>
-                      <a:headEnd type="none" w="med" len="med"/>
-                      <a:tailEnd type="none" w="med" len="med"/>
-                    </a:lnL>
-                    <a:lnR w="12700" cap="flat" cmpd="sng" algn="ctr">
-                      <a:solidFill>
-                        <a:srgbClr val="DDDDDD"/>
-                      </a:solidFill>
-                      <a:prstDash val="solid"/>
-                      <a:round/>
-                      <a:headEnd type="none" w="med" len="med"/>
-                      <a:tailEnd type="none" w="med" len="med"/>
-                    </a:lnR>
-                    <a:lnT w="12700" cap="flat" cmpd="sng" algn="ctr">
-                      <a:solidFill>
-                        <a:srgbClr val="DDDDDD"/>
-                      </a:solidFill>
-                      <a:prstDash val="solid"/>
-                      <a:round/>
-                      <a:headEnd type="none" w="med" len="med"/>
-                      <a:tailEnd type="none" w="med" len="med"/>
-                    </a:lnT>
-                    <a:lnB w="12700" cap="flat" cmpd="sng" algn="ctr">
-                      <a:solidFill>
-                        <a:srgbClr val="DDDDDD"/>
-                      </a:solidFill>
-                      <a:prstDash val="solid"/>
-                      <a:round/>
-                      <a:headEnd type="none" w="med" len="med"/>
-                      <a:tailEnd type="none" w="med" len="med"/>
-                    </a:lnB>
-                    <a:solidFill>
-                      <a:srgbClr val="CADCFC"/>
-                    </a:solidFill>
-                  </a:tcPr>
-                </a:tc>
-                <a:tc>
-                  <a:txBody>
-                    <a:bodyPr/>
-                    <a:lstStyle/>
-                    <a:p>
-                      <a:pPr marL="0" indent="0" algn="l">
-                        <a:buNone/>
-                      </a:pPr>
-                      <a:r>
-                        <a:rPr lang="en-US" sz="1250" dirty="0">
-                          <a:solidFill>
-                            <a:srgbClr val="222222"/>
-                          </a:solidFill>
-                          <a:latin typeface="Calibri" pitchFamily="34" charset="0"/>
-                          <a:ea typeface="Calibri" pitchFamily="34" charset="-122"/>
-                          <a:cs typeface="Calibri" pitchFamily="34" charset="-120"/>
-                        </a:rPr>
-                        <a:t>x.x.4-6</a:t>
-                      </a:r>
-                      <a:endParaRPr lang="en-US" sz="1250" dirty="0">
-                        <a:latin typeface="Calibri" charset="0"/>
-                        <a:ea typeface="Calibri" charset="0"/>
-                        <a:cs typeface="Calibri" charset="0"/>
-                      </a:endParaRPr>
-                    </a:p>
-                  </a:txBody>
-                  <a:tcPr anchor="ctr">
-                    <a:lnL w="12700" cap="flat" cmpd="sng" algn="ctr">
-                      <a:solidFill>
-                        <a:srgbClr val="DDDDDD"/>
-                      </a:solidFill>
-                      <a:prstDash val="solid"/>
-                      <a:round/>
-                      <a:headEnd type="none" w="med" len="med"/>
-                      <a:tailEnd type="none" w="med" len="med"/>
-                    </a:lnL>
-                    <a:lnR w="12700" cap="flat" cmpd="sng" algn="ctr">
-                      <a:solidFill>
-                        <a:srgbClr val="DDDDDD"/>
-                      </a:solidFill>
-                      <a:prstDash val="solid"/>
-                      <a:round/>
-                      <a:headEnd type="none" w="med" len="med"/>
-                      <a:tailEnd type="none" w="med" len="med"/>
-                    </a:lnR>
-                    <a:lnT w="12700" cap="flat" cmpd="sng" algn="ctr">
-                      <a:solidFill>
-                        <a:srgbClr val="DDDDDD"/>
-                      </a:solidFill>
-                      <a:prstDash val="solid"/>
-                      <a:round/>
-                      <a:headEnd type="none" w="med" len="med"/>
-                      <a:tailEnd type="none" w="med" len="med"/>
-                    </a:lnT>
-                    <a:lnB w="12700" cap="flat" cmpd="sng" algn="ctr">
-                      <a:solidFill>
-                        <a:srgbClr val="DDDDDD"/>
-                      </a:solidFill>
-                      <a:prstDash val="solid"/>
-                      <a:round/>
-                      <a:headEnd type="none" w="med" len="med"/>
-                      <a:tailEnd type="none" w="med" len="med"/>
-                    </a:lnB>
-                    <a:solidFill>
-                      <a:srgbClr val="CADCFC"/>
-                    </a:solidFill>
-                  </a:tcPr>
-                </a:tc>
-                <a:extLst>
-                  <a:ext uri="{0D108BD9-81ED-4DB2-BD59-A6C34878D82A}">
-                    <a16:rowId xmlns:a16="http://schemas.microsoft.com/office/drawing/2014/main" val="10004"/>
-                  </a:ext>
-                </a:extLst>
-              </a:tr>
-              <a:tr h="475488">
-                <a:tc>
-                  <a:txBody>
-                    <a:bodyPr/>
-                    <a:lstStyle/>
-                    <a:p>
-                      <a:pPr marL="0" indent="0" algn="l">
-                        <a:buNone/>
-                      </a:pPr>
-                      <a:r>
-                        <a:rPr lang="en-US" sz="1250" dirty="0">
-                          <a:solidFill>
-                            <a:srgbClr val="222222"/>
-                          </a:solidFill>
-                          <a:latin typeface="Calibri" pitchFamily="34" charset="0"/>
-                          <a:ea typeface="Calibri" pitchFamily="34" charset="-122"/>
-                          <a:cs typeface="Calibri" pitchFamily="34" charset="-120"/>
-                        </a:rPr>
-                        <a:t>50 - Guest</a:t>
-                      </a:r>
-                      <a:endParaRPr lang="en-US" sz="1250" dirty="0">
-                        <a:latin typeface="Calibri" charset="0"/>
-                        <a:ea typeface="Calibri" charset="0"/>
-                        <a:cs typeface="Calibri" charset="0"/>
-                      </a:endParaRPr>
-                    </a:p>
-                  </a:txBody>
-                  <a:tcPr anchor="ctr">
-                    <a:lnL w="12700" cap="flat" cmpd="sng" algn="ctr">
-                      <a:solidFill>
-                        <a:srgbClr val="DDDDDD"/>
-                      </a:solidFill>
-                      <a:prstDash val="solid"/>
-                      <a:round/>
-                      <a:headEnd type="none" w="med" len="med"/>
-                      <a:tailEnd type="none" w="med" len="med"/>
-                    </a:lnL>
-                    <a:lnR w="12700" cap="flat" cmpd="sng" algn="ctr">
-                      <a:solidFill>
-                        <a:srgbClr val="DDDDDD"/>
-                      </a:solidFill>
-                      <a:prstDash val="solid"/>
-                      <a:round/>
-                      <a:headEnd type="none" w="med" len="med"/>
-                      <a:tailEnd type="none" w="med" len="med"/>
-                    </a:lnR>
-                    <a:lnT w="12700" cap="flat" cmpd="sng" algn="ctr">
-                      <a:solidFill>
-                        <a:srgbClr val="DDDDDD"/>
-                      </a:solidFill>
-                      <a:prstDash val="solid"/>
-                      <a:round/>
-                      <a:headEnd type="none" w="med" len="med"/>
-                      <a:tailEnd type="none" w="med" len="med"/>
-                    </a:lnT>
-                    <a:lnB w="12700" cap="flat" cmpd="sng" algn="ctr">
-                      <a:solidFill>
-                        <a:srgbClr val="DDDDDD"/>
-                      </a:solidFill>
-                      <a:prstDash val="solid"/>
-                      <a:round/>
-                      <a:headEnd type="none" w="med" len="med"/>
-                      <a:tailEnd type="none" w="med" len="med"/>
-                    </a:lnB>
-                    <a:solidFill>
-                      <a:srgbClr val="FFFFFF"/>
-                    </a:solidFill>
-                  </a:tcPr>
-                </a:tc>
-                <a:tc>
-                  <a:txBody>
-                    <a:bodyPr/>
-                    <a:lstStyle/>
-                    <a:p>
-                      <a:pPr marL="0" indent="0" algn="l">
-                        <a:buNone/>
-                      </a:pPr>
-                      <a:r>
-                        <a:rPr lang="en-US" sz="1250" dirty="0">
-                          <a:solidFill>
-                            <a:srgbClr val="222222"/>
-                          </a:solidFill>
-                          <a:latin typeface="Calibri" pitchFamily="34" charset="0"/>
-                          <a:ea typeface="Calibri" pitchFamily="34" charset="-122"/>
-                          <a:cs typeface="Calibri" pitchFamily="34" charset="-120"/>
-                        </a:rPr>
-                        <a:t>10.10.50.1 / 10.20.50.1</a:t>
-                      </a:r>
-                      <a:endParaRPr lang="en-US" sz="1250" dirty="0">
-                        <a:latin typeface="Calibri" charset="0"/>
-                        <a:ea typeface="Calibri" charset="0"/>
-                        <a:cs typeface="Calibri" charset="0"/>
-                      </a:endParaRPr>
-                    </a:p>
-                  </a:txBody>
-                  <a:tcPr anchor="ctr">
-                    <a:lnL w="12700" cap="flat" cmpd="sng" algn="ctr">
-                      <a:solidFill>
-                        <a:srgbClr val="DDDDDD"/>
-                      </a:solidFill>
-                      <a:prstDash val="solid"/>
-                      <a:round/>
-                      <a:headEnd type="none" w="med" len="med"/>
-                      <a:tailEnd type="none" w="med" len="med"/>
-                    </a:lnL>
-                    <a:lnR w="12700" cap="flat" cmpd="sng" algn="ctr">
-                      <a:solidFill>
-                        <a:srgbClr val="DDDDDD"/>
-                      </a:solidFill>
-                      <a:prstDash val="solid"/>
-                      <a:round/>
-                      <a:headEnd type="none" w="med" len="med"/>
-                      <a:tailEnd type="none" w="med" len="med"/>
-                    </a:lnR>
-                    <a:lnT w="12700" cap="flat" cmpd="sng" algn="ctr">
-                      <a:solidFill>
-                        <a:srgbClr val="DDDDDD"/>
-                      </a:solidFill>
-                      <a:prstDash val="solid"/>
-                      <a:round/>
-                      <a:headEnd type="none" w="med" len="med"/>
-                      <a:tailEnd type="none" w="med" len="med"/>
-                    </a:lnT>
-                    <a:lnB w="12700" cap="flat" cmpd="sng" algn="ctr">
-                      <a:solidFill>
-                        <a:srgbClr val="DDDDDD"/>
-                      </a:solidFill>
-                      <a:prstDash val="solid"/>
-                      <a:round/>
-                      <a:headEnd type="none" w="med" len="med"/>
-                      <a:tailEnd type="none" w="med" len="med"/>
-                    </a:lnB>
-                    <a:solidFill>
-                      <a:srgbClr val="FFFFFF"/>
-                    </a:solidFill>
-                  </a:tcPr>
-                </a:tc>
-                <a:tc>
-                  <a:txBody>
-                    <a:bodyPr/>
-                    <a:lstStyle/>
-                    <a:p>
-                      <a:pPr marL="0" indent="0" algn="l">
-                        <a:buNone/>
-                      </a:pPr>
-                      <a:r>
-                        <a:rPr lang="en-US" sz="1250" dirty="0">
-                          <a:solidFill>
-                            <a:srgbClr val="222222"/>
-                          </a:solidFill>
-                          <a:latin typeface="Calibri" pitchFamily="34" charset="0"/>
-                          <a:ea typeface="Calibri" pitchFamily="34" charset="-122"/>
-                          <a:cs typeface="Calibri" pitchFamily="34" charset="-120"/>
-                        </a:rPr>
-                        <a:t>x.x.4-6</a:t>
-                      </a:r>
-                      <a:endParaRPr lang="en-US" sz="1250" dirty="0">
-                        <a:latin typeface="Calibri" charset="0"/>
-                        <a:ea typeface="Calibri" charset="0"/>
-                        <a:cs typeface="Calibri" charset="0"/>
-                      </a:endParaRPr>
-                    </a:p>
-                  </a:txBody>
-                  <a:tcPr anchor="ctr">
-                    <a:lnL w="12700" cap="flat" cmpd="sng" algn="ctr">
-                      <a:solidFill>
-                        <a:srgbClr val="DDDDDD"/>
-                      </a:solidFill>
-                      <a:prstDash val="solid"/>
-                      <a:round/>
-                      <a:headEnd type="none" w="med" len="med"/>
-                      <a:tailEnd type="none" w="med" len="med"/>
-                    </a:lnL>
-                    <a:lnR w="12700" cap="flat" cmpd="sng" algn="ctr">
-                      <a:solidFill>
-                        <a:srgbClr val="DDDDDD"/>
-                      </a:solidFill>
-                      <a:prstDash val="solid"/>
-                      <a:round/>
-                      <a:headEnd type="none" w="med" len="med"/>
-                      <a:tailEnd type="none" w="med" len="med"/>
-                    </a:lnR>
-                    <a:lnT w="12700" cap="flat" cmpd="sng" algn="ctr">
-                      <a:solidFill>
-                        <a:srgbClr val="DDDDDD"/>
-                      </a:solidFill>
-                      <a:prstDash val="solid"/>
-                      <a:round/>
-                      <a:headEnd type="none" w="med" len="med"/>
-                      <a:tailEnd type="none" w="med" len="med"/>
-                    </a:lnT>
-                    <a:lnB w="12700" cap="flat" cmpd="sng" algn="ctr">
-                      <a:solidFill>
-                        <a:srgbClr val="DDDDDD"/>
-                      </a:solidFill>
-                      <a:prstDash val="solid"/>
-                      <a:round/>
-                      <a:headEnd type="none" w="med" len="med"/>
-                      <a:tailEnd type="none" w="med" len="med"/>
-                    </a:lnB>
-                    <a:solidFill>
-                      <a:srgbClr val="FFFFFF"/>
-                    </a:solidFill>
-                  </a:tcPr>
-                </a:tc>
-                <a:extLst>
-                  <a:ext uri="{0D108BD9-81ED-4DB2-BD59-A6C34878D82A}">
-                    <a16:rowId xmlns:a16="http://schemas.microsoft.com/office/drawing/2014/main" val="10005"/>
-                  </a:ext>
-                </a:extLst>
-              </a:tr>
-              <a:tr h="475488">
-                <a:tc>
-                  <a:txBody>
-                    <a:bodyPr/>
-                    <a:lstStyle/>
-                    <a:p>
-                      <a:pPr marL="0" indent="0" algn="l">
-                        <a:buNone/>
-                      </a:pPr>
-                      <a:r>
-                        <a:rPr lang="en-US" sz="1250" dirty="0">
-                          <a:solidFill>
-                            <a:srgbClr val="222222"/>
-                          </a:solidFill>
-                          <a:latin typeface="Calibri" pitchFamily="34" charset="0"/>
-                          <a:ea typeface="Calibri" pitchFamily="34" charset="-122"/>
-                          <a:cs typeface="Calibri" pitchFamily="34" charset="-120"/>
-                        </a:rPr>
-                        <a:t>99 - Network Mgmt</a:t>
-                      </a:r>
-                      <a:endParaRPr lang="en-US" sz="1250" dirty="0">
-                        <a:latin typeface="Calibri" charset="0"/>
-                        <a:ea typeface="Calibri" charset="0"/>
-                        <a:cs typeface="Calibri" charset="0"/>
-                      </a:endParaRPr>
-                    </a:p>
-                  </a:txBody>
-                  <a:tcPr anchor="ctr">
-                    <a:lnL w="12700" cap="flat" cmpd="sng" algn="ctr">
-                      <a:solidFill>
-                        <a:srgbClr val="DDDDDD"/>
-                      </a:solidFill>
-                      <a:prstDash val="solid"/>
-                      <a:round/>
-                      <a:headEnd type="none" w="med" len="med"/>
-                      <a:tailEnd type="none" w="med" len="med"/>
-                    </a:lnL>
-                    <a:lnR w="12700" cap="flat" cmpd="sng" algn="ctr">
-                      <a:solidFill>
-                        <a:srgbClr val="DDDDDD"/>
-                      </a:solidFill>
-                      <a:prstDash val="solid"/>
-                      <a:round/>
-                      <a:headEnd type="none" w="med" len="med"/>
-                      <a:tailEnd type="none" w="med" len="med"/>
-                    </a:lnR>
-                    <a:lnT w="12700" cap="flat" cmpd="sng" algn="ctr">
-                      <a:solidFill>
-                        <a:srgbClr val="DDDDDD"/>
-                      </a:solidFill>
-                      <a:prstDash val="solid"/>
-                      <a:round/>
-                      <a:headEnd type="none" w="med" len="med"/>
-                      <a:tailEnd type="none" w="med" len="med"/>
-                    </a:lnT>
-                    <a:lnB w="12700" cap="flat" cmpd="sng" algn="ctr">
-                      <a:solidFill>
-                        <a:srgbClr val="DDDDDD"/>
-                      </a:solidFill>
-                      <a:prstDash val="solid"/>
-                      <a:round/>
-                      <a:headEnd type="none" w="med" len="med"/>
-                      <a:tailEnd type="none" w="med" len="med"/>
-                    </a:lnB>
-                    <a:solidFill>
-                      <a:srgbClr val="CADCFC"/>
-                    </a:solidFill>
-                  </a:tcPr>
-                </a:tc>
-                <a:tc>
-                  <a:txBody>
-                    <a:bodyPr/>
-                    <a:lstStyle/>
-                    <a:p>
-                      <a:pPr marL="0" indent="0" algn="l">
-                        <a:buNone/>
-                      </a:pPr>
-                      <a:r>
-                        <a:rPr lang="en-US" sz="1250" dirty="0">
-                          <a:solidFill>
-                            <a:srgbClr val="222222"/>
-                          </a:solidFill>
-                          <a:latin typeface="Calibri" pitchFamily="34" charset="0"/>
-                          <a:ea typeface="Calibri" pitchFamily="34" charset="-122"/>
-                          <a:cs typeface="Calibri" pitchFamily="34" charset="-120"/>
-                        </a:rPr>
-                        <a:t>10.10.99.1 / 10.20.99.1</a:t>
-                      </a:r>
-                      <a:endParaRPr lang="en-US" sz="1250" dirty="0">
-                        <a:latin typeface="Calibri" charset="0"/>
-                        <a:ea typeface="Calibri" charset="0"/>
-                        <a:cs typeface="Calibri" charset="0"/>
-                      </a:endParaRPr>
-                    </a:p>
-                  </a:txBody>
-                  <a:tcPr anchor="ctr">
-                    <a:lnL w="12700" cap="flat" cmpd="sng" algn="ctr">
-                      <a:solidFill>
-                        <a:srgbClr val="DDDDDD"/>
-                      </a:solidFill>
-                      <a:prstDash val="solid"/>
-                      <a:round/>
-                      <a:headEnd type="none" w="med" len="med"/>
-                      <a:tailEnd type="none" w="med" len="med"/>
-                    </a:lnL>
-                    <a:lnR w="12700" cap="flat" cmpd="sng" algn="ctr">
-                      <a:solidFill>
-                        <a:srgbClr val="DDDDDD"/>
-                      </a:solidFill>
-                      <a:prstDash val="solid"/>
-                      <a:round/>
-                      <a:headEnd type="none" w="med" len="med"/>
-                      <a:tailEnd type="none" w="med" len="med"/>
-                    </a:lnR>
-                    <a:lnT w="12700" cap="flat" cmpd="sng" algn="ctr">
-                      <a:solidFill>
-                        <a:srgbClr val="DDDDDD"/>
-                      </a:solidFill>
-                      <a:prstDash val="solid"/>
-                      <a:round/>
-                      <a:headEnd type="none" w="med" len="med"/>
-                      <a:tailEnd type="none" w="med" len="med"/>
-                    </a:lnT>
-                    <a:lnB w="12700" cap="flat" cmpd="sng" algn="ctr">
-                      <a:solidFill>
-                        <a:srgbClr val="DDDDDD"/>
-                      </a:solidFill>
-                      <a:prstDash val="solid"/>
-                      <a:round/>
-                      <a:headEnd type="none" w="med" len="med"/>
-                      <a:tailEnd type="none" w="med" len="med"/>
-                    </a:lnB>
-                    <a:solidFill>
-                      <a:srgbClr val="CADCFC"/>
-                    </a:solidFill>
-                  </a:tcPr>
-                </a:tc>
-                <a:tc>
-                  <a:txBody>
-                    <a:bodyPr/>
-                    <a:lstStyle/>
-                    <a:p>
-                      <a:pPr marL="0" indent="0" algn="l">
-                        <a:buNone/>
-                      </a:pPr>
-                      <a:r>
-                        <a:rPr lang="en-US" sz="1250" dirty="0">
-                          <a:solidFill>
-                            <a:srgbClr val="222222"/>
-                          </a:solidFill>
-                          <a:latin typeface="Calibri" pitchFamily="34" charset="0"/>
-                          <a:ea typeface="Calibri" pitchFamily="34" charset="-122"/>
-                          <a:cs typeface="Calibri" pitchFamily="34" charset="-120"/>
-                        </a:rPr>
-                        <a:t>x.x.4-6 (static)</a:t>
-                      </a:r>
-                      <a:endParaRPr lang="en-US" sz="1250" dirty="0">
-                        <a:latin typeface="Calibri" charset="0"/>
-                        <a:ea typeface="Calibri" charset="0"/>
-                        <a:cs typeface="Calibri" charset="0"/>
-                      </a:endParaRPr>
-                    </a:p>
-                  </a:txBody>
-                  <a:tcPr anchor="ctr">
-                    <a:lnL w="12700" cap="flat" cmpd="sng" algn="ctr">
-                      <a:solidFill>
-                        <a:srgbClr val="DDDDDD"/>
-                      </a:solidFill>
-                      <a:prstDash val="solid"/>
-                      <a:round/>
-                      <a:headEnd type="none" w="med" len="med"/>
-                      <a:tailEnd type="none" w="med" len="med"/>
-                    </a:lnL>
-                    <a:lnR w="12700" cap="flat" cmpd="sng" algn="ctr">
-                      <a:solidFill>
-                        <a:srgbClr val="DDDDDD"/>
-                      </a:solidFill>
-                      <a:prstDash val="solid"/>
-                      <a:round/>
-                      <a:headEnd type="none" w="med" len="med"/>
-                      <a:tailEnd type="none" w="med" len="med"/>
-                    </a:lnR>
-                    <a:lnT w="12700" cap="flat" cmpd="sng" algn="ctr">
-                      <a:solidFill>
-                        <a:srgbClr val="DDDDDD"/>
-                      </a:solidFill>
-                      <a:prstDash val="solid"/>
-                      <a:round/>
-                      <a:headEnd type="none" w="med" len="med"/>
-                      <a:tailEnd type="none" w="med" len="med"/>
-                    </a:lnT>
-                    <a:lnB w="12700" cap="flat" cmpd="sng" algn="ctr">
-                      <a:solidFill>
-                        <a:srgbClr val="DDDDDD"/>
-                      </a:solidFill>
-                      <a:prstDash val="solid"/>
-                      <a:round/>
-                      <a:headEnd type="none" w="med" len="med"/>
-                      <a:tailEnd type="none" w="med" len="med"/>
-                    </a:lnB>
-                    <a:solidFill>
-                      <a:srgbClr val="CADCFC"/>
-                    </a:solidFill>
-                  </a:tcPr>
-                </a:tc>
-                <a:extLst>
-                  <a:ext uri="{0D108BD9-81ED-4DB2-BD59-A6C34878D82A}">
-                    <a16:rowId xmlns:a16="http://schemas.microsoft.com/office/drawing/2014/main" val="10006"/>
-                  </a:ext>
-                </a:extLst>
-              </a:tr>
-            </a:tbl>
-          </a:graphicData>
-        </a:graphic>
-      </p:graphicFrame>
-      <p:sp>
-        <p:nvSpPr>
-          <p:cNvPr id="4" name="Shape 1"/>
-          <p:cNvSpPr/>
-          <p:nvPr/>
-        </p:nvSpPr>
-        <p:spPr>
-          <a:xfrm>
-            <a:off x="7863840" y="1645920"/>
-            <a:ext cx="3749040" cy="3017520"/>
-          </a:xfrm>
-          <a:prstGeom prst="roundRect">
-            <a:avLst>
-              <a:gd name="adj" fmla="val 3636"/>
-            </a:avLst>
-          </a:prstGeom>
-          <a:solidFill>
-            <a:srgbClr val="1E2761"/>
-          </a:solidFill>
-          <a:ln/>
-        </p:spPr>
-      </p:sp>
-      <p:sp>
-        <p:nvSpPr>
-          <p:cNvPr id="5" name="Text 2"/>
-          <p:cNvSpPr txBox="1"/>
-          <p:nvPr/>
-        </p:nvSpPr>
-        <p:spPr>
-          <a:xfrm>
-            <a:off x="7863840" y="1920240"/>
-            <a:ext cx="3749040" cy="1005840"/>
-          </a:xfrm>
-          <a:prstGeom prst="rect">
-            <a:avLst/>
-          </a:prstGeom>
-          <a:noFill/>
-          <a:ln/>
-        </p:spPr>
-        <p:txBody>
-          <a:bodyPr wrap="square" lIns="0" tIns="0" rIns="0" bIns="0" rtlCol="0" anchor="ctr"/>
-          <a:lstStyle/>
-          <a:p>
-            <a:pPr marL="0" indent="0" algn="ctr">
-              <a:buNone/>
-            </a:pPr>
-            <a:r>
-              <a:rPr lang="en-US" sz="5600" b="1" dirty="0">
-                <a:solidFill>
-                  <a:srgbClr val="FFFFFF"/>
-                </a:solidFill>
-                <a:latin typeface="Cambria" pitchFamily="34" charset="0"/>
-                <a:ea typeface="Cambria" pitchFamily="34" charset="-122"/>
-                <a:cs typeface="Cambria" pitchFamily="34" charset="-120"/>
-              </a:rPr>
-              <a:t>11</a:t>
-            </a:r>
-            <a:endParaRPr lang="en-US" sz="5600" dirty="0"/>
-          </a:p>
-        </p:txBody>
-      </p:sp>
-      <p:sp>
-        <p:nvSpPr>
-          <p:cNvPr id="6" name="Text 3"/>
-          <p:cNvSpPr txBox="1"/>
-          <p:nvPr/>
-        </p:nvSpPr>
-        <p:spPr>
-          <a:xfrm>
-            <a:off x="7863840" y="2880360"/>
-            <a:ext cx="3749040" cy="365760"/>
-          </a:xfrm>
-          <a:prstGeom prst="rect">
-            <a:avLst/>
-          </a:prstGeom>
-          <a:noFill/>
-          <a:ln/>
-        </p:spPr>
-        <p:txBody>
-          <a:bodyPr wrap="square" lIns="0" tIns="0" rIns="0" bIns="0" rtlCol="0" anchor="ctr"/>
-          <a:lstStyle/>
-          <a:p>
-            <a:pPr marL="0" indent="0" algn="ctr">
-              <a:buNone/>
-            </a:pPr>
-            <a:r>
-              <a:rPr lang="en-US" sz="1400" dirty="0">
-                <a:solidFill>
-                  <a:srgbClr val="CADCFC"/>
-                </a:solidFill>
-                <a:latin typeface="Calibri" pitchFamily="34" charset="0"/>
-                <a:ea typeface="Calibri" pitchFamily="34" charset="-122"/>
-                <a:cs typeface="Calibri" pitchFamily="34" charset="-120"/>
-              </a:rPr>
-              <a:t>separate networks, sized to fit</a:t>
-            </a:r>
-            <a:endParaRPr lang="en-US" sz="1400" dirty="0"/>
-          </a:p>
-        </p:txBody>
-      </p:sp>
-      <p:sp>
-        <p:nvSpPr>
-          <p:cNvPr id="7" name="Text 4"/>
-          <p:cNvSpPr txBox="1"/>
-          <p:nvPr/>
-        </p:nvSpPr>
-        <p:spPr>
-          <a:xfrm>
-            <a:off x="8138160" y="3429000"/>
-            <a:ext cx="3200400" cy="1005840"/>
-          </a:xfrm>
-          <a:prstGeom prst="rect">
-            <a:avLst/>
-          </a:prstGeom>
-          <a:noFill/>
-          <a:ln/>
-        </p:spPr>
-        <p:txBody>
-          <a:bodyPr wrap="square" lIns="0" tIns="0" rIns="0" bIns="0" rtlCol="0" anchor="ctr"/>
-          <a:lstStyle/>
-          <a:p>
-            <a:pPr marL="0" indent="0" algn="ctr">
-              <a:lnSpc>
-                <a:spcPct val="130000"/>
-              </a:lnSpc>
-              <a:buNone/>
-            </a:pPr>
-            <a:r>
-              <a:rPr lang="en-US" sz="1300" dirty="0">
-                <a:solidFill>
-                  <a:srgbClr val="FFFFFF"/>
-                </a:solidFill>
-                <a:latin typeface="Calibri" pitchFamily="34" charset="0"/>
-                <a:ea typeface="Calibri" pitchFamily="34" charset="-122"/>
-                <a:cs typeface="Calibri" pitchFamily="34" charset="-120"/>
-              </a:rPr>
-              <a:t>Bigger networks for bigger teams</a:t>
-            </a:r>
-            <a:endParaRPr lang="en-US" sz="1300" dirty="0"/>
-          </a:p>
-          <a:p>
-            <a:pPr marL="0" indent="0" algn="ctr">
-              <a:lnSpc>
-                <a:spcPct val="130000"/>
-              </a:lnSpc>
-              <a:buNone/>
-            </a:pPr>
-            <a:r>
-              <a:rPr lang="en-US" sz="1300" dirty="0">
-                <a:solidFill>
-                  <a:srgbClr val="FFFFFF"/>
-                </a:solidFill>
-                <a:latin typeface="Calibri" pitchFamily="34" charset="0"/>
-                <a:ea typeface="Calibri" pitchFamily="34" charset="-122"/>
-                <a:cs typeface="Calibri" pitchFamily="34" charset="-120"/>
-              </a:rPr>
-              <a:t>Smaller ones for Management,</a:t>
-            </a:r>
-            <a:endParaRPr lang="en-US" sz="1300" dirty="0"/>
-          </a:p>
-          <a:p>
-            <a:pPr marL="0" indent="0" algn="ctr">
-              <a:lnSpc>
-                <a:spcPct val="130000"/>
-              </a:lnSpc>
-              <a:buNone/>
-            </a:pPr>
-            <a:r>
-              <a:rPr lang="en-US" sz="1300" dirty="0">
-                <a:solidFill>
-                  <a:srgbClr val="FFFFFF"/>
-                </a:solidFill>
-                <a:latin typeface="Calibri" pitchFamily="34" charset="0"/>
-                <a:ea typeface="Calibri" pitchFamily="34" charset="-122"/>
-                <a:cs typeface="Calibri" pitchFamily="34" charset="-120"/>
-              </a:rPr>
-              <a:t>Guest and network equipment</a:t>
-            </a:r>
-            <a:endParaRPr lang="en-US" sz="1300" dirty="0"/>
-          </a:p>
-        </p:txBody>
-      </p:sp>
-      <p:sp>
-        <p:nvSpPr>
-          <p:cNvPr id="3" name="Text 5"/>
-          <p:cNvSpPr txBox="1"/>
-          <p:nvPr/>
-        </p:nvSpPr>
-        <p:spPr>
-          <a:xfrm>
-            <a:off x="548640" y="5806440"/>
-            <a:ext cx="11064240" cy="548640"/>
-          </a:xfrm>
-          <a:prstGeom prst="rect">
-            <a:avLst/>
-          </a:prstGeom>
-          <a:noFill/>
-          <a:ln/>
-        </p:spPr>
-        <p:txBody>
-          <a:bodyPr wrap="square" lIns="0" tIns="0" rIns="0" bIns="0" rtlCol="0" anchor="ctr"/>
-          <a:lstStyle/>
-          <a:p>
-            <a:pPr marL="0" indent="0" algn="ctr">
-              <a:buNone/>
-            </a:pPr>
-            <a:r>
-              <a:rPr lang="en-US" sz="1250" i="1" dirty="0">
-                <a:solidFill>
-                  <a:srgbClr val="222222"/>
-                </a:solidFill>
-                <a:latin typeface="Calibri" pitchFamily="34" charset="0"/>
-                <a:ea typeface="Calibri" pitchFamily="34" charset="-122"/>
-                <a:cs typeface="Calibri" pitchFamily="34" charset="-120"/>
-              </a:rPr>
-              <a:t>Think of each VLAN as a department's private street. Addresses are handed out automatically and sized to fit each team, with room to grow.</a:t>
-            </a:r>
-            <a:endParaRPr lang="en-US" sz="1250" dirty="0"/>
-          </a:p>
-        </p:txBody>
-      </p:sp>
-    </p:spTree>
-  </p:cSld>
-  <p:clrMapOvr>
-    <a:masterClrMapping/>
-  </p:clrMapOvr>
-</p:sld>
-</file>
-
 <file path=ppt/slides/slide8.xml><?xml version="1.0" encoding="utf-8"?>
 <p:sld xmlns:a="http://schemas.openxmlformats.org/drawingml/2006/main" xmlns:r="http://schemas.openxmlformats.org/officeDocument/2006/relationships" xmlns:p="http://schemas.openxmlformats.org/presentationml/2006/main">
   <p:cSld name="Slide 8">
@@ -11067,7 +11414,7 @@
               <a:buNone/>
             </a:pPr>
             <a:r>
-              <a:rPr lang="en-US" sz="1900" b="1" dirty="0" smtClean="0">
+              <a:rPr lang="en-US" sz="2000" b="1" dirty="0" smtClean="0">
                 <a:solidFill>
                   <a:srgbClr val="1E2761"/>
                 </a:solidFill>
@@ -11078,7 +11425,7 @@
               <a:t>One </a:t>
             </a:r>
             <a:r>
-              <a:rPr lang="en-US" sz="1900" b="1" dirty="0">
+              <a:rPr lang="en-US" sz="2000" b="1" dirty="0">
                 <a:solidFill>
                   <a:srgbClr val="1E2761"/>
                 </a:solidFill>
@@ -11088,7 +11435,7 @@
               </a:rPr>
               <a:t>WAN link</a:t>
             </a:r>
-            <a:endParaRPr lang="en-US" sz="1900" dirty="0"/>
+            <a:endParaRPr lang="en-US" sz="2000" dirty="0"/>
           </a:p>
         </p:txBody>
       </p:sp>
@@ -11120,7 +11467,7 @@
               <a:buNone/>
             </a:pPr>
             <a:r>
-              <a:rPr lang="en-US" sz="1400" dirty="0">
+              <a:rPr lang="en-US" sz="2000" dirty="0">
                 <a:solidFill>
                   <a:srgbClr val="222222"/>
                 </a:solidFill>
@@ -11131,7 +11478,7 @@
               <a:t>A single dedicated connection joins Nairobi and Eldoret</a:t>
             </a:r>
             <a:r>
-              <a:rPr lang="en-US" sz="1400" dirty="0" smtClean="0">
+              <a:rPr lang="en-US" sz="2000" dirty="0" smtClean="0">
                 <a:solidFill>
                   <a:srgbClr val="222222"/>
                 </a:solidFill>
@@ -11141,7 +11488,7 @@
               </a:rPr>
               <a:t>..</a:t>
             </a:r>
-            <a:endParaRPr lang="en-US" sz="1400" dirty="0"/>
+            <a:endParaRPr lang="en-US" sz="2000" dirty="0"/>
           </a:p>
         </p:txBody>
       </p:sp>
@@ -11178,7 +11525,29 @@
                 <a:ea typeface="Cambria" pitchFamily="34" charset="-122"/>
                 <a:cs typeface="Cambria" pitchFamily="34" charset="-120"/>
               </a:rPr>
-              <a:t>A shared map (OSPF)</a:t>
+              <a:t>A shared </a:t>
+            </a:r>
+            <a:r>
+              <a:rPr lang="en-US" sz="2000" b="1" dirty="0">
+                <a:solidFill>
+                  <a:srgbClr val="1E2761"/>
+                </a:solidFill>
+                <a:latin typeface="Cambria" pitchFamily="34" charset="0"/>
+                <a:ea typeface="Cambria" pitchFamily="34" charset="-122"/>
+                <a:cs typeface="Cambria" pitchFamily="34" charset="-120"/>
+              </a:rPr>
+              <a:t>map</a:t>
+            </a:r>
+            <a:r>
+              <a:rPr lang="en-US" sz="1900" b="1" dirty="0">
+                <a:solidFill>
+                  <a:srgbClr val="1E2761"/>
+                </a:solidFill>
+                <a:latin typeface="Cambria" pitchFamily="34" charset="0"/>
+                <a:ea typeface="Cambria" pitchFamily="34" charset="-122"/>
+                <a:cs typeface="Cambria" pitchFamily="34" charset="-120"/>
+              </a:rPr>
+              <a:t> (OSPF)</a:t>
             </a:r>
             <a:endParaRPr lang="en-US" sz="1900" dirty="0"/>
           </a:p>
@@ -11212,7 +11581,7 @@
               <a:buNone/>
             </a:pPr>
             <a:r>
-              <a:rPr lang="en-US" sz="1400" dirty="0">
+              <a:rPr lang="en-US" sz="2000" dirty="0">
                 <a:solidFill>
                   <a:srgbClr val="222222"/>
                 </a:solidFill>
@@ -11222,7 +11591,7 @@
               </a:rPr>
               <a:t>Every router tells its neighbours what it can reach, so each one learns the route to every department in both offices.</a:t>
             </a:r>
-            <a:endParaRPr lang="en-US" sz="1400" dirty="0"/>
+            <a:endParaRPr lang="en-US" sz="2000" dirty="0"/>
           </a:p>
         </p:txBody>
       </p:sp>
@@ -11251,7 +11620,7 @@
               <a:buNone/>
             </a:pPr>
             <a:r>
-              <a:rPr lang="en-US" sz="1900" b="1" dirty="0">
+              <a:rPr lang="en-US" sz="2000" b="1" dirty="0">
                 <a:solidFill>
                   <a:srgbClr val="1E2761"/>
                 </a:solidFill>
@@ -11261,7 +11630,7 @@
               </a:rPr>
               <a:t>Self-updating</a:t>
             </a:r>
-            <a:endParaRPr lang="en-US" sz="1900" dirty="0"/>
+            <a:endParaRPr lang="en-US" sz="2000" dirty="0"/>
           </a:p>
         </p:txBody>
       </p:sp>
@@ -11293,7 +11662,7 @@
               <a:buNone/>
             </a:pPr>
             <a:r>
-              <a:rPr lang="en-US" sz="1400" dirty="0">
+              <a:rPr lang="en-US" sz="2000" dirty="0">
                 <a:solidFill>
                   <a:srgbClr val="222222"/>
                 </a:solidFill>
@@ -11303,7 +11672,7 @@
               </a:rPr>
               <a:t>If a path changes, the routers update their map automatically. Nothing is re-entered by hand.</a:t>
             </a:r>
-            <a:endParaRPr lang="en-US" sz="1400" dirty="0"/>
+            <a:endParaRPr lang="en-US" sz="2000" dirty="0"/>
           </a:p>
         </p:txBody>
       </p:sp>
@@ -11317,7 +11686,7 @@
 
 <file path=ppt/slides/slide9.xml><?xml version="1.0" encoding="utf-8"?>
 <p:sld xmlns:a="http://schemas.openxmlformats.org/drawingml/2006/main" xmlns:r="http://schemas.openxmlformats.org/officeDocument/2006/relationships" xmlns:p="http://schemas.openxmlformats.org/presentationml/2006/main">
-  <p:cSld name="Slide 9">
+  <p:cSld name="Slide 10">
     <p:bg>
       <p:bgPr>
         <a:solidFill>
@@ -11373,7 +11742,7 @@
                 <a:ea typeface="Cambria" pitchFamily="34" charset="-122"/>
                 <a:cs typeface="Cambria" pitchFamily="34" charset="-120"/>
               </a:rPr>
-              <a:t>Automatic Addresses: DHCP</a:t>
+              <a:t>Redundancy: HSRP &amp; EtherChannel</a:t>
             </a:r>
             <a:endParaRPr lang="en-US" sz="3000" dirty="0"/>
           </a:p>
@@ -11387,30 +11756,30 @@
         </p:nvSpPr>
         <p:spPr>
           <a:xfrm>
-            <a:off x="548640" y="1554480"/>
-            <a:ext cx="2377440" cy="1371600"/>
+            <a:off x="548640" y="1463040"/>
+            <a:ext cx="5394960" cy="4114800"/>
           </a:xfrm>
           <a:prstGeom prst="roundRect">
             <a:avLst>
-              <a:gd name="adj" fmla="val 6667"/>
+              <a:gd name="adj" fmla="val 2667"/>
             </a:avLst>
           </a:prstGeom>
           <a:solidFill>
-            <a:srgbClr val="1E2761"/>
+            <a:srgbClr val="CADCFC"/>
           </a:solidFill>
           <a:ln/>
         </p:spPr>
       </p:sp>
       <p:sp>
         <p:nvSpPr>
-          <p:cNvPr id="4" name="Text 2"/>
+          <p:cNvPr id="6" name="Text 3"/>
           <p:cNvSpPr txBox="1"/>
           <p:nvPr/>
         </p:nvSpPr>
         <p:spPr>
           <a:xfrm>
-            <a:off x="685800" y="1554480"/>
-            <a:ext cx="2103120" cy="1371600"/>
+            <a:off x="91440" y="1965960"/>
+            <a:ext cx="5394960" cy="457200"/>
           </a:xfrm>
           <a:prstGeom prst="rect">
             <a:avLst/>
@@ -11426,30 +11795,30 @@
               <a:buNone/>
             </a:pPr>
             <a:r>
-              <a:rPr lang="en-US" sz="1500" b="1" dirty="0">
+              <a:rPr lang="en-US" sz="2000" b="1" dirty="0">
                 <a:solidFill>
-                  <a:srgbClr val="FFFFFF"/>
+                  <a:srgbClr val="1E2761"/>
                 </a:solidFill>
-                <a:latin typeface="Calibri" pitchFamily="34" charset="0"/>
-                <a:ea typeface="Calibri" pitchFamily="34" charset="-122"/>
-                <a:cs typeface="Calibri" pitchFamily="34" charset="-120"/>
+                <a:latin typeface="Cambria" pitchFamily="34" charset="0"/>
+                <a:ea typeface="Cambria" pitchFamily="34" charset="-122"/>
+                <a:cs typeface="Cambria" pitchFamily="34" charset="-120"/>
               </a:rPr>
-              <a:t>1  Device plugs in</a:t>
+              <a:t>Backup Router (HSRP)</a:t>
             </a:r>
-            <a:endParaRPr lang="en-US" sz="1500" dirty="0"/>
+            <a:endParaRPr lang="en-US" sz="2000" dirty="0"/>
           </a:p>
         </p:txBody>
       </p:sp>
       <p:sp>
         <p:nvSpPr>
-          <p:cNvPr id="5" name="Text 3"/>
+          <p:cNvPr id="7" name="Text 4"/>
           <p:cNvSpPr txBox="1"/>
           <p:nvPr/>
         </p:nvSpPr>
         <p:spPr>
           <a:xfrm>
-            <a:off x="2926080" y="1783080"/>
-            <a:ext cx="457200" cy="914400"/>
+            <a:off x="1005840" y="2423160"/>
+            <a:ext cx="4480560" cy="2011680"/>
           </a:xfrm>
           <a:prstGeom prst="rect">
             <a:avLst/>
@@ -11461,336 +11830,14 @@
           <a:bodyPr wrap="square" lIns="0" tIns="0" rIns="0" bIns="0" rtlCol="0" anchor="ctr"/>
           <a:lstStyle/>
           <a:p>
-            <a:pPr marL="0" indent="0" algn="ctr">
-              <a:buNone/>
-            </a:pPr>
-            <a:r>
-              <a:rPr lang="en-US" sz="2800" b="1" dirty="0">
-                <a:solidFill>
-                  <a:srgbClr val="1E2761"/>
-                </a:solidFill>
-                <a:latin typeface="Calibri" pitchFamily="34" charset="0"/>
-                <a:ea typeface="Calibri" pitchFamily="34" charset="-122"/>
-                <a:cs typeface="Calibri" pitchFamily="34" charset="-120"/>
-              </a:rPr>
-              <a:t>→</a:t>
-            </a:r>
-            <a:endParaRPr lang="en-US" sz="2800" dirty="0"/>
-          </a:p>
-        </p:txBody>
-      </p:sp>
-      <p:sp>
-        <p:nvSpPr>
-          <p:cNvPr id="6" name="Shape 4"/>
-          <p:cNvSpPr/>
-          <p:nvPr/>
-        </p:nvSpPr>
-        <p:spPr>
-          <a:xfrm>
-            <a:off x="3383280" y="1554480"/>
-            <a:ext cx="2377440" cy="1371600"/>
-          </a:xfrm>
-          <a:prstGeom prst="roundRect">
-            <a:avLst>
-              <a:gd name="adj" fmla="val 6667"/>
-            </a:avLst>
-          </a:prstGeom>
-          <a:solidFill>
-            <a:srgbClr val="1E2761"/>
-          </a:solidFill>
-          <a:ln/>
-        </p:spPr>
-      </p:sp>
-      <p:sp>
-        <p:nvSpPr>
-          <p:cNvPr id="7" name="Text 5"/>
-          <p:cNvSpPr txBox="1"/>
-          <p:nvPr/>
-        </p:nvSpPr>
-        <p:spPr>
-          <a:xfrm>
-            <a:off x="3520440" y="1554480"/>
-            <a:ext cx="2103120" cy="1371600"/>
-          </a:xfrm>
-          <a:prstGeom prst="rect">
-            <a:avLst/>
-          </a:prstGeom>
-          <a:noFill/>
-          <a:ln/>
-        </p:spPr>
-        <p:txBody>
-          <a:bodyPr wrap="square" lIns="0" tIns="0" rIns="0" bIns="0" rtlCol="0" anchor="ctr"/>
-          <a:lstStyle/>
-          <a:p>
-            <a:pPr marL="0" indent="0" algn="ctr">
-              <a:buNone/>
-            </a:pPr>
-            <a:r>
-              <a:rPr lang="en-US" sz="1500" b="1" dirty="0">
-                <a:solidFill>
-                  <a:srgbClr val="FFFFFF"/>
-                </a:solidFill>
-                <a:latin typeface="Calibri" pitchFamily="34" charset="0"/>
-                <a:ea typeface="Calibri" pitchFamily="34" charset="-122"/>
-                <a:cs typeface="Calibri" pitchFamily="34" charset="-120"/>
-              </a:rPr>
-              <a:t>2  Asks the router for an address</a:t>
-            </a:r>
-            <a:endParaRPr lang="en-US" sz="1500" dirty="0"/>
-          </a:p>
-        </p:txBody>
-      </p:sp>
-      <p:sp>
-        <p:nvSpPr>
-          <p:cNvPr id="8" name="Text 6"/>
-          <p:cNvSpPr txBox="1"/>
-          <p:nvPr/>
-        </p:nvSpPr>
-        <p:spPr>
-          <a:xfrm>
-            <a:off x="5760720" y="1783080"/>
-            <a:ext cx="457200" cy="914400"/>
-          </a:xfrm>
-          <a:prstGeom prst="rect">
-            <a:avLst/>
-          </a:prstGeom>
-          <a:noFill/>
-          <a:ln/>
-        </p:spPr>
-        <p:txBody>
-          <a:bodyPr wrap="square" lIns="0" tIns="0" rIns="0" bIns="0" rtlCol="0" anchor="ctr"/>
-          <a:lstStyle/>
-          <a:p>
-            <a:pPr marL="0" indent="0" algn="ctr">
-              <a:buNone/>
-            </a:pPr>
-            <a:r>
-              <a:rPr lang="en-US" sz="2800" b="1" dirty="0">
-                <a:solidFill>
-                  <a:srgbClr val="1E2761"/>
-                </a:solidFill>
-                <a:latin typeface="Calibri" pitchFamily="34" charset="0"/>
-                <a:ea typeface="Calibri" pitchFamily="34" charset="-122"/>
-                <a:cs typeface="Calibri" pitchFamily="34" charset="-120"/>
-              </a:rPr>
-              <a:t>→</a:t>
-            </a:r>
-            <a:endParaRPr lang="en-US" sz="2800" dirty="0"/>
-          </a:p>
-        </p:txBody>
-      </p:sp>
-      <p:sp>
-        <p:nvSpPr>
-          <p:cNvPr id="9" name="Shape 7"/>
-          <p:cNvSpPr/>
-          <p:nvPr/>
-        </p:nvSpPr>
-        <p:spPr>
-          <a:xfrm>
-            <a:off x="6217920" y="1554480"/>
-            <a:ext cx="2377440" cy="1371600"/>
-          </a:xfrm>
-          <a:prstGeom prst="roundRect">
-            <a:avLst>
-              <a:gd name="adj" fmla="val 6667"/>
-            </a:avLst>
-          </a:prstGeom>
-          <a:solidFill>
-            <a:srgbClr val="1E2761"/>
-          </a:solidFill>
-          <a:ln/>
-        </p:spPr>
-      </p:sp>
-      <p:sp>
-        <p:nvSpPr>
-          <p:cNvPr id="10" name="Text 8"/>
-          <p:cNvSpPr txBox="1"/>
-          <p:nvPr/>
-        </p:nvSpPr>
-        <p:spPr>
-          <a:xfrm>
-            <a:off x="6355080" y="1554480"/>
-            <a:ext cx="2103120" cy="1371600"/>
-          </a:xfrm>
-          <a:prstGeom prst="rect">
-            <a:avLst/>
-          </a:prstGeom>
-          <a:noFill/>
-          <a:ln/>
-        </p:spPr>
-        <p:txBody>
-          <a:bodyPr wrap="square" lIns="0" tIns="0" rIns="0" bIns="0" rtlCol="0" anchor="ctr"/>
-          <a:lstStyle/>
-          <a:p>
-            <a:pPr marL="0" indent="0" algn="ctr">
-              <a:buNone/>
-            </a:pPr>
-            <a:r>
-              <a:rPr lang="en-US" sz="1500" b="1" dirty="0">
-                <a:solidFill>
-                  <a:srgbClr val="FFFFFF"/>
-                </a:solidFill>
-                <a:latin typeface="Calibri" pitchFamily="34" charset="0"/>
-                <a:ea typeface="Calibri" pitchFamily="34" charset="-122"/>
-                <a:cs typeface="Calibri" pitchFamily="34" charset="-120"/>
-              </a:rPr>
-              <a:t>3  Router offers the next free one</a:t>
-            </a:r>
-            <a:endParaRPr lang="en-US" sz="1500" dirty="0"/>
-          </a:p>
-        </p:txBody>
-      </p:sp>
-      <p:sp>
-        <p:nvSpPr>
-          <p:cNvPr id="11" name="Text 9"/>
-          <p:cNvSpPr txBox="1"/>
-          <p:nvPr/>
-        </p:nvSpPr>
-        <p:spPr>
-          <a:xfrm>
-            <a:off x="8595360" y="1783080"/>
-            <a:ext cx="457200" cy="914400"/>
-          </a:xfrm>
-          <a:prstGeom prst="rect">
-            <a:avLst/>
-          </a:prstGeom>
-          <a:noFill/>
-          <a:ln/>
-        </p:spPr>
-        <p:txBody>
-          <a:bodyPr wrap="square" lIns="0" tIns="0" rIns="0" bIns="0" rtlCol="0" anchor="ctr"/>
-          <a:lstStyle/>
-          <a:p>
-            <a:pPr marL="0" indent="0" algn="ctr">
-              <a:buNone/>
-            </a:pPr>
-            <a:r>
-              <a:rPr lang="en-US" sz="2800" b="1" dirty="0">
-                <a:solidFill>
-                  <a:srgbClr val="1E2761"/>
-                </a:solidFill>
-                <a:latin typeface="Calibri" pitchFamily="34" charset="0"/>
-                <a:ea typeface="Calibri" pitchFamily="34" charset="-122"/>
-                <a:cs typeface="Calibri" pitchFamily="34" charset="-120"/>
-              </a:rPr>
-              <a:t>→</a:t>
-            </a:r>
-            <a:endParaRPr lang="en-US" sz="2800" dirty="0"/>
-          </a:p>
-        </p:txBody>
-      </p:sp>
-      <p:sp>
-        <p:nvSpPr>
-          <p:cNvPr id="12" name="Shape 10"/>
-          <p:cNvSpPr/>
-          <p:nvPr/>
-        </p:nvSpPr>
-        <p:spPr>
-          <a:xfrm>
-            <a:off x="9052560" y="1554480"/>
-            <a:ext cx="2377440" cy="1371600"/>
-          </a:xfrm>
-          <a:prstGeom prst="roundRect">
-            <a:avLst>
-              <a:gd name="adj" fmla="val 6667"/>
-            </a:avLst>
-          </a:prstGeom>
-          <a:solidFill>
-            <a:srgbClr val="1E2761"/>
-          </a:solidFill>
-          <a:ln/>
-        </p:spPr>
-      </p:sp>
-      <p:sp>
-        <p:nvSpPr>
-          <p:cNvPr id="13" name="Text 11"/>
-          <p:cNvSpPr txBox="1"/>
-          <p:nvPr/>
-        </p:nvSpPr>
-        <p:spPr>
-          <a:xfrm>
-            <a:off x="9189720" y="1554480"/>
-            <a:ext cx="2103120" cy="1371600"/>
-          </a:xfrm>
-          <a:prstGeom prst="rect">
-            <a:avLst/>
-          </a:prstGeom>
-          <a:noFill/>
-          <a:ln/>
-        </p:spPr>
-        <p:txBody>
-          <a:bodyPr wrap="square" lIns="0" tIns="0" rIns="0" bIns="0" rtlCol="0" anchor="ctr"/>
-          <a:lstStyle/>
-          <a:p>
-            <a:pPr marL="0" indent="0" algn="ctr">
-              <a:buNone/>
-            </a:pPr>
-            <a:r>
-              <a:rPr lang="en-US" sz="1500" b="1" dirty="0">
-                <a:solidFill>
-                  <a:srgbClr val="FFFFFF"/>
-                </a:solidFill>
-                <a:latin typeface="Calibri" pitchFamily="34" charset="0"/>
-                <a:ea typeface="Calibri" pitchFamily="34" charset="-122"/>
-                <a:cs typeface="Calibri" pitchFamily="34" charset="-120"/>
-              </a:rPr>
-              <a:t>4  Device is ready to work</a:t>
-            </a:r>
-            <a:endParaRPr lang="en-US" sz="1500" dirty="0"/>
-          </a:p>
-        </p:txBody>
-      </p:sp>
-      <p:sp>
-        <p:nvSpPr>
-          <p:cNvPr id="14" name="Shape 12"/>
-          <p:cNvSpPr/>
-          <p:nvPr/>
-        </p:nvSpPr>
-        <p:spPr>
-          <a:xfrm>
-            <a:off x="548640" y="3474720"/>
-            <a:ext cx="11064240" cy="2103120"/>
-          </a:xfrm>
-          <a:prstGeom prst="roundRect">
-            <a:avLst>
-              <a:gd name="adj" fmla="val 4348"/>
-            </a:avLst>
-          </a:prstGeom>
-          <a:solidFill>
-            <a:srgbClr val="CADCFC"/>
-          </a:solidFill>
-          <a:ln/>
-        </p:spPr>
-      </p:sp>
-      <p:sp>
-        <p:nvSpPr>
-          <p:cNvPr id="16" name="Text 14"/>
-          <p:cNvSpPr txBox="1"/>
-          <p:nvPr/>
-        </p:nvSpPr>
-        <p:spPr>
-          <a:xfrm>
-            <a:off x="685800" y="3687625"/>
-            <a:ext cx="10332720" cy="1280160"/>
-          </a:xfrm>
-          <a:prstGeom prst="rect">
-            <a:avLst/>
-          </a:prstGeom>
-          <a:noFill/>
-          <a:ln/>
-        </p:spPr>
-        <p:txBody>
-          <a:bodyPr wrap="square" lIns="0" tIns="0" rIns="0" bIns="0" rtlCol="0" anchor="ctr"/>
-          <a:lstStyle/>
-          <a:p>
-            <a:pPr marL="0" indent="0">
+            <a:pPr marL="0" indent="0" algn="l">
               <a:lnSpc>
                 <a:spcPct val="125000"/>
               </a:lnSpc>
               <a:buNone/>
             </a:pPr>
             <a:r>
-              <a:rPr lang="en-US" sz="1400" dirty="0">
+              <a:rPr lang="en-US" sz="2000" dirty="0">
                 <a:solidFill>
                   <a:srgbClr val="222222"/>
                 </a:solidFill>
@@ -11798,9 +11845,112 @@
                 <a:ea typeface="Calibri" pitchFamily="34" charset="-122"/>
                 <a:cs typeface="Calibri" pitchFamily="34" charset="-120"/>
               </a:rPr>
-              <a:t>The shared gateway, the two routers, the file server and the network equipment keep fixed addresses so they can always be found. Everything else, such as PCs and laptops, takes whatever is free, so no one has to type an address by hand.</a:t>
+              <a:t>Each office has two routers sharing one address, like a duty-desk phone number. If the main router fails, the backup answers the same number within seconds and nobody has to change anything.</a:t>
             </a:r>
-            <a:endParaRPr lang="en-US" sz="1400" dirty="0"/>
+            <a:endParaRPr lang="en-US" sz="2000" dirty="0"/>
+          </a:p>
+        </p:txBody>
+      </p:sp>
+      <p:sp>
+        <p:nvSpPr>
+          <p:cNvPr id="8" name="Shape 5"/>
+          <p:cNvSpPr/>
+          <p:nvPr/>
+        </p:nvSpPr>
+        <p:spPr>
+          <a:xfrm>
+            <a:off x="6217920" y="1463040"/>
+            <a:ext cx="5394960" cy="4114800"/>
+          </a:xfrm>
+          <a:prstGeom prst="roundRect">
+            <a:avLst>
+              <a:gd name="adj" fmla="val 2667"/>
+            </a:avLst>
+          </a:prstGeom>
+          <a:solidFill>
+            <a:srgbClr val="CADCFC"/>
+          </a:solidFill>
+          <a:ln/>
+        </p:spPr>
+      </p:sp>
+      <p:sp>
+        <p:nvSpPr>
+          <p:cNvPr id="11" name="Text 7"/>
+          <p:cNvSpPr txBox="1"/>
+          <p:nvPr/>
+        </p:nvSpPr>
+        <p:spPr>
+          <a:xfrm>
+            <a:off x="5943600" y="2057400"/>
+            <a:ext cx="5394960" cy="457200"/>
+          </a:xfrm>
+          <a:prstGeom prst="rect">
+            <a:avLst/>
+          </a:prstGeom>
+          <a:noFill/>
+          <a:ln/>
+        </p:spPr>
+        <p:txBody>
+          <a:bodyPr wrap="square" lIns="0" tIns="0" rIns="0" bIns="0" rtlCol="0" anchor="ctr"/>
+          <a:lstStyle/>
+          <a:p>
+            <a:pPr marL="0" indent="0" algn="ctr">
+              <a:buNone/>
+            </a:pPr>
+            <a:r>
+              <a:rPr lang="en-US" sz="2000" b="1" dirty="0">
+                <a:solidFill>
+                  <a:srgbClr val="1E2761"/>
+                </a:solidFill>
+                <a:latin typeface="Cambria" pitchFamily="34" charset="0"/>
+                <a:ea typeface="Cambria" pitchFamily="34" charset="-122"/>
+                <a:cs typeface="Cambria" pitchFamily="34" charset="-120"/>
+              </a:rPr>
+              <a:t>Double Cable (EtherChannel)</a:t>
+            </a:r>
+            <a:endParaRPr lang="en-US" sz="2000" dirty="0"/>
+          </a:p>
+        </p:txBody>
+      </p:sp>
+      <p:sp>
+        <p:nvSpPr>
+          <p:cNvPr id="12" name="Text 8"/>
+          <p:cNvSpPr txBox="1"/>
+          <p:nvPr/>
+        </p:nvSpPr>
+        <p:spPr>
+          <a:xfrm>
+            <a:off x="6538642" y="2423160"/>
+            <a:ext cx="4480560" cy="2011680"/>
+          </a:xfrm>
+          <a:prstGeom prst="rect">
+            <a:avLst/>
+          </a:prstGeom>
+          <a:noFill/>
+          <a:ln/>
+        </p:spPr>
+        <p:txBody>
+          <a:bodyPr wrap="square" lIns="0" tIns="0" rIns="0" bIns="0" rtlCol="0" anchor="ctr"/>
+          <a:lstStyle/>
+          <a:p>
+            <a:pPr marL="0" indent="0" algn="l">
+              <a:lnSpc>
+                <a:spcPct val="125000"/>
+              </a:lnSpc>
+              <a:buNone/>
+            </a:pPr>
+            <a:r>
+              <a:rPr lang="en-US" sz="2000" dirty="0">
+                <a:solidFill>
+                  <a:srgbClr val="222222"/>
+                </a:solidFill>
+                <a:latin typeface="Calibri" pitchFamily="34" charset="0"/>
+                <a:ea typeface="Calibri" pitchFamily="34" charset="-122"/>
+                <a:cs typeface="Calibri" pitchFamily="34" charset="-120"/>
+              </a:rPr>
+              <a:t>Two cables between each office's switches work as one wide road. If one cable is cut, traffic keeps flowing on the other with no interruption.</a:t>
+            </a:r>
+            <a:endParaRPr lang="en-US" sz="2000" dirty="0"/>
           </a:p>
         </p:txBody>
       </p:sp>

--- a/KIBET_ANNETTE_CCNA3Project.pptx
+++ b/KIBET_ANNETTE_CCNA3Project.pptx
@@ -1953,6 +1953,13 @@
   <p:clrMapOvr>
     <a:masterClrMapping/>
   </p:clrMapOvr>
+  <p:timing>
+    <p:tnLst>
+      <p:par>
+        <p:cTn id="1" dur="indefinite" restart="never" nodeType="tmRoot"/>
+      </p:par>
+    </p:tnLst>
+  </p:timing>
 </p:sld>
 </file>
 
@@ -2437,6 +2444,13 @@
   <p:clrMapOvr>
     <a:masterClrMapping/>
   </p:clrMapOvr>
+  <p:timing>
+    <p:tnLst>
+      <p:par>
+        <p:cTn id="1" dur="indefinite" restart="never" nodeType="tmRoot"/>
+      </p:par>
+    </p:tnLst>
+  </p:timing>
 </p:sld>
 </file>
 
@@ -2762,6 +2776,13 @@
   <p:clrMapOvr>
     <a:masterClrMapping/>
   </p:clrMapOvr>
+  <p:timing>
+    <p:tnLst>
+      <p:par>
+        <p:cTn id="1" dur="indefinite" restart="never" nodeType="tmRoot"/>
+      </p:par>
+    </p:tnLst>
+  </p:timing>
 </p:sld>
 </file>
 
@@ -2860,7 +2881,7 @@
         <p:spPr>
           <a:xfrm>
             <a:off x="685800" y="1554480"/>
-            <a:ext cx="2103120" cy="1371600"/>
+            <a:ext cx="2103120" cy="1523090"/>
           </a:xfrm>
           <a:prstGeom prst="rect">
             <a:avLst/>
@@ -2876,17 +2897,31 @@
               <a:buNone/>
             </a:pPr>
             <a:r>
-              <a:rPr lang="en-US" sz="2000" b="1" dirty="0">
+              <a:rPr lang="en-US" sz="2000" dirty="0" smtClean="0">
                 <a:solidFill>
-                  <a:srgbClr val="FFFFFF"/>
+                  <a:schemeClr val="bg1"/>
                 </a:solidFill>
-                <a:latin typeface="Calibri" pitchFamily="34" charset="0"/>
-                <a:ea typeface="Calibri" pitchFamily="34" charset="-122"/>
-                <a:cs typeface="Calibri" pitchFamily="34" charset="-120"/>
               </a:rPr>
-              <a:t>1  Device plugs in</a:t>
-            </a:r>
-            <a:endParaRPr lang="en-US" sz="2000" dirty="0"/>
+              <a:t>DISCOVER</a:t>
+            </a:r>
+          </a:p>
+          <a:p>
+            <a:pPr marL="0" indent="0" algn="ctr">
+              <a:buNone/>
+            </a:pPr>
+            <a:r>
+              <a:rPr lang="en-US" sz="2000" dirty="0" smtClean="0">
+                <a:solidFill>
+                  <a:schemeClr val="bg1"/>
+                </a:solidFill>
+              </a:rPr>
+              <a:t>The pc broadcasts a request asking for a DHCP server.</a:t>
+            </a:r>
+            <a:endParaRPr lang="en-US" sz="2000" dirty="0">
+              <a:solidFill>
+                <a:schemeClr val="bg1"/>
+              </a:solidFill>
+            </a:endParaRPr>
           </a:p>
         </p:txBody>
       </p:sp>
@@ -2959,8 +2994,8 @@
         </p:nvSpPr>
         <p:spPr>
           <a:xfrm>
-            <a:off x="3520440" y="1554480"/>
-            <a:ext cx="2103120" cy="1371600"/>
+            <a:off x="3520440" y="1402990"/>
+            <a:ext cx="2103120" cy="1523090"/>
           </a:xfrm>
           <a:prstGeom prst="rect">
             <a:avLst/>
@@ -2976,7 +3011,7 @@
               <a:buNone/>
             </a:pPr>
             <a:r>
-              <a:rPr lang="en-US" sz="2000" b="1" dirty="0">
+              <a:rPr lang="en-US" sz="2000" b="1" dirty="0" smtClean="0">
                 <a:solidFill>
                   <a:srgbClr val="FFFFFF"/>
                 </a:solidFill>
@@ -2984,9 +3019,26 @@
                 <a:ea typeface="Calibri" pitchFamily="34" charset="-122"/>
                 <a:cs typeface="Calibri" pitchFamily="34" charset="-120"/>
               </a:rPr>
-              <a:t>2  Asks the router for an address</a:t>
-            </a:r>
-            <a:endParaRPr lang="en-US" sz="2000" dirty="0"/>
+              <a:t>OFFER</a:t>
+            </a:r>
+          </a:p>
+          <a:p>
+            <a:pPr marL="0" indent="0" algn="ctr">
+              <a:buNone/>
+            </a:pPr>
+            <a:r>
+              <a:rPr lang="en-US" sz="2000" dirty="0" smtClean="0">
+                <a:solidFill>
+                  <a:schemeClr val="bg1"/>
+                </a:solidFill>
+              </a:rPr>
+              <a:t>R1 offers the pc an available IP address</a:t>
+            </a:r>
+            <a:endParaRPr lang="en-US" sz="2000" dirty="0">
+              <a:solidFill>
+                <a:schemeClr val="bg1"/>
+              </a:solidFill>
+            </a:endParaRPr>
           </a:p>
         </p:txBody>
       </p:sp>
@@ -3059,8 +3111,8 @@
         </p:nvSpPr>
         <p:spPr>
           <a:xfrm>
-            <a:off x="6355080" y="1554480"/>
-            <a:ext cx="2103120" cy="1371600"/>
+            <a:off x="6355080" y="1218745"/>
+            <a:ext cx="2103120" cy="1858825"/>
           </a:xfrm>
           <a:prstGeom prst="rect">
             <a:avLst/>
@@ -3076,17 +3128,29 @@
               <a:buNone/>
             </a:pPr>
             <a:r>
-              <a:rPr lang="en-US" sz="2000" b="1" dirty="0">
+              <a:rPr lang="en-US" sz="2000" dirty="0" smtClean="0">
                 <a:solidFill>
-                  <a:srgbClr val="FFFFFF"/>
+                  <a:schemeClr val="bg1"/>
                 </a:solidFill>
-                <a:latin typeface="Calibri" pitchFamily="34" charset="0"/>
-                <a:ea typeface="Calibri" pitchFamily="34" charset="-122"/>
-                <a:cs typeface="Calibri" pitchFamily="34" charset="-120"/>
               </a:rPr>
-              <a:t>3  Router offers the next free one</a:t>
-            </a:r>
-            <a:endParaRPr lang="en-US" sz="2000" dirty="0"/>
+              <a:t>REQUEST</a:t>
+            </a:r>
+          </a:p>
+          <a:p>
+            <a:pPr algn="ctr"/>
+            <a:r>
+              <a:rPr lang="en-US" sz="2000" dirty="0">
+                <a:solidFill>
+                  <a:schemeClr val="bg1"/>
+                </a:solidFill>
+              </a:rPr>
+              <a:t>The PC requests the offered address.</a:t>
+            </a:r>
+            <a:endParaRPr lang="en-US" sz="2000" dirty="0">
+              <a:solidFill>
+                <a:schemeClr val="bg1"/>
+              </a:solidFill>
+            </a:endParaRPr>
           </a:p>
         </p:txBody>
       </p:sp>
@@ -3160,7 +3224,7 @@
         <p:spPr>
           <a:xfrm>
             <a:off x="9189720" y="1554480"/>
-            <a:ext cx="2103120" cy="1371600"/>
+            <a:ext cx="2240280" cy="1371600"/>
           </a:xfrm>
           <a:prstGeom prst="rect">
             <a:avLst/>
@@ -3176,17 +3240,32 @@
               <a:buNone/>
             </a:pPr>
             <a:r>
-              <a:rPr lang="en-US" sz="2000" b="1" dirty="0">
+              <a:rPr lang="en-US" sz="2000" b="1" dirty="0" smtClean="0">
                 <a:solidFill>
-                  <a:srgbClr val="FFFFFF"/>
+                  <a:schemeClr val="bg1"/>
                 </a:solidFill>
                 <a:latin typeface="Calibri" pitchFamily="34" charset="0"/>
                 <a:ea typeface="Calibri" pitchFamily="34" charset="-122"/>
                 <a:cs typeface="Calibri" pitchFamily="34" charset="-120"/>
               </a:rPr>
-              <a:t>4  Device is ready to work</a:t>
-            </a:r>
-            <a:endParaRPr lang="en-US" sz="2000" dirty="0"/>
+              <a:t>ACKNOWLEDGE</a:t>
+            </a:r>
+          </a:p>
+          <a:p>
+            <a:pPr algn="ctr"/>
+            <a:r>
+              <a:rPr lang="en-US" sz="2000" dirty="0">
+                <a:solidFill>
+                  <a:schemeClr val="bg1"/>
+                </a:solidFill>
+              </a:rPr>
+              <a:t>R1 confirms the lease, and the PC can use the address</a:t>
+            </a:r>
+            <a:endParaRPr lang="en-US" sz="2000" dirty="0">
+              <a:solidFill>
+                <a:schemeClr val="bg1"/>
+              </a:solidFill>
+            </a:endParaRPr>
           </a:p>
         </p:txBody>
       </p:sp>
@@ -3259,6 +3338,13 @@
   <p:clrMapOvr>
     <a:masterClrMapping/>
   </p:clrMapOvr>
+  <p:timing>
+    <p:tnLst>
+      <p:par>
+        <p:cTn id="1" dur="indefinite" restart="never" nodeType="tmRoot"/>
+      </p:par>
+    </p:tnLst>
+  </p:timing>
 </p:sld>
 </file>
 
@@ -4373,6 +4459,13 @@
   <p:clrMapOvr>
     <a:masterClrMapping/>
   </p:clrMapOvr>
+  <p:timing>
+    <p:tnLst>
+      <p:par>
+        <p:cTn id="1" dur="indefinite" restart="never" nodeType="tmRoot"/>
+      </p:par>
+    </p:tnLst>
+  </p:timing>
 </p:sld>
 </file>
 
@@ -4484,6 +4577,13 @@
   <p:clrMapOvr>
     <a:masterClrMapping/>
   </p:clrMapOvr>
+  <p:timing>
+    <p:tnLst>
+      <p:par>
+        <p:cTn id="1" dur="indefinite" restart="never" nodeType="tmRoot"/>
+      </p:par>
+    </p:tnLst>
+  </p:timing>
 </p:sld>
 </file>
 
@@ -5134,6 +5234,13 @@
   <p:clrMapOvr>
     <a:masterClrMapping/>
   </p:clrMapOvr>
+  <p:timing>
+    <p:tnLst>
+      <p:par>
+        <p:cTn id="1" dur="indefinite" restart="never" nodeType="tmRoot"/>
+      </p:par>
+    </p:tnLst>
+  </p:timing>
 </p:sld>
 </file>
 
@@ -5618,6 +5725,13 @@
   <p:clrMapOvr>
     <a:masterClrMapping/>
   </p:clrMapOvr>
+  <p:timing>
+    <p:tnLst>
+      <p:par>
+        <p:cTn id="1" dur="indefinite" restart="never" nodeType="tmRoot"/>
+      </p:par>
+    </p:tnLst>
+  </p:timing>
 </p:sld>
 </file>
 
@@ -6580,6 +6694,13 @@
   <p:clrMapOvr>
     <a:masterClrMapping/>
   </p:clrMapOvr>
+  <p:timing>
+    <p:tnLst>
+      <p:par>
+        <p:cTn id="1" dur="indefinite" restart="never" nodeType="tmRoot"/>
+      </p:par>
+    </p:tnLst>
+  </p:timing>
 </p:sld>
 </file>
 
@@ -8410,6 +8531,13 @@
   <p:clrMapOvr>
     <a:masterClrMapping/>
   </p:clrMapOvr>
+  <p:timing>
+    <p:tnLst>
+      <p:par>
+        <p:cTn id="1" dur="indefinite" restart="never" nodeType="tmRoot"/>
+      </p:par>
+    </p:tnLst>
+  </p:timing>
 </p:sld>
 </file>
 
@@ -9091,6 +9219,13 @@
   <p:clrMapOvr>
     <a:masterClrMapping/>
   </p:clrMapOvr>
+  <p:timing>
+    <p:tnLst>
+      <p:par>
+        <p:cTn id="1" dur="indefinite" restart="never" nodeType="tmRoot"/>
+      </p:par>
+    </p:tnLst>
+  </p:timing>
 </p:sld>
 </file>
 
@@ -11322,6 +11457,13 @@
   <p:clrMapOvr>
     <a:masterClrMapping/>
   </p:clrMapOvr>
+  <p:timing>
+    <p:tnLst>
+      <p:par>
+        <p:cTn id="1" dur="indefinite" restart="never" nodeType="tmRoot"/>
+      </p:par>
+    </p:tnLst>
+  </p:timing>
 </p:sld>
 </file>
 
@@ -11681,6 +11823,13 @@
   <p:clrMapOvr>
     <a:masterClrMapping/>
   </p:clrMapOvr>
+  <p:timing>
+    <p:tnLst>
+      <p:par>
+        <p:cTn id="1" dur="indefinite" restart="never" nodeType="tmRoot"/>
+      </p:par>
+    </p:tnLst>
+  </p:timing>
 </p:sld>
 </file>
 
@@ -11959,6 +12108,13 @@
   <p:clrMapOvr>
     <a:masterClrMapping/>
   </p:clrMapOvr>
+  <p:timing>
+    <p:tnLst>
+      <p:par>
+        <p:cTn id="1" dur="indefinite" restart="never" nodeType="tmRoot"/>
+      </p:par>
+    </p:tnLst>
+  </p:timing>
 </p:sld>
 </file>
 
